--- a/ws02/class/ws02_slide_class1.pptx
+++ b/ws02/class/ws02_slide_class1.pptx
@@ -6554,49 +6554,330 @@
           <a:lstStyle/>
           <a:p>
             <a:r>
-              <a:t>⏱️  0:52 · 3.5분</a:t>
-            </a:r>
-          </a:p>
-          <a:p>
-            <a:r>
-              <a:t>★ KEEP — 절대 빠뜨리지 말 것</a:t>
-            </a:r>
-          </a:p>
-          <a:p>
-            <a:endParaRPr/>
-          </a:p>
-          <a:p>
-            <a:r>
-              <a:t>🎤 강사 멘트:</a:t>
-            </a:r>
-          </a:p>
-          <a:p>
-            <a:r>
-              <a:t>이 한 장만 외워도 절반은 끝난 겁니다. 두 문서를 같이 써야 완전한 보안 체계가 됩니다.</a:t>
-            </a:r>
-          </a:p>
-          <a:p>
-            <a:endParaRPr/>
-          </a:p>
-          <a:p>
-            <a:r>
-              <a:t>핵심 포인트:</a:t>
-            </a:r>
-          </a:p>
-          <a:p>
-            <a:r>
-              <a:t>  • NIS — 위협·대책 중심 / T-M 거울 구조 / 4 레이어 / 보안 체크리스트</a:t>
-            </a:r>
-          </a:p>
-          <a:p>
-            <a:r>
-              <a:t>  • KISA — 역할·책임 중심 / 3역할 / 생명주기별 / 거버넌스 설계</a:t>
-            </a:r>
-          </a:p>
-          <a:p>
-            <a:r>
-              <a:t>  • 결론: NIS 로 무엇을 막을지 식별 → KISA 로 누가 언제 실행할지 배정</a:t>
-            </a:r>
+              <a:t>이</a:t>
+            </a:r>
+            <a:r>
+              <a:rPr dirty="0"/>
+              <a:t> </a:t>
+            </a:r>
+            <a:r>
+              <a:rPr dirty="0" err="1"/>
+              <a:t>한</a:t>
+            </a:r>
+            <a:r>
+              <a:rPr dirty="0"/>
+              <a:t> </a:t>
+            </a:r>
+            <a:r>
+              <a:rPr dirty="0" err="1"/>
+              <a:t>장만</a:t>
+            </a:r>
+            <a:r>
+              <a:rPr dirty="0"/>
+              <a:t> </a:t>
+            </a:r>
+            <a:r>
+              <a:rPr dirty="0" err="1"/>
+              <a:t>외워도</a:t>
+            </a:r>
+            <a:r>
+              <a:rPr dirty="0"/>
+              <a:t> </a:t>
+            </a:r>
+            <a:r>
+              <a:rPr dirty="0" err="1"/>
+              <a:t>절반은</a:t>
+            </a:r>
+            <a:r>
+              <a:rPr dirty="0"/>
+              <a:t> </a:t>
+            </a:r>
+            <a:r>
+              <a:rPr dirty="0" err="1"/>
+              <a:t>끝난</a:t>
+            </a:r>
+            <a:r>
+              <a:rPr dirty="0"/>
+              <a:t> </a:t>
+            </a:r>
+            <a:r>
+              <a:rPr dirty="0" err="1"/>
+              <a:t>겁니다</a:t>
+            </a:r>
+            <a:r>
+              <a:rPr dirty="0"/>
+              <a:t>. </a:t>
+            </a:r>
+            <a:r>
+              <a:rPr dirty="0" err="1"/>
+              <a:t>두</a:t>
+            </a:r>
+            <a:r>
+              <a:rPr dirty="0"/>
+              <a:t> </a:t>
+            </a:r>
+            <a:r>
+              <a:rPr dirty="0" err="1"/>
+              <a:t>문서를</a:t>
+            </a:r>
+            <a:r>
+              <a:rPr dirty="0"/>
+              <a:t> </a:t>
+            </a:r>
+            <a:r>
+              <a:rPr dirty="0" err="1"/>
+              <a:t>같이</a:t>
+            </a:r>
+            <a:r>
+              <a:rPr dirty="0"/>
+              <a:t> </a:t>
+            </a:r>
+            <a:r>
+              <a:rPr dirty="0" err="1"/>
+              <a:t>써야</a:t>
+            </a:r>
+            <a:r>
+              <a:rPr dirty="0"/>
+              <a:t> </a:t>
+            </a:r>
+            <a:r>
+              <a:rPr dirty="0" err="1"/>
+              <a:t>완전한</a:t>
+            </a:r>
+            <a:r>
+              <a:rPr dirty="0"/>
+              <a:t> </a:t>
+            </a:r>
+            <a:r>
+              <a:rPr dirty="0" err="1"/>
+              <a:t>보안</a:t>
+            </a:r>
+            <a:r>
+              <a:rPr dirty="0"/>
+              <a:t> </a:t>
+            </a:r>
+            <a:r>
+              <a:rPr dirty="0" err="1"/>
+              <a:t>체계가</a:t>
+            </a:r>
+            <a:r>
+              <a:rPr dirty="0"/>
+              <a:t> </a:t>
+            </a:r>
+            <a:r>
+              <a:rPr dirty="0" err="1"/>
+              <a:t>됩니다</a:t>
+            </a:r>
+            <a:r>
+              <a:rPr dirty="0"/>
+              <a:t>.</a:t>
+            </a:r>
+          </a:p>
+          <a:p>
+            <a:endParaRPr dirty="0"/>
+          </a:p>
+          <a:p>
+            <a:r>
+              <a:rPr dirty="0" err="1"/>
+              <a:t>핵심</a:t>
+            </a:r>
+            <a:r>
+              <a:rPr dirty="0"/>
+              <a:t> </a:t>
+            </a:r>
+            <a:r>
+              <a:rPr dirty="0" err="1"/>
+              <a:t>포인트</a:t>
+            </a:r>
+            <a:r>
+              <a:rPr dirty="0"/>
+              <a:t>:</a:t>
+            </a:r>
+          </a:p>
+          <a:p>
+            <a:r>
+              <a:rPr dirty="0"/>
+              <a:t>  • NIS — </a:t>
+            </a:r>
+            <a:r>
+              <a:rPr dirty="0" err="1"/>
+              <a:t>위협·대책</a:t>
+            </a:r>
+            <a:r>
+              <a:rPr dirty="0"/>
+              <a:t> </a:t>
+            </a:r>
+            <a:r>
+              <a:rPr dirty="0" err="1"/>
+              <a:t>중심</a:t>
+            </a:r>
+            <a:r>
+              <a:rPr dirty="0"/>
+              <a:t> / T-M </a:t>
+            </a:r>
+            <a:r>
+              <a:rPr dirty="0" err="1"/>
+              <a:t>거울</a:t>
+            </a:r>
+            <a:r>
+              <a:rPr dirty="0"/>
+              <a:t> </a:t>
+            </a:r>
+            <a:r>
+              <a:rPr dirty="0" err="1"/>
+              <a:t>구조</a:t>
+            </a:r>
+            <a:r>
+              <a:rPr dirty="0"/>
+              <a:t> / 4 </a:t>
+            </a:r>
+            <a:r>
+              <a:rPr dirty="0" err="1"/>
+              <a:t>레이어</a:t>
+            </a:r>
+            <a:r>
+              <a:rPr dirty="0"/>
+              <a:t> / </a:t>
+            </a:r>
+            <a:r>
+              <a:rPr dirty="0" err="1"/>
+              <a:t>보안</a:t>
+            </a:r>
+            <a:r>
+              <a:rPr dirty="0"/>
+              <a:t> </a:t>
+            </a:r>
+            <a:r>
+              <a:rPr dirty="0" err="1"/>
+              <a:t>체크리스트</a:t>
+            </a:r>
+            <a:endParaRPr dirty="0"/>
+          </a:p>
+          <a:p>
+            <a:r>
+              <a:rPr dirty="0"/>
+              <a:t>  • KISA — </a:t>
+            </a:r>
+            <a:r>
+              <a:rPr dirty="0" err="1"/>
+              <a:t>역할·책임</a:t>
+            </a:r>
+            <a:r>
+              <a:rPr dirty="0"/>
+              <a:t> </a:t>
+            </a:r>
+            <a:r>
+              <a:rPr dirty="0" err="1"/>
+              <a:t>중심</a:t>
+            </a:r>
+            <a:r>
+              <a:rPr dirty="0"/>
+              <a:t> / 3역할 / </a:t>
+            </a:r>
+            <a:r>
+              <a:rPr dirty="0" err="1"/>
+              <a:t>생명주기별</a:t>
+            </a:r>
+            <a:r>
+              <a:rPr dirty="0"/>
+              <a:t> / </a:t>
+            </a:r>
+            <a:r>
+              <a:rPr dirty="0" err="1"/>
+              <a:t>거버넌스</a:t>
+            </a:r>
+            <a:r>
+              <a:rPr dirty="0"/>
+              <a:t> </a:t>
+            </a:r>
+            <a:r>
+              <a:rPr dirty="0" err="1"/>
+              <a:t>설계</a:t>
+            </a:r>
+            <a:endParaRPr dirty="0"/>
+          </a:p>
+          <a:p>
+            <a:r>
+              <a:rPr dirty="0"/>
+              <a:t>  • </a:t>
+            </a:r>
+            <a:r>
+              <a:rPr dirty="0" err="1"/>
+              <a:t>결론</a:t>
+            </a:r>
+            <a:r>
+              <a:rPr dirty="0"/>
+              <a:t>: NIS </a:t>
+            </a:r>
+            <a:r>
+              <a:rPr dirty="0" err="1"/>
+              <a:t>로</a:t>
+            </a:r>
+            <a:r>
+              <a:rPr dirty="0"/>
+              <a:t> </a:t>
+            </a:r>
+            <a:r>
+              <a:rPr dirty="0" err="1"/>
+              <a:t>무엇을</a:t>
+            </a:r>
+            <a:r>
+              <a:rPr dirty="0"/>
+              <a:t> </a:t>
+            </a:r>
+            <a:r>
+              <a:rPr dirty="0" err="1"/>
+              <a:t>막을지</a:t>
+            </a:r>
+            <a:r>
+              <a:rPr dirty="0"/>
+              <a:t> </a:t>
+            </a:r>
+            <a:r>
+              <a:rPr dirty="0" err="1"/>
+              <a:t>식별</a:t>
+            </a:r>
+            <a:r>
+              <a:rPr dirty="0"/>
+              <a:t> → KISA </a:t>
+            </a:r>
+            <a:r>
+              <a:rPr dirty="0" err="1"/>
+              <a:t>로</a:t>
+            </a:r>
+            <a:r>
+              <a:rPr dirty="0"/>
+              <a:t> </a:t>
+            </a:r>
+            <a:r>
+              <a:rPr dirty="0" err="1"/>
+              <a:t>누가</a:t>
+            </a:r>
+            <a:r>
+              <a:rPr dirty="0"/>
+              <a:t> </a:t>
+            </a:r>
+            <a:r>
+              <a:rPr dirty="0" err="1"/>
+              <a:t>언제</a:t>
+            </a:r>
+            <a:r>
+              <a:rPr dirty="0"/>
+              <a:t> </a:t>
+            </a:r>
+            <a:r>
+              <a:rPr dirty="0" err="1"/>
+              <a:t>실행할지</a:t>
+            </a:r>
+            <a:r>
+              <a:rPr dirty="0"/>
+              <a:t> </a:t>
+            </a:r>
+            <a:r>
+              <a:rPr dirty="0" err="1"/>
+              <a:t>배정</a:t>
+            </a:r>
+            <a:endParaRPr dirty="0"/>
           </a:p>
         </p:txBody>
       </p:sp>

--- a/ws02/class/ws02_slide_class1.pptx
+++ b/ws02/class/ws02_slide_class1.pptx
@@ -432,166 +432,7 @@
         <p:txBody>
           <a:bodyPr/>
           <a:lstStyle/>
-          <a:p>
-            <a:r>
-              <a:rPr dirty="0" err="1"/>
-              <a:t>이제부터</a:t>
-            </a:r>
-            <a:r>
-              <a:rPr dirty="0"/>
-              <a:t> </a:t>
-            </a:r>
-            <a:r>
-              <a:rPr dirty="0" err="1"/>
-              <a:t>본강</a:t>
-            </a:r>
-            <a:r>
-              <a:rPr dirty="0"/>
-              <a:t>. </a:t>
-            </a:r>
-            <a:r>
-              <a:rPr dirty="0" err="1"/>
-              <a:t>방금</a:t>
-            </a:r>
-            <a:r>
-              <a:rPr dirty="0"/>
-              <a:t> </a:t>
-            </a:r>
-            <a:r>
-              <a:rPr dirty="0" err="1"/>
-              <a:t>본</a:t>
-            </a:r>
-            <a:r>
-              <a:rPr dirty="0"/>
-              <a:t> </a:t>
-            </a:r>
-            <a:r>
-              <a:rPr dirty="0" err="1"/>
-              <a:t>패턴을</a:t>
-            </a:r>
-            <a:r>
-              <a:rPr dirty="0"/>
-              <a:t> NIS T01–T15 </a:t>
-            </a:r>
-            <a:r>
-              <a:rPr dirty="0" err="1"/>
-              <a:t>로</a:t>
-            </a:r>
-            <a:r>
-              <a:rPr dirty="0"/>
-              <a:t> </a:t>
-            </a:r>
-            <a:r>
-              <a:rPr dirty="0" err="1"/>
-              <a:t>정리합니다</a:t>
-            </a:r>
-            <a:r>
-              <a:rPr dirty="0"/>
-              <a:t>.</a:t>
-            </a:r>
-          </a:p>
-          <a:p>
-            <a:endParaRPr dirty="0"/>
-          </a:p>
-          <a:p>
-            <a:r>
-              <a:rPr dirty="0" err="1"/>
-              <a:t>핵심</a:t>
-            </a:r>
-            <a:r>
-              <a:rPr dirty="0"/>
-              <a:t> </a:t>
-            </a:r>
-            <a:r>
-              <a:rPr dirty="0" err="1"/>
-              <a:t>포인트</a:t>
-            </a:r>
-            <a:r>
-              <a:rPr dirty="0"/>
-              <a:t>:</a:t>
-            </a:r>
-          </a:p>
-          <a:p>
-            <a:r>
-              <a:rPr dirty="0"/>
-              <a:t>  • DNA </a:t>
-            </a:r>
-            <a:r>
-              <a:rPr dirty="0" err="1"/>
-              <a:t>복원</a:t>
-            </a:r>
-            <a:r>
-              <a:rPr dirty="0"/>
-              <a:t> → T02 / T04 · Clearview → T07</a:t>
-            </a:r>
-          </a:p>
-          <a:p>
-            <a:r>
-              <a:rPr dirty="0"/>
-              <a:t>  • </a:t>
-            </a:r>
-            <a:r>
-              <a:rPr dirty="0" err="1"/>
-              <a:t>이</a:t>
-            </a:r>
-            <a:r>
-              <a:rPr dirty="0"/>
-              <a:t> </a:t>
-            </a:r>
-            <a:r>
-              <a:rPr dirty="0" err="1"/>
-              <a:t>능력이</a:t>
-            </a:r>
-            <a:r>
-              <a:rPr dirty="0"/>
-              <a:t> AI </a:t>
-            </a:r>
-            <a:r>
-              <a:rPr dirty="0" err="1"/>
-              <a:t>시스템을</a:t>
-            </a:r>
-            <a:r>
-              <a:rPr dirty="0"/>
-              <a:t> </a:t>
-            </a:r>
-            <a:r>
-              <a:rPr dirty="0" err="1"/>
-              <a:t>통해</a:t>
-            </a:r>
-            <a:r>
-              <a:rPr dirty="0"/>
-              <a:t> </a:t>
-            </a:r>
-            <a:r>
-              <a:rPr dirty="0" err="1"/>
-              <a:t>어떻게</a:t>
-            </a:r>
-            <a:r>
-              <a:rPr dirty="0"/>
-              <a:t> </a:t>
-            </a:r>
-            <a:r>
-              <a:rPr dirty="0" err="1"/>
-              <a:t>위협이</a:t>
-            </a:r>
-            <a:r>
-              <a:rPr dirty="0"/>
-              <a:t> </a:t>
-            </a:r>
-            <a:r>
-              <a:rPr dirty="0" err="1"/>
-              <a:t>되는지</a:t>
-            </a:r>
-            <a:r>
-              <a:rPr dirty="0"/>
-              <a:t> — NIS </a:t>
-            </a:r>
-            <a:r>
-              <a:rPr dirty="0" err="1"/>
-              <a:t>분류로</a:t>
-            </a:r>
-            <a:endParaRPr dirty="0"/>
-          </a:p>
+          <a:p/>
         </p:txBody>
       </p:sp>
       <p:sp>
@@ -673,42 +514,7 @@
         <p:txBody>
           <a:bodyPr/>
           <a:lstStyle/>
-          <a:p>
-            <a:r>
-              <a:t>⏱️  0:15 · 0.5분</a:t>
-            </a:r>
-          </a:p>
-          <a:p>
-            <a:r>
-              <a:t>(헤더 슬라이드 — 짧게)</a:t>
-            </a:r>
-          </a:p>
-          <a:p>
-            <a:endParaRPr/>
-          </a:p>
-          <a:p>
-            <a:r>
-              <a:t>🎤 강사 멘트:</a:t>
-            </a:r>
-          </a:p>
-          <a:p>
-            <a:r>
-              <a:t>1·2일차에 배운 LLM 구조를 — 오늘은 "어디가 뚫리나" 관점에서 다시 봅니다.</a:t>
-            </a:r>
-          </a:p>
-          <a:p>
-            <a:endParaRPr/>
-          </a:p>
-          <a:p>
-            <a:r>
-              <a:t>핵심 포인트:</a:t>
-            </a:r>
-          </a:p>
-          <a:p>
-            <a:r>
-              <a:t>  • 1–2일차 LLM·RAG·Agent 복습 — '어디가 뚫리는지' 보기 위한 지도</a:t>
-            </a:r>
-          </a:p>
+          <a:p/>
         </p:txBody>
       </p:sp>
       <p:sp>
@@ -808,210 +614,7 @@
         <p:txBody>
           <a:bodyPr/>
           <a:lstStyle/>
-          <a:p>
-            <a:r>
-              <a:rPr dirty="0"/>
-              <a:t>⏱️  0:15 · 1.5분</a:t>
-            </a:r>
-          </a:p>
-          <a:p>
-            <a:endParaRPr dirty="0"/>
-          </a:p>
-          <a:p>
-            <a:r>
-              <a:rPr dirty="0"/>
-              <a:t>🎤 </a:t>
-            </a:r>
-            <a:r>
-              <a:rPr dirty="0" err="1"/>
-              <a:t>강사</a:t>
-            </a:r>
-            <a:r>
-              <a:rPr dirty="0"/>
-              <a:t> </a:t>
-            </a:r>
-            <a:r>
-              <a:rPr dirty="0" err="1"/>
-              <a:t>멘트</a:t>
-            </a:r>
-            <a:r>
-              <a:rPr dirty="0"/>
-              <a:t>:</a:t>
-            </a:r>
-          </a:p>
-          <a:p>
-            <a:r>
-              <a:rPr dirty="0" err="1"/>
-              <a:t>한</a:t>
-            </a:r>
-            <a:r>
-              <a:rPr dirty="0"/>
-              <a:t> </a:t>
-            </a:r>
-            <a:r>
-              <a:rPr dirty="0" err="1"/>
-              <a:t>화면에</a:t>
-            </a:r>
-            <a:r>
-              <a:rPr dirty="0"/>
-              <a:t> </a:t>
-            </a:r>
-            <a:r>
-              <a:rPr dirty="0" err="1"/>
-              <a:t>다</a:t>
-            </a:r>
-            <a:r>
-              <a:rPr dirty="0"/>
-              <a:t> </a:t>
-            </a:r>
-            <a:r>
-              <a:rPr dirty="0" err="1"/>
-              <a:t>그려놓고</a:t>
-            </a:r>
-            <a:r>
-              <a:rPr dirty="0"/>
-              <a:t> </a:t>
-            </a:r>
-            <a:r>
-              <a:rPr dirty="0" err="1"/>
-              <a:t>보세요</a:t>
-            </a:r>
-            <a:r>
-              <a:rPr dirty="0"/>
-              <a:t>. </a:t>
-            </a:r>
-            <a:r>
-              <a:rPr dirty="0" err="1"/>
-              <a:t>각</a:t>
-            </a:r>
-            <a:r>
-              <a:rPr dirty="0"/>
-              <a:t> </a:t>
-            </a:r>
-            <a:r>
-              <a:rPr dirty="0" err="1"/>
-              <a:t>화살표마다</a:t>
-            </a:r>
-            <a:r>
-              <a:rPr dirty="0"/>
-              <a:t> </a:t>
-            </a:r>
-            <a:r>
-              <a:rPr dirty="0" err="1"/>
-              <a:t>위협이</a:t>
-            </a:r>
-            <a:r>
-              <a:rPr dirty="0"/>
-              <a:t> </a:t>
-            </a:r>
-            <a:r>
-              <a:rPr dirty="0" err="1"/>
-              <a:t>하나씩</a:t>
-            </a:r>
-            <a:r>
-              <a:rPr dirty="0"/>
-              <a:t> </a:t>
-            </a:r>
-            <a:r>
-              <a:rPr dirty="0" err="1"/>
-              <a:t>붙습니다</a:t>
-            </a:r>
-            <a:r>
-              <a:rPr dirty="0"/>
-              <a:t>.</a:t>
-            </a:r>
-          </a:p>
-          <a:p>
-            <a:endParaRPr dirty="0"/>
-          </a:p>
-          <a:p>
-            <a:r>
-              <a:rPr dirty="0" err="1"/>
-              <a:t>핵심</a:t>
-            </a:r>
-            <a:r>
-              <a:rPr dirty="0"/>
-              <a:t> </a:t>
-            </a:r>
-            <a:r>
-              <a:rPr dirty="0" err="1"/>
-              <a:t>포인트</a:t>
-            </a:r>
-            <a:r>
-              <a:rPr dirty="0"/>
-              <a:t>:</a:t>
-            </a:r>
-          </a:p>
-          <a:p>
-            <a:r>
-              <a:rPr dirty="0"/>
-              <a:t>  • </a:t>
-            </a:r>
-            <a:r>
-              <a:rPr dirty="0" err="1"/>
-              <a:t>입력</a:t>
-            </a:r>
-            <a:r>
-              <a:rPr dirty="0"/>
-              <a:t> UI → LLM </a:t>
-            </a:r>
-            <a:r>
-              <a:rPr dirty="0" err="1"/>
-              <a:t>엔진</a:t>
-            </a:r>
-            <a:r>
-              <a:rPr dirty="0"/>
-              <a:t> ↔ </a:t>
-            </a:r>
-            <a:r>
-              <a:rPr dirty="0" err="1"/>
-              <a:t>RAG·벡터DB</a:t>
-            </a:r>
-            <a:r>
-              <a:rPr dirty="0"/>
-              <a:t> / Agent → </a:t>
-            </a:r>
-            <a:r>
-              <a:rPr dirty="0" err="1"/>
-              <a:t>학습데이터</a:t>
-            </a:r>
-            <a:endParaRPr dirty="0"/>
-          </a:p>
-          <a:p>
-            <a:r>
-              <a:rPr dirty="0"/>
-              <a:t>  • 5개 </a:t>
-            </a:r>
-            <a:r>
-              <a:rPr dirty="0" err="1"/>
-              <a:t>영역</a:t>
-            </a:r>
-            <a:r>
-              <a:rPr dirty="0"/>
-              <a:t> </a:t>
-            </a:r>
-            <a:r>
-              <a:rPr dirty="0" err="1"/>
-              <a:t>모두</a:t>
-            </a:r>
-            <a:r>
-              <a:rPr dirty="0"/>
-              <a:t> </a:t>
-            </a:r>
-            <a:r>
-              <a:rPr dirty="0" err="1"/>
-              <a:t>공격</a:t>
-            </a:r>
-            <a:r>
-              <a:rPr dirty="0"/>
-              <a:t> </a:t>
-            </a:r>
-            <a:r>
-              <a:rPr dirty="0" err="1"/>
-              <a:t>표면</a:t>
-            </a:r>
-            <a:endParaRPr dirty="0"/>
-          </a:p>
+          <a:p/>
         </p:txBody>
       </p:sp>
       <p:sp>
@@ -1099,356 +702,7 @@
         <p:txBody>
           <a:bodyPr/>
           <a:lstStyle/>
-          <a:p>
-            <a:r>
-              <a:rPr dirty="0" err="1"/>
-              <a:t>한</a:t>
-            </a:r>
-            <a:r>
-              <a:rPr dirty="0"/>
-              <a:t> </a:t>
-            </a:r>
-            <a:r>
-              <a:rPr dirty="0" err="1"/>
-              <a:t>그림으로</a:t>
-            </a:r>
-            <a:r>
-              <a:rPr dirty="0"/>
-              <a:t> </a:t>
-            </a:r>
-            <a:r>
-              <a:rPr dirty="0" err="1"/>
-              <a:t>본</a:t>
-            </a:r>
-            <a:r>
-              <a:rPr dirty="0"/>
-              <a:t> NIS </a:t>
-            </a:r>
-            <a:r>
-              <a:rPr dirty="0" err="1"/>
-              <a:t>의</a:t>
-            </a:r>
-            <a:r>
-              <a:rPr dirty="0"/>
-              <a:t> </a:t>
-            </a:r>
-            <a:r>
-              <a:rPr dirty="0" err="1"/>
-              <a:t>위협</a:t>
-            </a:r>
-            <a:r>
-              <a:rPr dirty="0"/>
-              <a:t> </a:t>
-            </a:r>
-            <a:r>
-              <a:rPr dirty="0" err="1"/>
-              <a:t>매핑</a:t>
-            </a:r>
-            <a:r>
-              <a:rPr dirty="0"/>
-              <a:t>. </a:t>
-            </a:r>
-            <a:r>
-              <a:rPr dirty="0" err="1"/>
-              <a:t>어디가</a:t>
-            </a:r>
-            <a:r>
-              <a:rPr dirty="0"/>
-              <a:t> </a:t>
-            </a:r>
-            <a:r>
-              <a:rPr dirty="0" err="1"/>
-              <a:t>뚫리는지</a:t>
-            </a:r>
-            <a:r>
-              <a:rPr dirty="0"/>
-              <a:t> — </a:t>
-            </a:r>
-            <a:r>
-              <a:rPr dirty="0" err="1"/>
-              <a:t>화살표마다</a:t>
-            </a:r>
-            <a:r>
-              <a:rPr dirty="0"/>
-              <a:t> </a:t>
-            </a:r>
-            <a:r>
-              <a:rPr dirty="0" err="1"/>
-              <a:t>T번호</a:t>
-            </a:r>
-            <a:r>
-              <a:rPr dirty="0"/>
-              <a:t>.</a:t>
-            </a:r>
-          </a:p>
-          <a:p>
-            <a:endParaRPr dirty="0"/>
-          </a:p>
-          <a:p>
-            <a:r>
-              <a:rPr dirty="0" err="1"/>
-              <a:t>핵심</a:t>
-            </a:r>
-            <a:r>
-              <a:rPr dirty="0"/>
-              <a:t> </a:t>
-            </a:r>
-            <a:r>
-              <a:rPr dirty="0" err="1"/>
-              <a:t>포인트</a:t>
-            </a:r>
-            <a:r>
-              <a:rPr dirty="0"/>
-              <a:t>:</a:t>
-            </a:r>
-          </a:p>
-          <a:p>
-            <a:r>
-              <a:rPr dirty="0"/>
-              <a:t>  • </a:t>
-            </a:r>
-            <a:r>
-              <a:rPr dirty="0" err="1"/>
-              <a:t>입력</a:t>
-            </a:r>
-            <a:r>
-              <a:rPr dirty="0"/>
-              <a:t> UI: T07 </a:t>
-            </a:r>
-            <a:r>
-              <a:rPr dirty="0" err="1"/>
-              <a:t>민감정보</a:t>
-            </a:r>
-            <a:r>
-              <a:rPr dirty="0"/>
-              <a:t> · T08 </a:t>
-            </a:r>
-            <a:r>
-              <a:rPr dirty="0" err="1"/>
-              <a:t>프롬프트</a:t>
-            </a:r>
-            <a:r>
-              <a:rPr dirty="0"/>
-              <a:t> </a:t>
-            </a:r>
-            <a:r>
-              <a:rPr dirty="0" err="1"/>
-              <a:t>인젝션</a:t>
-            </a:r>
-            <a:endParaRPr dirty="0"/>
-          </a:p>
-          <a:p>
-            <a:r>
-              <a:rPr dirty="0"/>
-              <a:t>  • LLM </a:t>
-            </a:r>
-            <a:r>
-              <a:rPr dirty="0" err="1"/>
-              <a:t>엔진</a:t>
-            </a:r>
-            <a:r>
-              <a:rPr dirty="0"/>
-              <a:t>: T08 </a:t>
-            </a:r>
-            <a:r>
-              <a:rPr dirty="0" err="1"/>
-              <a:t>인젝션</a:t>
-            </a:r>
-            <a:r>
-              <a:rPr dirty="0"/>
-              <a:t> · T04 </a:t>
-            </a:r>
-            <a:r>
-              <a:rPr dirty="0" err="1"/>
-              <a:t>학습데이터</a:t>
-            </a:r>
-            <a:r>
-              <a:rPr dirty="0"/>
-              <a:t> </a:t>
-            </a:r>
-            <a:r>
-              <a:rPr dirty="0" err="1"/>
-              <a:t>추출</a:t>
-            </a:r>
-            <a:r>
-              <a:rPr dirty="0"/>
-              <a:t> · T09 </a:t>
-            </a:r>
-            <a:r>
-              <a:rPr dirty="0" err="1"/>
-              <a:t>적대적</a:t>
-            </a:r>
-            <a:r>
-              <a:rPr dirty="0"/>
-              <a:t> </a:t>
-            </a:r>
-            <a:r>
-              <a:rPr dirty="0" err="1"/>
-              <a:t>예제</a:t>
-            </a:r>
-            <a:endParaRPr dirty="0"/>
-          </a:p>
-          <a:p>
-            <a:r>
-              <a:rPr dirty="0"/>
-              <a:t>  • </a:t>
-            </a:r>
-            <a:r>
-              <a:rPr dirty="0" err="1"/>
-              <a:t>RAG·벡터DB</a:t>
-            </a:r>
-            <a:r>
-              <a:rPr dirty="0"/>
-              <a:t>: T01 </a:t>
-            </a:r>
-            <a:r>
-              <a:rPr dirty="0" err="1"/>
-              <a:t>오염</a:t>
-            </a:r>
-            <a:r>
-              <a:rPr dirty="0"/>
-              <a:t> · T05 </a:t>
-            </a:r>
-            <a:r>
-              <a:rPr dirty="0" err="1"/>
-              <a:t>비인가</a:t>
-            </a:r>
-            <a:r>
-              <a:rPr dirty="0"/>
-              <a:t> </a:t>
-            </a:r>
-            <a:r>
-              <a:rPr dirty="0" err="1"/>
-              <a:t>접근</a:t>
-            </a:r>
-            <a:r>
-              <a:rPr dirty="0"/>
-              <a:t> · </a:t>
-            </a:r>
-            <a:r>
-              <a:rPr dirty="0" err="1"/>
-              <a:t>임베딩</a:t>
-            </a:r>
-            <a:r>
-              <a:rPr dirty="0"/>
-              <a:t> </a:t>
-            </a:r>
-            <a:r>
-              <a:rPr dirty="0" err="1"/>
-              <a:t>취약점</a:t>
-            </a:r>
-            <a:endParaRPr dirty="0"/>
-          </a:p>
-          <a:p>
-            <a:r>
-              <a:rPr dirty="0"/>
-              <a:t>  • </a:t>
-            </a:r>
-            <a:r>
-              <a:rPr dirty="0" err="1"/>
-              <a:t>학습데이터</a:t>
-            </a:r>
-            <a:r>
-              <a:rPr dirty="0"/>
-              <a:t>: T01 </a:t>
-            </a:r>
-            <a:r>
-              <a:rPr dirty="0" err="1"/>
-              <a:t>오염</a:t>
-            </a:r>
-            <a:r>
-              <a:rPr dirty="0"/>
-              <a:t> · T02 </a:t>
-            </a:r>
-            <a:r>
-              <a:rPr dirty="0" err="1"/>
-              <a:t>비인가</a:t>
-            </a:r>
-            <a:r>
-              <a:rPr dirty="0"/>
-              <a:t> </a:t>
-            </a:r>
-            <a:r>
-              <a:rPr dirty="0" err="1"/>
-              <a:t>학습</a:t>
-            </a:r>
-            <a:r>
-              <a:rPr dirty="0"/>
-              <a:t> · T03 </a:t>
-            </a:r>
-            <a:r>
-              <a:rPr dirty="0" err="1"/>
-              <a:t>백도어</a:t>
-            </a:r>
-            <a:r>
-              <a:rPr dirty="0"/>
-              <a:t> · T14 </a:t>
-            </a:r>
-            <a:r>
-              <a:rPr dirty="0" err="1"/>
-              <a:t>공급망</a:t>
-            </a:r>
-            <a:endParaRPr dirty="0"/>
-          </a:p>
-          <a:p>
-            <a:r>
-              <a:rPr dirty="0"/>
-              <a:t>  • Agent (4일차 </a:t>
-            </a:r>
-            <a:r>
-              <a:rPr dirty="0" err="1"/>
-              <a:t>심화</a:t>
-            </a:r>
-            <a:r>
-              <a:rPr dirty="0"/>
-              <a:t>): T13 </a:t>
-            </a:r>
-            <a:r>
-              <a:rPr dirty="0" err="1"/>
-              <a:t>권한</a:t>
-            </a:r>
-            <a:r>
-              <a:rPr dirty="0"/>
-              <a:t> </a:t>
-            </a:r>
-            <a:r>
-              <a:rPr dirty="0" err="1"/>
-              <a:t>오남용</a:t>
-            </a:r>
-            <a:r>
-              <a:rPr dirty="0"/>
-              <a:t> · T06 </a:t>
-            </a:r>
-            <a:r>
-              <a:rPr dirty="0" err="1"/>
-              <a:t>도구</a:t>
-            </a:r>
-            <a:r>
-              <a:rPr dirty="0"/>
-              <a:t> </a:t>
-            </a:r>
-            <a:r>
-              <a:rPr dirty="0" err="1"/>
-              <a:t>접근</a:t>
-            </a:r>
-            <a:r>
-              <a:rPr dirty="0"/>
-              <a:t> · </a:t>
-            </a:r>
-            <a:r>
-              <a:rPr dirty="0" err="1"/>
-              <a:t>결과</a:t>
-            </a:r>
-            <a:r>
-              <a:rPr dirty="0"/>
-              <a:t> </a:t>
-            </a:r>
-            <a:r>
-              <a:rPr dirty="0" err="1"/>
-              <a:t>미검증</a:t>
-            </a:r>
-            <a:endParaRPr dirty="0"/>
-          </a:p>
+          <a:p/>
         </p:txBody>
       </p:sp>
       <p:sp>
@@ -1638,334 +892,7 @@
         <p:txBody>
           <a:bodyPr/>
           <a:lstStyle/>
-          <a:p>
-            <a:r>
-              <a:rPr dirty="0" err="1"/>
-              <a:t>이</a:t>
-            </a:r>
-            <a:r>
-              <a:rPr dirty="0"/>
-              <a:t> </a:t>
-            </a:r>
-            <a:r>
-              <a:rPr dirty="0" err="1"/>
-              <a:t>두</a:t>
-            </a:r>
-            <a:r>
-              <a:rPr dirty="0"/>
-              <a:t> </a:t>
-            </a:r>
-            <a:r>
-              <a:rPr dirty="0" err="1"/>
-              <a:t>줄이</a:t>
-            </a:r>
-            <a:r>
-              <a:rPr dirty="0"/>
-              <a:t> </a:t>
-            </a:r>
-            <a:r>
-              <a:rPr dirty="0" err="1"/>
-              <a:t>오늘</a:t>
-            </a:r>
-            <a:r>
-              <a:rPr dirty="0"/>
-              <a:t> </a:t>
-            </a:r>
-            <a:r>
-              <a:rPr dirty="0" err="1"/>
-              <a:t>강의의</a:t>
-            </a:r>
-            <a:r>
-              <a:rPr dirty="0"/>
-              <a:t> </a:t>
-            </a:r>
-            <a:r>
-              <a:rPr dirty="0" err="1"/>
-              <a:t>가장</a:t>
-            </a:r>
-            <a:r>
-              <a:rPr dirty="0"/>
-              <a:t> </a:t>
-            </a:r>
-            <a:r>
-              <a:rPr dirty="0" err="1"/>
-              <a:t>중요한</a:t>
-            </a:r>
-            <a:r>
-              <a:rPr dirty="0"/>
-              <a:t> </a:t>
-            </a:r>
-            <a:r>
-              <a:rPr dirty="0" err="1"/>
-              <a:t>통찰</a:t>
-            </a:r>
-            <a:r>
-              <a:rPr dirty="0"/>
-              <a:t>. 슬롯3 Gandalf </a:t>
-            </a:r>
-            <a:r>
-              <a:rPr dirty="0" err="1"/>
-              <a:t>챌린지에서</a:t>
-            </a:r>
-            <a:r>
-              <a:rPr dirty="0"/>
-              <a:t> </a:t>
-            </a:r>
-            <a:r>
-              <a:rPr dirty="0" err="1"/>
-              <a:t>여러분이</a:t>
-            </a:r>
-            <a:r>
-              <a:rPr dirty="0"/>
-              <a:t> </a:t>
-            </a:r>
-            <a:r>
-              <a:rPr dirty="0" err="1"/>
-              <a:t>직접</a:t>
-            </a:r>
-            <a:r>
-              <a:rPr dirty="0"/>
-              <a:t> </a:t>
-            </a:r>
-            <a:r>
-              <a:rPr dirty="0" err="1"/>
-              <a:t>이</a:t>
-            </a:r>
-            <a:r>
-              <a:rPr dirty="0"/>
-              <a:t> </a:t>
-            </a:r>
-            <a:r>
-              <a:rPr dirty="0" err="1"/>
-              <a:t>경계를</a:t>
-            </a:r>
-            <a:r>
-              <a:rPr dirty="0"/>
-              <a:t> </a:t>
-            </a:r>
-            <a:r>
-              <a:rPr dirty="0" err="1"/>
-              <a:t>무너뜨리며</a:t>
-            </a:r>
-            <a:r>
-              <a:rPr dirty="0"/>
-              <a:t> </a:t>
-            </a:r>
-            <a:r>
-              <a:rPr dirty="0" err="1"/>
-              <a:t>체험합니다</a:t>
-            </a:r>
-            <a:r>
-              <a:rPr dirty="0"/>
-              <a:t>.</a:t>
-            </a:r>
-          </a:p>
-          <a:p>
-            <a:endParaRPr dirty="0"/>
-          </a:p>
-          <a:p>
-            <a:r>
-              <a:rPr dirty="0" err="1"/>
-              <a:t>핵심</a:t>
-            </a:r>
-            <a:r>
-              <a:rPr dirty="0"/>
-              <a:t> </a:t>
-            </a:r>
-            <a:r>
-              <a:rPr dirty="0" err="1"/>
-              <a:t>포인트</a:t>
-            </a:r>
-            <a:r>
-              <a:rPr dirty="0"/>
-              <a:t>:</a:t>
-            </a:r>
-          </a:p>
-          <a:p>
-            <a:r>
-              <a:rPr dirty="0"/>
-              <a:t>  • ① </a:t>
-            </a:r>
-            <a:r>
-              <a:rPr dirty="0" err="1"/>
-              <a:t>자연어</a:t>
-            </a:r>
-            <a:r>
-              <a:rPr dirty="0"/>
-              <a:t> = </a:t>
-            </a:r>
-            <a:r>
-              <a:rPr dirty="0" err="1"/>
-              <a:t>명령어</a:t>
-            </a:r>
-            <a:r>
-              <a:rPr dirty="0"/>
-              <a:t> — </a:t>
-            </a:r>
-            <a:r>
-              <a:rPr dirty="0" err="1"/>
-              <a:t>기존</a:t>
-            </a:r>
-            <a:r>
-              <a:rPr dirty="0"/>
-              <a:t>: </a:t>
-            </a:r>
-            <a:r>
-              <a:rPr dirty="0" err="1"/>
-              <a:t>코드로</a:t>
-            </a:r>
-            <a:r>
-              <a:rPr dirty="0"/>
-              <a:t> </a:t>
-            </a:r>
-            <a:r>
-              <a:rPr dirty="0" err="1"/>
-              <a:t>명령</a:t>
-            </a:r>
-            <a:r>
-              <a:rPr dirty="0"/>
-              <a:t> / AI: </a:t>
-            </a:r>
-            <a:r>
-              <a:rPr dirty="0" err="1"/>
-              <a:t>일상</a:t>
-            </a:r>
-            <a:r>
-              <a:rPr dirty="0"/>
-              <a:t> </a:t>
-            </a:r>
-            <a:r>
-              <a:rPr dirty="0" err="1"/>
-              <a:t>언어로</a:t>
-            </a:r>
-            <a:r>
-              <a:rPr dirty="0"/>
-              <a:t> </a:t>
-            </a:r>
-            <a:r>
-              <a:rPr dirty="0" err="1"/>
-              <a:t>명령</a:t>
-            </a:r>
-            <a:endParaRPr dirty="0"/>
-          </a:p>
-          <a:p>
-            <a:r>
-              <a:rPr dirty="0"/>
-              <a:t>  • ② </a:t>
-            </a:r>
-            <a:r>
-              <a:rPr dirty="0" err="1"/>
-              <a:t>경계</a:t>
-            </a:r>
-            <a:r>
-              <a:rPr dirty="0"/>
-              <a:t> </a:t>
-            </a:r>
-            <a:r>
-              <a:rPr dirty="0" err="1"/>
-              <a:t>붕괴</a:t>
-            </a:r>
-            <a:r>
-              <a:rPr dirty="0"/>
-              <a:t> — </a:t>
-            </a:r>
-            <a:r>
-              <a:rPr dirty="0" err="1"/>
-              <a:t>시스템</a:t>
-            </a:r>
-            <a:r>
-              <a:rPr dirty="0"/>
-              <a:t> </a:t>
-            </a:r>
-            <a:r>
-              <a:rPr dirty="0" err="1"/>
-              <a:t>프롬프트와</a:t>
-            </a:r>
-            <a:r>
-              <a:rPr dirty="0"/>
-              <a:t> </a:t>
-            </a:r>
-            <a:r>
-              <a:rPr dirty="0" err="1"/>
-              <a:t>사용자</a:t>
-            </a:r>
-            <a:r>
-              <a:rPr dirty="0"/>
-              <a:t> </a:t>
-            </a:r>
-            <a:r>
-              <a:rPr dirty="0" err="1"/>
-              <a:t>입력의</a:t>
-            </a:r>
-            <a:r>
-              <a:rPr dirty="0"/>
-              <a:t> </a:t>
-            </a:r>
-            <a:r>
-              <a:rPr dirty="0" err="1"/>
-              <a:t>경계</a:t>
-            </a:r>
-            <a:r>
-              <a:rPr dirty="0"/>
-              <a:t> </a:t>
-            </a:r>
-            <a:r>
-              <a:rPr dirty="0" err="1"/>
-              <a:t>없음</a:t>
-            </a:r>
-            <a:endParaRPr dirty="0"/>
-          </a:p>
-          <a:p>
-            <a:r>
-              <a:rPr dirty="0"/>
-              <a:t>  • </a:t>
-            </a:r>
-            <a:r>
-              <a:rPr dirty="0" err="1"/>
-              <a:t>이</a:t>
-            </a:r>
-            <a:r>
-              <a:rPr dirty="0"/>
-              <a:t> </a:t>
-            </a:r>
-            <a:r>
-              <a:rPr dirty="0" err="1"/>
-              <a:t>두</a:t>
-            </a:r>
-            <a:r>
-              <a:rPr dirty="0"/>
-              <a:t> </a:t>
-            </a:r>
-            <a:r>
-              <a:rPr dirty="0" err="1"/>
-              <a:t>특성이</a:t>
-            </a:r>
-            <a:r>
-              <a:rPr dirty="0"/>
-              <a:t> T07·T08 </a:t>
-            </a:r>
-            <a:r>
-              <a:rPr dirty="0" err="1"/>
-              <a:t>의</a:t>
-            </a:r>
-            <a:r>
-              <a:rPr dirty="0"/>
-              <a:t> </a:t>
-            </a:r>
-            <a:r>
-              <a:rPr dirty="0" err="1"/>
-              <a:t>근본</a:t>
-            </a:r>
-            <a:r>
-              <a:rPr dirty="0"/>
-              <a:t> </a:t>
-            </a:r>
-            <a:r>
-              <a:rPr dirty="0" err="1"/>
-              <a:t>원인</a:t>
-            </a:r>
-            <a:endParaRPr dirty="0"/>
-          </a:p>
+          <a:p/>
         </p:txBody>
       </p:sp>
       <p:sp>
@@ -2047,42 +974,7 @@
         <p:txBody>
           <a:bodyPr/>
           <a:lstStyle/>
-          <a:p>
-            <a:r>
-              <a:t>⏱️  0:25 · 0.5분</a:t>
-            </a:r>
-          </a:p>
-          <a:p>
-            <a:r>
-              <a:t>(헤더 슬라이드 — 짧게)</a:t>
-            </a:r>
-          </a:p>
-          <a:p>
-            <a:endParaRPr/>
-          </a:p>
-          <a:p>
-            <a:r>
-              <a:t>🎤 강사 멘트:</a:t>
-            </a:r>
-          </a:p>
-          <a:p>
-            <a:r>
-              <a:t>이제 본격 — NIS 의 15개 위협을 4 레이어로 묶어서 봅니다.</a:t>
-            </a:r>
-          </a:p>
-          <a:p>
-            <a:endParaRPr/>
-          </a:p>
-          <a:p>
-            <a:r>
-              <a:t>핵심 포인트:</a:t>
-            </a:r>
-          </a:p>
-          <a:p>
-            <a:r>
-              <a:t>  • NIS 가 정리한 15개 위협 — 전체 지형도</a:t>
-            </a:r>
-          </a:p>
+          <a:p/>
         </p:txBody>
       </p:sp>
       <p:sp>
@@ -2164,448 +1056,7 @@
         <p:txBody>
           <a:bodyPr/>
           <a:lstStyle/>
-          <a:p>
-            <a:r>
-              <a:rPr dirty="0"/>
-              <a:t>15개를 </a:t>
-            </a:r>
-            <a:r>
-              <a:rPr dirty="0" err="1"/>
-              <a:t>다</a:t>
-            </a:r>
-            <a:r>
-              <a:rPr dirty="0"/>
-              <a:t> </a:t>
-            </a:r>
-            <a:r>
-              <a:rPr dirty="0" err="1"/>
-              <a:t>외우지</a:t>
-            </a:r>
-            <a:r>
-              <a:rPr dirty="0"/>
-              <a:t> </a:t>
-            </a:r>
-            <a:r>
-              <a:rPr dirty="0" err="1"/>
-              <a:t>마시고</a:t>
-            </a:r>
-            <a:r>
-              <a:rPr dirty="0"/>
-              <a:t> — 4 </a:t>
-            </a:r>
-            <a:r>
-              <a:rPr dirty="0" err="1"/>
-              <a:t>레이어로</a:t>
-            </a:r>
-            <a:r>
-              <a:rPr dirty="0"/>
-              <a:t> </a:t>
-            </a:r>
-            <a:r>
-              <a:rPr dirty="0" err="1"/>
-              <a:t>묶어</a:t>
-            </a:r>
-            <a:r>
-              <a:rPr dirty="0"/>
-              <a:t> </a:t>
-            </a:r>
-            <a:r>
-              <a:rPr dirty="0" err="1"/>
-              <a:t>기억하세요</a:t>
-            </a:r>
-            <a:r>
-              <a:rPr dirty="0"/>
-              <a:t>. </a:t>
-            </a:r>
-            <a:r>
-              <a:rPr dirty="0" err="1"/>
-              <a:t>특히</a:t>
-            </a:r>
-            <a:r>
-              <a:rPr dirty="0"/>
-              <a:t> T12 (</a:t>
-            </a:r>
-            <a:r>
-              <a:rPr dirty="0" err="1"/>
-              <a:t>모니터링</a:t>
-            </a:r>
-            <a:r>
-              <a:rPr dirty="0"/>
-              <a:t> </a:t>
-            </a:r>
-            <a:r>
-              <a:rPr dirty="0" err="1"/>
-              <a:t>부재</a:t>
-            </a:r>
-            <a:r>
-              <a:rPr dirty="0"/>
-              <a:t>) </a:t>
-            </a:r>
-            <a:r>
-              <a:rPr dirty="0" err="1"/>
-              <a:t>는</a:t>
-            </a:r>
-            <a:r>
-              <a:rPr dirty="0"/>
-              <a:t> </a:t>
-            </a:r>
-            <a:r>
-              <a:rPr dirty="0" err="1"/>
-              <a:t>모든</a:t>
-            </a:r>
-            <a:r>
-              <a:rPr dirty="0"/>
-              <a:t> </a:t>
-            </a:r>
-            <a:r>
-              <a:rPr dirty="0" err="1"/>
-              <a:t>레이어를</a:t>
-            </a:r>
-            <a:r>
-              <a:rPr dirty="0"/>
-              <a:t> </a:t>
-            </a:r>
-            <a:r>
-              <a:rPr dirty="0" err="1"/>
-              <a:t>무력화합니다</a:t>
-            </a:r>
-            <a:r>
-              <a:rPr dirty="0"/>
-              <a:t>.</a:t>
-            </a:r>
-          </a:p>
-          <a:p>
-            <a:endParaRPr dirty="0"/>
-          </a:p>
-          <a:p>
-            <a:r>
-              <a:rPr dirty="0" err="1"/>
-              <a:t>핵심</a:t>
-            </a:r>
-            <a:r>
-              <a:rPr dirty="0"/>
-              <a:t> </a:t>
-            </a:r>
-            <a:r>
-              <a:rPr dirty="0" err="1"/>
-              <a:t>포인트</a:t>
-            </a:r>
-            <a:r>
-              <a:rPr dirty="0"/>
-              <a:t>:</a:t>
-            </a:r>
-          </a:p>
-          <a:p>
-            <a:r>
-              <a:rPr dirty="0"/>
-              <a:t>  • </a:t>
-            </a:r>
-            <a:r>
-              <a:rPr dirty="0" err="1"/>
-              <a:t>레이어</a:t>
-            </a:r>
-            <a:r>
-              <a:rPr dirty="0"/>
-              <a:t> 1 </a:t>
-            </a:r>
-            <a:r>
-              <a:rPr dirty="0" err="1"/>
-              <a:t>입력</a:t>
-            </a:r>
-            <a:r>
-              <a:rPr dirty="0"/>
-              <a:t> </a:t>
-            </a:r>
-            <a:r>
-              <a:rPr dirty="0" err="1"/>
-              <a:t>조작</a:t>
-            </a:r>
-            <a:r>
-              <a:rPr dirty="0"/>
-              <a:t> — T07 </a:t>
-            </a:r>
-            <a:r>
-              <a:rPr dirty="0" err="1"/>
-              <a:t>민감정보</a:t>
-            </a:r>
-            <a:r>
-              <a:rPr dirty="0"/>
-              <a:t> · T08 </a:t>
-            </a:r>
-            <a:r>
-              <a:rPr dirty="0" err="1"/>
-              <a:t>인젝션</a:t>
-            </a:r>
-            <a:r>
-              <a:rPr dirty="0"/>
-              <a:t> · T09 </a:t>
-            </a:r>
-            <a:r>
-              <a:rPr dirty="0" err="1"/>
-              <a:t>회피</a:t>
-            </a:r>
-            <a:endParaRPr dirty="0"/>
-          </a:p>
-          <a:p>
-            <a:r>
-              <a:rPr dirty="0"/>
-              <a:t>  • </a:t>
-            </a:r>
-            <a:r>
-              <a:rPr dirty="0" err="1"/>
-              <a:t>레이어</a:t>
-            </a:r>
-            <a:r>
-              <a:rPr dirty="0"/>
-              <a:t> 2 </a:t>
-            </a:r>
-            <a:r>
-              <a:rPr dirty="0" err="1"/>
-              <a:t>데이터·모델</a:t>
-            </a:r>
-            <a:r>
-              <a:rPr dirty="0"/>
-              <a:t> — T01 </a:t>
-            </a:r>
-            <a:r>
-              <a:rPr dirty="0" err="1"/>
-              <a:t>오염</a:t>
-            </a:r>
-            <a:r>
-              <a:rPr dirty="0"/>
-              <a:t> · T02 </a:t>
-            </a:r>
-            <a:r>
-              <a:rPr dirty="0" err="1"/>
-              <a:t>비인가</a:t>
-            </a:r>
-            <a:r>
-              <a:rPr dirty="0"/>
-              <a:t> </a:t>
-            </a:r>
-            <a:r>
-              <a:rPr dirty="0" err="1"/>
-              <a:t>학습</a:t>
-            </a:r>
-            <a:r>
-              <a:rPr dirty="0"/>
-              <a:t> · T03 </a:t>
-            </a:r>
-            <a:r>
-              <a:rPr dirty="0" err="1"/>
-              <a:t>백도어</a:t>
-            </a:r>
-            <a:r>
-              <a:rPr dirty="0"/>
-              <a:t> · T04 </a:t>
-            </a:r>
-            <a:r>
-              <a:rPr dirty="0" err="1"/>
-              <a:t>추출</a:t>
-            </a:r>
-            <a:r>
-              <a:rPr dirty="0"/>
-              <a:t> · T05 </a:t>
-            </a:r>
-            <a:r>
-              <a:rPr dirty="0" err="1"/>
-              <a:t>비인가</a:t>
-            </a:r>
-            <a:r>
-              <a:rPr dirty="0"/>
-              <a:t> </a:t>
-            </a:r>
-            <a:r>
-              <a:rPr dirty="0" err="1"/>
-              <a:t>접근</a:t>
-            </a:r>
-            <a:r>
-              <a:rPr dirty="0"/>
-              <a:t> · T06 </a:t>
-            </a:r>
-            <a:r>
-              <a:rPr dirty="0" err="1"/>
-              <a:t>모델</a:t>
-            </a:r>
-            <a:r>
-              <a:rPr dirty="0"/>
-              <a:t> </a:t>
-            </a:r>
-            <a:r>
-              <a:rPr dirty="0" err="1"/>
-              <a:t>추출</a:t>
-            </a:r>
-            <a:endParaRPr dirty="0"/>
-          </a:p>
-          <a:p>
-            <a:r>
-              <a:rPr dirty="0"/>
-              <a:t>  • </a:t>
-            </a:r>
-            <a:r>
-              <a:rPr dirty="0" err="1"/>
-              <a:t>레이어</a:t>
-            </a:r>
-            <a:r>
-              <a:rPr dirty="0"/>
-              <a:t> 3 </a:t>
-            </a:r>
-            <a:r>
-              <a:rPr dirty="0" err="1"/>
-              <a:t>인프라·운영</a:t>
-            </a:r>
-            <a:r>
-              <a:rPr dirty="0"/>
-              <a:t> — T10 </a:t>
-            </a:r>
-            <a:r>
-              <a:rPr dirty="0" err="1"/>
-              <a:t>통신구간</a:t>
-            </a:r>
-            <a:r>
-              <a:rPr dirty="0"/>
-              <a:t> · T11 DoS · T12 </a:t>
-            </a:r>
-            <a:r>
-              <a:rPr dirty="0" err="1"/>
-              <a:t>모니터링</a:t>
-            </a:r>
-            <a:r>
-              <a:rPr dirty="0"/>
-              <a:t> </a:t>
-            </a:r>
-            <a:r>
-              <a:rPr dirty="0" err="1"/>
-              <a:t>부재</a:t>
-            </a:r>
-            <a:r>
-              <a:rPr dirty="0"/>
-              <a:t> · T13 </a:t>
-            </a:r>
-            <a:r>
-              <a:rPr dirty="0" err="1"/>
-              <a:t>권한관리</a:t>
-            </a:r>
-            <a:r>
-              <a:rPr dirty="0"/>
-              <a:t> </a:t>
-            </a:r>
-            <a:r>
-              <a:rPr dirty="0" err="1"/>
-              <a:t>부실</a:t>
-            </a:r>
-            <a:endParaRPr dirty="0"/>
-          </a:p>
-          <a:p>
-            <a:r>
-              <a:rPr dirty="0"/>
-              <a:t>  • </a:t>
-            </a:r>
-            <a:r>
-              <a:rPr dirty="0" err="1"/>
-              <a:t>레이어</a:t>
-            </a:r>
-            <a:r>
-              <a:rPr dirty="0"/>
-              <a:t> 4 </a:t>
-            </a:r>
-            <a:r>
-              <a:rPr dirty="0" err="1"/>
-              <a:t>공급망</a:t>
-            </a:r>
-            <a:r>
-              <a:rPr dirty="0"/>
-              <a:t> — T14 </a:t>
-            </a:r>
-            <a:r>
-              <a:rPr dirty="0" err="1"/>
-              <a:t>공급망</a:t>
-            </a:r>
-            <a:r>
-              <a:rPr dirty="0"/>
-              <a:t> </a:t>
-            </a:r>
-            <a:r>
-              <a:rPr dirty="0" err="1"/>
-              <a:t>공격</a:t>
-            </a:r>
-            <a:r>
-              <a:rPr dirty="0"/>
-              <a:t> · T15 </a:t>
-            </a:r>
-            <a:r>
-              <a:rPr dirty="0" err="1"/>
-              <a:t>용역업체</a:t>
-            </a:r>
-            <a:r>
-              <a:rPr dirty="0"/>
-              <a:t> </a:t>
-            </a:r>
-            <a:r>
-              <a:rPr dirty="0" err="1"/>
-              <a:t>보안</a:t>
-            </a:r>
-            <a:endParaRPr dirty="0"/>
-          </a:p>
-          <a:p>
-            <a:r>
-              <a:rPr dirty="0"/>
-              <a:t>  • </a:t>
-            </a:r>
-            <a:r>
-              <a:rPr dirty="0" err="1"/>
-              <a:t>위협</a:t>
-            </a:r>
-            <a:r>
-              <a:rPr dirty="0"/>
-              <a:t> </a:t>
-            </a:r>
-            <a:r>
-              <a:rPr dirty="0" err="1"/>
-              <a:t>연계</a:t>
-            </a:r>
-            <a:r>
-              <a:rPr dirty="0"/>
-              <a:t>: T14 → T03 → T08 / T12 </a:t>
-            </a:r>
-            <a:r>
-              <a:rPr dirty="0" err="1"/>
-              <a:t>부재</a:t>
-            </a:r>
-            <a:r>
-              <a:rPr dirty="0"/>
-              <a:t> = </a:t>
-            </a:r>
-            <a:r>
-              <a:rPr dirty="0" err="1"/>
-              <a:t>전</a:t>
-            </a:r>
-            <a:r>
-              <a:rPr dirty="0"/>
-              <a:t> </a:t>
-            </a:r>
-            <a:r>
-              <a:rPr dirty="0" err="1"/>
-              <a:t>레이어</a:t>
-            </a:r>
-            <a:r>
-              <a:rPr dirty="0"/>
-              <a:t> </a:t>
-            </a:r>
-            <a:r>
-              <a:rPr dirty="0" err="1"/>
-              <a:t>탐지</a:t>
-            </a:r>
-            <a:r>
-              <a:rPr dirty="0"/>
-              <a:t> </a:t>
-            </a:r>
-            <a:r>
-              <a:rPr dirty="0" err="1"/>
-              <a:t>불가</a:t>
-            </a:r>
-            <a:endParaRPr dirty="0"/>
-          </a:p>
+          <a:p/>
         </p:txBody>
       </p:sp>
       <p:sp>
@@ -2705,261 +1156,7 @@
         <p:txBody>
           <a:bodyPr/>
           <a:lstStyle/>
-          <a:p>
-            <a:r>
-              <a:rPr dirty="0"/>
-              <a:t>⏱️  0:30 · 2.5분</a:t>
-            </a:r>
-          </a:p>
-          <a:p>
-            <a:endParaRPr dirty="0"/>
-          </a:p>
-          <a:p>
-            <a:r>
-              <a:rPr dirty="0"/>
-              <a:t>🎤 </a:t>
-            </a:r>
-            <a:r>
-              <a:rPr dirty="0" err="1"/>
-              <a:t>강사</a:t>
-            </a:r>
-            <a:r>
-              <a:rPr dirty="0"/>
-              <a:t> </a:t>
-            </a:r>
-            <a:r>
-              <a:rPr dirty="0" err="1"/>
-              <a:t>멘트</a:t>
-            </a:r>
-            <a:r>
-              <a:rPr dirty="0"/>
-              <a:t>:</a:t>
-            </a:r>
-          </a:p>
-          <a:p>
-            <a:r>
-              <a:rPr dirty="0" err="1"/>
-              <a:t>핵심은</a:t>
-            </a:r>
-            <a:r>
-              <a:rPr dirty="0"/>
-              <a:t> "</a:t>
-            </a:r>
-            <a:r>
-              <a:rPr dirty="0" err="1"/>
-              <a:t>어떤</a:t>
-            </a:r>
-            <a:r>
-              <a:rPr dirty="0"/>
-              <a:t> M </a:t>
-            </a:r>
-            <a:r>
-              <a:rPr dirty="0" err="1"/>
-              <a:t>을</a:t>
-            </a:r>
-            <a:r>
-              <a:rPr dirty="0"/>
-              <a:t> </a:t>
-            </a:r>
-            <a:r>
-              <a:rPr dirty="0" err="1"/>
-              <a:t>먼저</a:t>
-            </a:r>
-            <a:r>
-              <a:rPr dirty="0"/>
-              <a:t> </a:t>
-            </a:r>
-            <a:r>
-              <a:rPr dirty="0" err="1"/>
-              <a:t>하느냐</a:t>
-            </a:r>
-            <a:r>
-              <a:rPr dirty="0"/>
-              <a:t>" </a:t>
-            </a:r>
-            <a:r>
-              <a:rPr dirty="0" err="1"/>
-              <a:t>가</a:t>
-            </a:r>
-            <a:r>
-              <a:rPr dirty="0"/>
-              <a:t> </a:t>
-            </a:r>
-            <a:r>
-              <a:rPr dirty="0" err="1"/>
-              <a:t>아니라</a:t>
-            </a:r>
-            <a:r>
-              <a:rPr dirty="0"/>
-              <a:t> — "</a:t>
-            </a:r>
-            <a:r>
-              <a:rPr dirty="0" err="1"/>
-              <a:t>우리</a:t>
-            </a:r>
-            <a:r>
-              <a:rPr dirty="0"/>
-              <a:t> </a:t>
-            </a:r>
-            <a:r>
-              <a:rPr dirty="0" err="1"/>
-              <a:t>기관</a:t>
-            </a:r>
-            <a:r>
-              <a:rPr dirty="0"/>
-              <a:t> </a:t>
-            </a:r>
-            <a:r>
-              <a:rPr dirty="0" err="1"/>
-              <a:t>유형에</a:t>
-            </a:r>
-            <a:r>
-              <a:rPr dirty="0"/>
-              <a:t> </a:t>
-            </a:r>
-            <a:r>
-              <a:rPr dirty="0" err="1"/>
-              <a:t>맞게</a:t>
-            </a:r>
-            <a:r>
-              <a:rPr dirty="0"/>
-              <a:t> </a:t>
-            </a:r>
-            <a:r>
-              <a:rPr dirty="0" err="1"/>
-              <a:t>적용하느냐</a:t>
-            </a:r>
-            <a:r>
-              <a:rPr dirty="0"/>
-              <a:t>".</a:t>
-            </a:r>
-          </a:p>
-          <a:p>
-            <a:r>
-              <a:rPr dirty="0" err="1"/>
-              <a:t>핵심</a:t>
-            </a:r>
-            <a:r>
-              <a:rPr dirty="0"/>
-              <a:t> </a:t>
-            </a:r>
-            <a:r>
-              <a:rPr dirty="0" err="1"/>
-              <a:t>포인트</a:t>
-            </a:r>
-            <a:r>
-              <a:rPr dirty="0"/>
-              <a:t>:</a:t>
-            </a:r>
-          </a:p>
-          <a:p>
-            <a:r>
-              <a:rPr dirty="0"/>
-              <a:t>  • </a:t>
-            </a:r>
-            <a:r>
-              <a:rPr dirty="0" err="1"/>
-              <a:t>레이어</a:t>
-            </a:r>
-            <a:r>
-              <a:rPr dirty="0"/>
-              <a:t> 1 (T07-T09) → M01–M05 </a:t>
-            </a:r>
-            <a:r>
-              <a:rPr dirty="0" err="1"/>
-              <a:t>입출력</a:t>
-            </a:r>
-            <a:r>
-              <a:rPr dirty="0"/>
-              <a:t> </a:t>
-            </a:r>
-            <a:r>
-              <a:rPr dirty="0" err="1"/>
-              <a:t>보안</a:t>
-            </a:r>
-            <a:endParaRPr dirty="0"/>
-          </a:p>
-          <a:p>
-            <a:r>
-              <a:rPr dirty="0"/>
-              <a:t>  • </a:t>
-            </a:r>
-            <a:r>
-              <a:rPr dirty="0" err="1"/>
-              <a:t>레이어</a:t>
-            </a:r>
-            <a:r>
-              <a:rPr dirty="0"/>
-              <a:t> 2 (T01-T06) → M06–M17 </a:t>
-            </a:r>
-            <a:r>
-              <a:rPr dirty="0" err="1"/>
-              <a:t>데이터·모델</a:t>
-            </a:r>
-            <a:r>
-              <a:rPr dirty="0"/>
-              <a:t> </a:t>
-            </a:r>
-            <a:r>
-              <a:rPr dirty="0" err="1"/>
-              <a:t>보안</a:t>
-            </a:r>
-            <a:endParaRPr dirty="0"/>
-          </a:p>
-          <a:p>
-            <a:r>
-              <a:rPr dirty="0"/>
-              <a:t>  • </a:t>
-            </a:r>
-            <a:r>
-              <a:rPr dirty="0" err="1"/>
-              <a:t>레이어</a:t>
-            </a:r>
-            <a:r>
-              <a:rPr dirty="0"/>
-              <a:t> 3 (T10-T13) → M18–M24 </a:t>
-            </a:r>
-            <a:r>
-              <a:rPr dirty="0" err="1"/>
-              <a:t>인프라·운영</a:t>
-            </a:r>
-            <a:r>
-              <a:rPr dirty="0"/>
-              <a:t> </a:t>
-            </a:r>
-            <a:r>
-              <a:rPr dirty="0" err="1"/>
-              <a:t>보안</a:t>
-            </a:r>
-            <a:endParaRPr dirty="0"/>
-          </a:p>
-          <a:p>
-            <a:r>
-              <a:rPr dirty="0"/>
-              <a:t>  • </a:t>
-            </a:r>
-            <a:r>
-              <a:rPr dirty="0" err="1"/>
-              <a:t>레이어</a:t>
-            </a:r>
-            <a:r>
-              <a:rPr dirty="0"/>
-              <a:t> 4 (T14-T15) → M25–M30 </a:t>
-            </a:r>
-            <a:r>
-              <a:rPr dirty="0" err="1"/>
-              <a:t>공급망·감사</a:t>
-            </a:r>
-            <a:r>
-              <a:rPr dirty="0"/>
-              <a:t> </a:t>
-            </a:r>
-            <a:r>
-              <a:rPr dirty="0" err="1"/>
-              <a:t>보안</a:t>
-            </a:r>
-            <a:endParaRPr dirty="0"/>
-          </a:p>
+          <a:p/>
         </p:txBody>
       </p:sp>
       <p:sp>
@@ -3065,42 +1262,7 @@
         <p:txBody>
           <a:bodyPr/>
           <a:lstStyle/>
-          <a:p>
-            <a:r>
-              <a:t>⏱️  0:33 · 0.5분</a:t>
-            </a:r>
-          </a:p>
-          <a:p>
-            <a:r>
-              <a:t>(헤더 슬라이드 — 짧게)</a:t>
-            </a:r>
-          </a:p>
-          <a:p>
-            <a:endParaRPr/>
-          </a:p>
-          <a:p>
-            <a:r>
-              <a:t>🎤 강사 멘트:</a:t>
-            </a:r>
-          </a:p>
-          <a:p>
-            <a:r>
-              <a:t>NIS 가 위협 목록이었다면, KISA 는 누가 무엇을 해야 하는지 — 역할별 수칙.</a:t>
-            </a:r>
-          </a:p>
-          <a:p>
-            <a:endParaRPr/>
-          </a:p>
-          <a:p>
-            <a:r>
-              <a:t>핵심 포인트:</a:t>
-            </a:r>
-          </a:p>
-          <a:p>
-            <a:r>
-              <a:t>  • NIS 가 "What"이었다면 — KISA 는 "Who/How"</a:t>
-            </a:r>
-          </a:p>
+          <a:p/>
         </p:txBody>
       </p:sp>
       <p:sp>
@@ -3248,255 +1410,7 @@
         <p:txBody>
           <a:bodyPr/>
           <a:lstStyle/>
-          <a:p>
-            <a:r>
-              <a:rPr dirty="0"/>
-              <a:t>🎤 </a:t>
-            </a:r>
-            <a:r>
-              <a:rPr dirty="0" err="1"/>
-              <a:t>강사</a:t>
-            </a:r>
-            <a:r>
-              <a:rPr dirty="0"/>
-              <a:t> </a:t>
-            </a:r>
-            <a:r>
-              <a:rPr dirty="0" err="1"/>
-              <a:t>멘트</a:t>
-            </a:r>
-            <a:r>
-              <a:rPr dirty="0"/>
-              <a:t>:</a:t>
-            </a:r>
-          </a:p>
-          <a:p>
-            <a:r>
-              <a:rPr dirty="0" err="1"/>
-              <a:t>오전엔</a:t>
-            </a:r>
-            <a:r>
-              <a:rPr dirty="0"/>
-              <a:t> </a:t>
-            </a:r>
-            <a:r>
-              <a:rPr dirty="0" err="1"/>
-              <a:t>이론</a:t>
-            </a:r>
-            <a:r>
-              <a:rPr dirty="0"/>
-              <a:t> </a:t>
-            </a:r>
-            <a:r>
-              <a:rPr dirty="0" err="1"/>
-              <a:t>두</a:t>
-            </a:r>
-            <a:r>
-              <a:rPr dirty="0"/>
-              <a:t> </a:t>
-            </a:r>
-            <a:r>
-              <a:rPr dirty="0" err="1"/>
-              <a:t>슬롯으로</a:t>
-            </a:r>
-            <a:r>
-              <a:rPr dirty="0"/>
-              <a:t> </a:t>
-            </a:r>
-            <a:r>
-              <a:rPr dirty="0" err="1"/>
-              <a:t>위협의</a:t>
-            </a:r>
-            <a:r>
-              <a:rPr dirty="0"/>
-              <a:t> </a:t>
-            </a:r>
-            <a:r>
-              <a:rPr dirty="0" err="1"/>
-              <a:t>분류를</a:t>
-            </a:r>
-            <a:r>
-              <a:rPr dirty="0"/>
-              <a:t> </a:t>
-            </a:r>
-            <a:r>
-              <a:rPr dirty="0" err="1"/>
-              <a:t>잡고</a:t>
-            </a:r>
-            <a:r>
-              <a:rPr dirty="0"/>
-              <a:t>, </a:t>
-            </a:r>
-            <a:r>
-              <a:rPr dirty="0" err="1"/>
-              <a:t>오후엔</a:t>
-            </a:r>
-            <a:r>
-              <a:rPr dirty="0"/>
-              <a:t> </a:t>
-            </a:r>
-            <a:r>
-              <a:rPr dirty="0" err="1"/>
-              <a:t>직접</a:t>
-            </a:r>
-            <a:r>
-              <a:rPr dirty="0"/>
-              <a:t> </a:t>
-            </a:r>
-            <a:r>
-              <a:rPr dirty="0" err="1"/>
-              <a:t>공격해</a:t>
-            </a:r>
-            <a:r>
-              <a:rPr dirty="0"/>
-              <a:t> </a:t>
-            </a:r>
-            <a:r>
-              <a:rPr dirty="0" err="1"/>
-              <a:t>보면서</a:t>
-            </a:r>
-            <a:r>
-              <a:rPr dirty="0"/>
-              <a:t> </a:t>
-            </a:r>
-            <a:r>
-              <a:rPr dirty="0" err="1"/>
-              <a:t>확인하는</a:t>
-            </a:r>
-            <a:r>
-              <a:rPr dirty="0"/>
-              <a:t> </a:t>
-            </a:r>
-            <a:r>
-              <a:rPr dirty="0" err="1"/>
-              <a:t>흐름입니다</a:t>
-            </a:r>
-            <a:r>
-              <a:rPr dirty="0"/>
-              <a:t>.</a:t>
-            </a:r>
-          </a:p>
-          <a:p>
-            <a:endParaRPr dirty="0"/>
-          </a:p>
-          <a:p>
-            <a:r>
-              <a:rPr dirty="0" err="1"/>
-              <a:t>핵심</a:t>
-            </a:r>
-            <a:r>
-              <a:rPr dirty="0"/>
-              <a:t> </a:t>
-            </a:r>
-            <a:r>
-              <a:rPr dirty="0" err="1"/>
-              <a:t>포인트</a:t>
-            </a:r>
-            <a:r>
-              <a:rPr dirty="0"/>
-              <a:t>:</a:t>
-            </a:r>
-          </a:p>
-          <a:p>
-            <a:r>
-              <a:rPr dirty="0"/>
-              <a:t>  • 슬롯1 (</a:t>
-            </a:r>
-            <a:r>
-              <a:rPr dirty="0" err="1"/>
-              <a:t>이론</a:t>
-            </a:r>
-            <a:r>
-              <a:rPr dirty="0"/>
-              <a:t>) NIS·KISA </a:t>
-            </a:r>
-            <a:r>
-              <a:rPr dirty="0" err="1"/>
-              <a:t>비교분석</a:t>
-            </a:r>
-            <a:r>
-              <a:rPr dirty="0"/>
-              <a:t> · 슬롯2 (</a:t>
-            </a:r>
-            <a:r>
-              <a:rPr dirty="0" err="1"/>
-              <a:t>이론</a:t>
-            </a:r>
-            <a:r>
-              <a:rPr dirty="0"/>
-              <a:t>) OWASP LLM Top 10</a:t>
-            </a:r>
-          </a:p>
-          <a:p>
-            <a:r>
-              <a:rPr dirty="0"/>
-              <a:t>  • 슬롯3·4·5 (</a:t>
-            </a:r>
-            <a:r>
-              <a:rPr dirty="0" err="1"/>
-              <a:t>실습</a:t>
-            </a:r>
-            <a:r>
-              <a:rPr dirty="0"/>
-              <a:t>) </a:t>
-            </a:r>
-            <a:r>
-              <a:rPr dirty="0" err="1"/>
-              <a:t>프롬프트</a:t>
-            </a:r>
-            <a:r>
-              <a:rPr dirty="0"/>
-              <a:t> </a:t>
-            </a:r>
-            <a:r>
-              <a:rPr dirty="0" err="1"/>
-              <a:t>인젝션</a:t>
-            </a:r>
-            <a:r>
-              <a:rPr dirty="0"/>
-              <a:t> / </a:t>
-            </a:r>
-            <a:r>
-              <a:rPr dirty="0" err="1"/>
-              <a:t>출력통제·데이터유출</a:t>
-            </a:r>
-            <a:r>
-              <a:rPr dirty="0"/>
-              <a:t> / </a:t>
-            </a:r>
-            <a:r>
-              <a:rPr dirty="0" err="1"/>
-              <a:t>임베딩·벡터DB</a:t>
-            </a:r>
-            <a:endParaRPr dirty="0"/>
-          </a:p>
-          <a:p>
-            <a:r>
-              <a:rPr dirty="0"/>
-              <a:t>  • Agent · </a:t>
-            </a:r>
-            <a:r>
-              <a:rPr dirty="0" err="1"/>
-              <a:t>동형암호는</a:t>
-            </a:r>
-            <a:r>
-              <a:rPr dirty="0"/>
-              <a:t> 4일차 </a:t>
-            </a:r>
-            <a:r>
-              <a:rPr dirty="0" err="1"/>
-              <a:t>심화</a:t>
-            </a:r>
-            <a:r>
-              <a:rPr dirty="0"/>
-              <a:t> </a:t>
-            </a:r>
-            <a:r>
-              <a:rPr dirty="0" err="1"/>
-              <a:t>주제</a:t>
-            </a:r>
-            <a:endParaRPr dirty="0"/>
-          </a:p>
+          <a:p/>
         </p:txBody>
       </p:sp>
       <p:sp>
@@ -3638,244 +1552,7 @@
         <p:txBody>
           <a:bodyPr/>
           <a:lstStyle/>
-          <a:p>
-            <a:r>
-              <a:rPr dirty="0" err="1"/>
-              <a:t>오늘은</a:t>
-            </a:r>
-            <a:r>
-              <a:rPr dirty="0"/>
-              <a:t> </a:t>
-            </a:r>
-            <a:r>
-              <a:rPr dirty="0" err="1"/>
-              <a:t>첫</a:t>
-            </a:r>
-            <a:r>
-              <a:rPr dirty="0"/>
-              <a:t> </a:t>
-            </a:r>
-            <a:r>
-              <a:rPr dirty="0" err="1"/>
-              <a:t>번째</a:t>
-            </a:r>
-            <a:r>
-              <a:rPr dirty="0"/>
-              <a:t> — AI </a:t>
-            </a:r>
-            <a:r>
-              <a:rPr dirty="0" err="1"/>
-              <a:t>자체를</a:t>
-            </a:r>
-            <a:r>
-              <a:rPr dirty="0"/>
-              <a:t> </a:t>
-            </a:r>
-            <a:r>
-              <a:rPr dirty="0" err="1"/>
-              <a:t>어떻게</a:t>
-            </a:r>
-            <a:r>
-              <a:rPr dirty="0"/>
-              <a:t> </a:t>
-            </a:r>
-            <a:r>
-              <a:rPr dirty="0" err="1"/>
-              <a:t>지키느냐</a:t>
-            </a:r>
-            <a:r>
-              <a:rPr dirty="0"/>
-              <a:t>. </a:t>
-            </a:r>
-            <a:r>
-              <a:rPr dirty="0" err="1"/>
-              <a:t>두</a:t>
-            </a:r>
-            <a:r>
-              <a:rPr dirty="0"/>
-              <a:t> </a:t>
-            </a:r>
-            <a:r>
-              <a:rPr dirty="0" err="1"/>
-              <a:t>번째</a:t>
-            </a:r>
-            <a:r>
-              <a:rPr dirty="0"/>
-              <a:t> (AI for Security) </a:t>
-            </a:r>
-            <a:r>
-              <a:rPr dirty="0" err="1"/>
-              <a:t>는</a:t>
-            </a:r>
-            <a:r>
-              <a:rPr dirty="0"/>
-              <a:t> 4일차에서.</a:t>
-            </a:r>
-          </a:p>
-          <a:p>
-            <a:endParaRPr dirty="0"/>
-          </a:p>
-          <a:p>
-            <a:r>
-              <a:rPr dirty="0" err="1"/>
-              <a:t>핵심</a:t>
-            </a:r>
-            <a:r>
-              <a:rPr dirty="0"/>
-              <a:t> </a:t>
-            </a:r>
-            <a:r>
-              <a:rPr dirty="0" err="1"/>
-              <a:t>포인트</a:t>
-            </a:r>
-            <a:r>
-              <a:rPr dirty="0"/>
-              <a:t>:</a:t>
-            </a:r>
-          </a:p>
-          <a:p>
-            <a:r>
-              <a:rPr dirty="0"/>
-              <a:t>  • Security for AI — AI </a:t>
-            </a:r>
-            <a:r>
-              <a:rPr dirty="0" err="1"/>
-              <a:t>시스템을</a:t>
-            </a:r>
-            <a:r>
-              <a:rPr dirty="0"/>
-              <a:t> </a:t>
-            </a:r>
-            <a:r>
-              <a:rPr dirty="0" err="1"/>
-              <a:t>공격으로부터</a:t>
-            </a:r>
-            <a:r>
-              <a:rPr dirty="0"/>
-              <a:t> </a:t>
-            </a:r>
-            <a:r>
-              <a:rPr dirty="0" err="1"/>
-              <a:t>보호</a:t>
-            </a:r>
-            <a:r>
-              <a:rPr dirty="0"/>
-              <a:t> (</a:t>
-            </a:r>
-            <a:r>
-              <a:rPr dirty="0" err="1"/>
-              <a:t>오늘</a:t>
-            </a:r>
-            <a:r>
-              <a:rPr dirty="0"/>
-              <a:t> </a:t>
-            </a:r>
-            <a:r>
-              <a:rPr dirty="0" err="1"/>
-              <a:t>주제</a:t>
-            </a:r>
-            <a:r>
-              <a:rPr dirty="0"/>
-              <a:t>)</a:t>
-            </a:r>
-          </a:p>
-          <a:p>
-            <a:r>
-              <a:rPr dirty="0"/>
-              <a:t>  • AI for Security — AI </a:t>
-            </a:r>
-            <a:r>
-              <a:rPr dirty="0" err="1"/>
-              <a:t>를</a:t>
-            </a:r>
-            <a:r>
-              <a:rPr dirty="0"/>
-              <a:t> </a:t>
-            </a:r>
-            <a:r>
-              <a:rPr dirty="0" err="1"/>
-              <a:t>보안</a:t>
-            </a:r>
-            <a:r>
-              <a:rPr dirty="0"/>
-              <a:t> </a:t>
-            </a:r>
-            <a:r>
-              <a:rPr dirty="0" err="1"/>
-              <a:t>업무에</a:t>
-            </a:r>
-            <a:r>
-              <a:rPr dirty="0"/>
-              <a:t> </a:t>
-            </a:r>
-            <a:r>
-              <a:rPr dirty="0" err="1"/>
-              <a:t>활용</a:t>
-            </a:r>
-            <a:r>
-              <a:rPr dirty="0"/>
-              <a:t> (</a:t>
-            </a:r>
-            <a:r>
-              <a:rPr dirty="0" err="1"/>
-              <a:t>악성코드</a:t>
-            </a:r>
-            <a:r>
-              <a:rPr dirty="0"/>
-              <a:t> </a:t>
-            </a:r>
-            <a:r>
-              <a:rPr dirty="0" err="1"/>
-              <a:t>탐지</a:t>
-            </a:r>
-            <a:r>
-              <a:rPr dirty="0"/>
-              <a:t> </a:t>
-            </a:r>
-            <a:r>
-              <a:rPr dirty="0" err="1"/>
-              <a:t>등</a:t>
-            </a:r>
-            <a:r>
-              <a:rPr dirty="0"/>
-              <a:t>)</a:t>
-            </a:r>
-          </a:p>
-          <a:p>
-            <a:r>
-              <a:rPr dirty="0"/>
-              <a:t>  • KISA 3대 </a:t>
-            </a:r>
-            <a:r>
-              <a:rPr dirty="0" err="1"/>
-              <a:t>목적</a:t>
-            </a:r>
-            <a:r>
-              <a:rPr dirty="0"/>
-              <a:t>: ① </a:t>
-            </a:r>
-            <a:r>
-              <a:rPr dirty="0" err="1"/>
-              <a:t>보안성</a:t>
-            </a:r>
-            <a:r>
-              <a:rPr dirty="0"/>
-              <a:t> ② </a:t>
-            </a:r>
-            <a:r>
-              <a:rPr dirty="0" err="1"/>
-              <a:t>안전성</a:t>
-            </a:r>
-            <a:r>
-              <a:rPr dirty="0"/>
-              <a:t> ③ </a:t>
-            </a:r>
-            <a:r>
-              <a:rPr dirty="0" err="1"/>
-              <a:t>신뢰성</a:t>
-            </a:r>
-            <a:endParaRPr dirty="0"/>
-          </a:p>
+          <a:p/>
         </p:txBody>
       </p:sp>
       <p:sp>
@@ -3957,47 +1634,7 @@
         <p:txBody>
           <a:bodyPr/>
           <a:lstStyle/>
-          <a:p>
-            <a:r>
-              <a:t>⏱️  0:36 · 1.5분</a:t>
-            </a:r>
-          </a:p>
-          <a:p>
-            <a:endParaRPr/>
-          </a:p>
-          <a:p>
-            <a:r>
-              <a:t>🎤 강사 멘트:</a:t>
-            </a:r>
-          </a:p>
-          <a:p>
-            <a:r>
-              <a:t>한 번 만들고 끝이 아니라 — 분석 → 감지 → 대응을 순환해야 합니다.</a:t>
-            </a:r>
-          </a:p>
-          <a:p>
-            <a:endParaRPr/>
-          </a:p>
-          <a:p>
-            <a:r>
-              <a:t>핵심 포인트:</a:t>
-            </a:r>
-          </a:p>
-          <a:p>
-            <a:r>
-              <a:t>  • 1단계 위험 분석 (Pre) — 자산 식별 · T코드 매핑 · 취약점 평가</a:t>
-            </a:r>
-          </a:p>
-          <a:p>
-            <a:r>
-              <a:t>  • 2단계 위험 감지 (In) — 이상 입출력 · 모델 행동 · 환각 감시</a:t>
-            </a:r>
-          </a:p>
-          <a:p>
-            <a:r>
-              <a:t>  • 3단계 사고 대응 (Post) — 격리 · 원인 분석 · 모델 롤백</a:t>
-            </a:r>
-          </a:p>
+          <a:p/>
         </p:txBody>
       </p:sp>
       <p:sp>
@@ -4079,312 +1716,7 @@
         <p:txBody>
           <a:bodyPr/>
           <a:lstStyle/>
-          <a:p>
-            <a:r>
-              <a:rPr dirty="0"/>
-              <a:t>⏱️  0:37 · 2.5분</a:t>
-            </a:r>
-          </a:p>
-          <a:p>
-            <a:r>
-              <a:rPr dirty="0"/>
-              <a:t>★ KEEP — </a:t>
-            </a:r>
-            <a:r>
-              <a:rPr dirty="0" err="1"/>
-              <a:t>절대</a:t>
-            </a:r>
-            <a:r>
-              <a:rPr dirty="0"/>
-              <a:t> </a:t>
-            </a:r>
-            <a:r>
-              <a:rPr dirty="0" err="1"/>
-              <a:t>빠뜨리지</a:t>
-            </a:r>
-            <a:r>
-              <a:rPr dirty="0"/>
-              <a:t> </a:t>
-            </a:r>
-            <a:r>
-              <a:rPr dirty="0" err="1"/>
-              <a:t>말</a:t>
-            </a:r>
-            <a:r>
-              <a:rPr dirty="0"/>
-              <a:t> </a:t>
-            </a:r>
-            <a:r>
-              <a:rPr dirty="0" err="1"/>
-              <a:t>것</a:t>
-            </a:r>
-            <a:endParaRPr dirty="0"/>
-          </a:p>
-          <a:p>
-            <a:endParaRPr dirty="0"/>
-          </a:p>
-          <a:p>
-            <a:r>
-              <a:rPr dirty="0"/>
-              <a:t>🎤 </a:t>
-            </a:r>
-            <a:r>
-              <a:rPr dirty="0" err="1"/>
-              <a:t>강사</a:t>
-            </a:r>
-            <a:r>
-              <a:rPr dirty="0"/>
-              <a:t> </a:t>
-            </a:r>
-            <a:r>
-              <a:rPr dirty="0" err="1"/>
-              <a:t>멘트</a:t>
-            </a:r>
-            <a:r>
-              <a:rPr dirty="0"/>
-              <a:t>:</a:t>
-            </a:r>
-          </a:p>
-          <a:p>
-            <a:r>
-              <a:rPr dirty="0" err="1"/>
-              <a:t>여러분</a:t>
-            </a:r>
-            <a:r>
-              <a:rPr dirty="0"/>
-              <a:t> </a:t>
-            </a:r>
-            <a:r>
-              <a:rPr dirty="0" err="1"/>
-              <a:t>기관에서</a:t>
-            </a:r>
-            <a:r>
-              <a:rPr dirty="0"/>
-              <a:t> </a:t>
-            </a:r>
-            <a:r>
-              <a:rPr dirty="0" err="1"/>
-              <a:t>본인이</a:t>
-            </a:r>
-            <a:r>
-              <a:rPr dirty="0"/>
-              <a:t> </a:t>
-            </a:r>
-            <a:r>
-              <a:rPr dirty="0" err="1"/>
-              <a:t>어느</a:t>
-            </a:r>
-            <a:r>
-              <a:rPr dirty="0"/>
-              <a:t> </a:t>
-            </a:r>
-            <a:r>
-              <a:rPr dirty="0" err="1"/>
-              <a:t>역할인지</a:t>
-            </a:r>
-            <a:r>
-              <a:rPr dirty="0"/>
-              <a:t> — </a:t>
-            </a:r>
-            <a:r>
-              <a:rPr dirty="0" err="1"/>
-              <a:t>다음</a:t>
-            </a:r>
-            <a:r>
-              <a:rPr dirty="0"/>
-              <a:t> </a:t>
-            </a:r>
-            <a:r>
-              <a:rPr dirty="0" err="1"/>
-              <a:t>슬라이드부터</a:t>
-            </a:r>
-            <a:r>
-              <a:rPr dirty="0"/>
-              <a:t> </a:t>
-            </a:r>
-            <a:r>
-              <a:rPr dirty="0" err="1"/>
-              <a:t>그</a:t>
-            </a:r>
-            <a:r>
-              <a:rPr dirty="0"/>
-              <a:t> </a:t>
-            </a:r>
-            <a:r>
-              <a:rPr dirty="0" err="1"/>
-              <a:t>역할의</a:t>
-            </a:r>
-            <a:r>
-              <a:rPr dirty="0"/>
-              <a:t> </a:t>
-            </a:r>
-            <a:r>
-              <a:rPr dirty="0" err="1"/>
-              <a:t>수칙이</a:t>
-            </a:r>
-            <a:r>
-              <a:rPr dirty="0"/>
-              <a:t> </a:t>
-            </a:r>
-            <a:r>
-              <a:rPr dirty="0" err="1"/>
-              <a:t>나옵니다</a:t>
-            </a:r>
-            <a:r>
-              <a:rPr dirty="0"/>
-              <a:t>.</a:t>
-            </a:r>
-          </a:p>
-          <a:p>
-            <a:endParaRPr dirty="0"/>
-          </a:p>
-          <a:p>
-            <a:r>
-              <a:rPr dirty="0" err="1"/>
-              <a:t>핵심</a:t>
-            </a:r>
-            <a:r>
-              <a:rPr dirty="0"/>
-              <a:t> </a:t>
-            </a:r>
-            <a:r>
-              <a:rPr dirty="0" err="1"/>
-              <a:t>포인트</a:t>
-            </a:r>
-            <a:r>
-              <a:rPr dirty="0"/>
-              <a:t>:</a:t>
-            </a:r>
-          </a:p>
-          <a:p>
-            <a:r>
-              <a:rPr dirty="0"/>
-              <a:t>  • </a:t>
-            </a:r>
-            <a:r>
-              <a:rPr dirty="0" err="1"/>
-              <a:t>범주</a:t>
-            </a:r>
-            <a:r>
-              <a:rPr dirty="0"/>
-              <a:t>: </a:t>
-            </a:r>
-            <a:r>
-              <a:rPr dirty="0" err="1"/>
-              <a:t>보안성</a:t>
-            </a:r>
-            <a:r>
-              <a:rPr dirty="0"/>
-              <a:t> · </a:t>
-            </a:r>
-            <a:r>
-              <a:rPr dirty="0" err="1"/>
-              <a:t>안전성</a:t>
-            </a:r>
-            <a:r>
-              <a:rPr dirty="0"/>
-              <a:t> · </a:t>
-            </a:r>
-            <a:r>
-              <a:rPr dirty="0" err="1"/>
-              <a:t>신뢰성</a:t>
-            </a:r>
-            <a:endParaRPr dirty="0"/>
-          </a:p>
-          <a:p>
-            <a:r>
-              <a:rPr dirty="0"/>
-              <a:t>  • </a:t>
-            </a:r>
-            <a:r>
-              <a:rPr dirty="0" err="1"/>
-              <a:t>역할</a:t>
-            </a:r>
-            <a:r>
-              <a:rPr dirty="0"/>
-              <a:t>: 💻 </a:t>
-            </a:r>
-            <a:r>
-              <a:rPr dirty="0" err="1"/>
-              <a:t>개발자</a:t>
-            </a:r>
-            <a:r>
-              <a:rPr dirty="0"/>
-              <a:t> · 🏢 </a:t>
-            </a:r>
-            <a:r>
-              <a:rPr dirty="0" err="1"/>
-              <a:t>제공자</a:t>
-            </a:r>
-            <a:r>
-              <a:rPr dirty="0"/>
-              <a:t> · 🪖 </a:t>
-            </a:r>
-            <a:r>
-              <a:rPr dirty="0" err="1"/>
-              <a:t>이용자</a:t>
-            </a:r>
-            <a:endParaRPr dirty="0"/>
-          </a:p>
-          <a:p>
-            <a:r>
-              <a:rPr dirty="0"/>
-              <a:t>  • </a:t>
-            </a:r>
-            <a:r>
-              <a:rPr dirty="0" err="1"/>
-              <a:t>표를</a:t>
-            </a:r>
-            <a:r>
-              <a:rPr dirty="0"/>
-              <a:t> </a:t>
-            </a:r>
-            <a:r>
-              <a:rPr dirty="0" err="1"/>
-              <a:t>한눈에</a:t>
-            </a:r>
-            <a:r>
-              <a:rPr dirty="0"/>
-              <a:t> </a:t>
-            </a:r>
-            <a:r>
-              <a:rPr dirty="0" err="1"/>
-              <a:t>보여주고</a:t>
-            </a:r>
-            <a:r>
-              <a:rPr dirty="0"/>
-              <a:t> — "</a:t>
-            </a:r>
-            <a:r>
-              <a:rPr dirty="0" err="1"/>
-              <a:t>본인은</a:t>
-            </a:r>
-            <a:r>
-              <a:rPr dirty="0"/>
-              <a:t> </a:t>
-            </a:r>
-            <a:r>
-              <a:rPr dirty="0" err="1"/>
-              <a:t>어느</a:t>
-            </a:r>
-            <a:r>
-              <a:rPr dirty="0"/>
-              <a:t> </a:t>
-            </a:r>
-            <a:r>
-              <a:rPr dirty="0" err="1"/>
-              <a:t>칸인가</a:t>
-            </a:r>
-            <a:r>
-              <a:rPr dirty="0"/>
-              <a:t>?" </a:t>
-            </a:r>
-            <a:r>
-              <a:rPr dirty="0" err="1"/>
-              <a:t>질문</a:t>
-            </a:r>
-            <a:endParaRPr dirty="0"/>
-          </a:p>
+          <a:p/>
         </p:txBody>
       </p:sp>
       <p:sp>
@@ -4466,42 +1798,7 @@
         <p:txBody>
           <a:bodyPr/>
           <a:lstStyle/>
-          <a:p>
-            <a:r>
-              <a:t>⏱️  0:40 · 2분</a:t>
-            </a:r>
-          </a:p>
-          <a:p>
-            <a:endParaRPr/>
-          </a:p>
-          <a:p>
-            <a:r>
-              <a:t>🎤 강사 멘트:</a:t>
-            </a:r>
-          </a:p>
-          <a:p>
-            <a:r>
-              <a:t>보안은 배포 후 문제가 아닙니다. 기획부터 파기까지 — 각 단계에 담당자 책임을 명시해야 합니다.</a:t>
-            </a:r>
-          </a:p>
-          <a:p>
-            <a:endParaRPr/>
-          </a:p>
-          <a:p>
-            <a:r>
-              <a:t>핵심 포인트:</a:t>
-            </a:r>
-          </a:p>
-          <a:p>
-            <a:r>
-              <a:t>  • ① 기획·설계 (Security by Design) ② 데이터 수집 (T01·T02) ③ 모델 개발 (T03·T09)</a:t>
-            </a:r>
-          </a:p>
-          <a:p>
-            <a:r>
-              <a:t>  • ④ 배포 (T14·T06) ⑤ 운영·모니터링 (T08·T11) ⑥ 파기 (잔여 데이터)</a:t>
-            </a:r>
-          </a:p>
+          <a:p/>
         </p:txBody>
       </p:sp>
       <p:sp>
@@ -4583,47 +1880,7 @@
         <p:txBody>
           <a:bodyPr/>
           <a:lstStyle/>
-          <a:p>
-            <a:r>
-              <a:t>⏱️  0:42 · 2.5분</a:t>
-            </a:r>
-          </a:p>
-          <a:p>
-            <a:endParaRPr/>
-          </a:p>
-          <a:p>
-            <a:r>
-              <a:t>🎤 강사 멘트:</a:t>
-            </a:r>
-          </a:p>
-          <a:p>
-            <a:r>
-              <a:t>기존 정보보안 체크리스트와 90% 겹칩니다. 다른 10% 가 AI 특화 — 학습데이터 출처 / Rate Limit 가 핵심.</a:t>
-            </a:r>
-          </a:p>
-          <a:p>
-            <a:endParaRPr/>
-          </a:p>
-          <a:p>
-            <a:r>
-              <a:t>핵심 포인트:</a:t>
-            </a:r>
-          </a:p>
-          <a:p>
-            <a:r>
-              <a:t>  • 🗄 데이터 무결성 — TLS 1.3 · AES-256 · MAC/HMAC</a:t>
-            </a:r>
-          </a:p>
-          <a:p>
-            <a:r>
-              <a:t>  • 🔐 접근통제 — RBAC · MFA · API 키 90일 교체</a:t>
-            </a:r>
-          </a:p>
-          <a:p>
-            <a:r>
-              <a:t>  • 🔗 공급망 — CVE 모니터링 · 해시 검증 · Rate Limit</a:t>
-            </a:r>
-          </a:p>
+          <a:p/>
         </p:txBody>
       </p:sp>
       <p:sp>
@@ -4723,42 +1980,7 @@
         <p:txBody>
           <a:bodyPr/>
           <a:lstStyle/>
-          <a:p>
-            <a:r>
-              <a:t>⏱️  0:44 · 0.5분</a:t>
-            </a:r>
-          </a:p>
-          <a:p>
-            <a:r>
-              <a:t>(헤더 슬라이드 — 짧게)</a:t>
-            </a:r>
-          </a:p>
-          <a:p>
-            <a:endParaRPr/>
-          </a:p>
-          <a:p>
-            <a:r>
-              <a:t>🎤 강사 멘트:</a:t>
-            </a:r>
-          </a:p>
-          <a:p>
-            <a:r>
-              <a:t>개발자가 만든 시스템을 — 운영·제공자가 어떻게 관리하느냐.</a:t>
-            </a:r>
-          </a:p>
-          <a:p>
-            <a:endParaRPr/>
-          </a:p>
-          <a:p>
-            <a:r>
-              <a:t>핵심 포인트:</a:t>
-            </a:r>
-          </a:p>
-          <a:p>
-            <a:r>
-              <a:t>  • 서비스 제공자의 거버넌스·운영 체계로 전환</a:t>
-            </a:r>
-          </a:p>
+          <a:p/>
         </p:txBody>
       </p:sp>
       <p:sp>
@@ -4846,47 +2068,7 @@
         <p:txBody>
           <a:bodyPr/>
           <a:lstStyle/>
-          <a:p>
-            <a:r>
-              <a:t>⏱️  0:45 · 2.5분</a:t>
-            </a:r>
-          </a:p>
-          <a:p>
-            <a:endParaRPr/>
-          </a:p>
-          <a:p>
-            <a:r>
-              <a:t>🎤 강사 멘트:</a:t>
-            </a:r>
-          </a:p>
-          <a:p>
-            <a:r>
-              <a:t>군 AI 도입 시 권장 순서: NIS 로 식별 → KISA 로 역할 배분 → OWASP 로 구현 검증.</a:t>
-            </a:r>
-          </a:p>
-          <a:p>
-            <a:endParaRPr/>
-          </a:p>
-          <a:p>
-            <a:r>
-              <a:t>핵심 포인트:</a:t>
-            </a:r>
-          </a:p>
-          <a:p>
-            <a:r>
-              <a:t>  • 📋 보안 정책 — 등급 분류 · 역할 RACI · 컴플라이언스</a:t>
-            </a:r>
-          </a:p>
-          <a:p>
-            <a:r>
-              <a:t>  • 🏗 조직·역할 — CISO 산하 AI 담당자 · 외주 보안 창구 단일화</a:t>
-            </a:r>
-          </a:p>
-          <a:p>
-            <a:r>
-              <a:t>  • ⚖ 위험관리 프로세스 — T코드 매핑 → 위험 점수화 → 분기별 재평가</a:t>
-            </a:r>
-          </a:p>
+          <a:p/>
         </p:txBody>
       </p:sp>
       <p:sp>
@@ -4968,47 +2150,7 @@
         <p:txBody>
           <a:bodyPr/>
           <a:lstStyle/>
-          <a:p>
-            <a:r>
-              <a:t>⏱️  0:47 · 2.5분</a:t>
-            </a:r>
-          </a:p>
-          <a:p>
-            <a:endParaRPr/>
-          </a:p>
-          <a:p>
-            <a:r>
-              <a:t>🎤 강사 멘트:</a:t>
-            </a:r>
-          </a:p>
-          <a:p>
-            <a:r>
-              <a:t>NIST CSF 와 동일 구조 — 국제 표준과 호환되니 정보보안팀이 이미 익숙할 겁니다.</a:t>
-            </a:r>
-          </a:p>
-          <a:p>
-            <a:endParaRPr/>
-          </a:p>
-          <a:p>
-            <a:r>
-              <a:t>핵심 포인트:</a:t>
-            </a:r>
-          </a:p>
-          <a:p>
-            <a:r>
-              <a:t>  • 🔍 식별 → 🛡 보호 → ⚡ 탐지 → 🚨 대응 → 🔄 복구</a:t>
-            </a:r>
-          </a:p>
-          <a:p>
-            <a:r>
-              <a:t>  • T12 (사고 정보 부재) 가 탐지 실패의 핵심</a:t>
-            </a:r>
-          </a:p>
-          <a:p>
-            <a:r>
-              <a:t>  • KISA 72h 신고 의무 + 작전 연속성 확보</a:t>
-            </a:r>
-          </a:p>
+          <a:p/>
         </p:txBody>
       </p:sp>
       <p:sp>
@@ -5090,52 +2232,7 @@
         <p:txBody>
           <a:bodyPr/>
           <a:lstStyle/>
-          <a:p>
-            <a:r>
-              <a:t>⏱️  0:50 · 1분</a:t>
-            </a:r>
-          </a:p>
-          <a:p>
-            <a:r>
-              <a:t>★ KEEP — 절대 빠뜨리지 말 것</a:t>
-            </a:r>
-          </a:p>
-          <a:p>
-            <a:endParaRPr/>
-          </a:p>
-          <a:p>
-            <a:r>
-              <a:t>🎤 강사 멘트:</a:t>
-            </a:r>
-          </a:p>
-          <a:p>
-            <a:r>
-              <a:t>수강생 대부분이 "이용자" 입니다 — 이 10대 수칙이 바로 본인 업무에 적용됩니다.</a:t>
-            </a:r>
-          </a:p>
-          <a:p>
-            <a:endParaRPr/>
-          </a:p>
-          <a:p>
-            <a:r>
-              <a:t>핵심 포인트:</a:t>
-            </a:r>
-          </a:p>
-          <a:p>
-            <a:r>
-              <a:t>  • ① 공식 사이트 · HTTPS 만 ② 강력한 비밀번호 + 주기 변경</a:t>
-            </a:r>
-          </a:p>
-          <a:p>
-            <a:r>
-              <a:t>  • ③ 공용 네트워크 금지 ④ 중요·기밀 입력 금지 ⑤ 이용약관·학습 활용 여부 확인</a:t>
-            </a:r>
-          </a:p>
-          <a:p>
-            <a:r>
-              <a:t>  • 참고: 삼성전자 ChatGPT 유출 사례 (④번 위반)</a:t>
-            </a:r>
-          </a:p>
+          <a:p/>
         </p:txBody>
       </p:sp>
       <p:sp>
@@ -5217,47 +2314,7 @@
         <p:txBody>
           <a:bodyPr/>
           <a:lstStyle/>
-          <a:p>
-            <a:r>
-              <a:t>⏱️  0:51 · 1분</a:t>
-            </a:r>
-          </a:p>
-          <a:p>
-            <a:endParaRPr/>
-          </a:p>
-          <a:p>
-            <a:r>
-              <a:t>🎤 강사 멘트:</a:t>
-            </a:r>
-          </a:p>
-          <a:p>
-            <a:r>
-              <a:t>9번 — 음성·영상 명령은 반드시 별도 채널로 진위 확인. 군 환경에서 가장 시급한 항목.</a:t>
-            </a:r>
-          </a:p>
-          <a:p>
-            <a:endParaRPr/>
-          </a:p>
-          <a:p>
-            <a:r>
-              <a:t>핵심 포인트:</a:t>
-            </a:r>
-          </a:p>
-          <a:p>
-            <a:r>
-              <a:t>  • ⑥ AI 출력 검증 (환각 — LLM09) ⑦ 이상 출력 신고 ⑧ AI 생성 사실 명시</a:t>
-            </a:r>
-          </a:p>
-          <a:p>
-            <a:r>
-              <a:t>  • ⑨ 딥페이크 명령 진위 확인 — 지휘관 음성 복제 = 군 핵심 위협</a:t>
-            </a:r>
-          </a:p>
-          <a:p>
-            <a:r>
-              <a:t>  • ⑩ 정기 AI 보안 교육 — 인간이 마지막 방어선</a:t>
-            </a:r>
-          </a:p>
+          <a:p/>
         </p:txBody>
       </p:sp>
       <p:sp>
@@ -5441,42 +2498,7 @@
         <p:txBody>
           <a:bodyPr/>
           <a:lstStyle/>
-          <a:p>
-            <a:r>
-              <a:t>⏱️  0:52 · 0.5분</a:t>
-            </a:r>
-          </a:p>
-          <a:p>
-            <a:r>
-              <a:t>(헤더 슬라이드 — 짧게)</a:t>
-            </a:r>
-          </a:p>
-          <a:p>
-            <a:endParaRPr/>
-          </a:p>
-          <a:p>
-            <a:r>
-              <a:t>🎤 강사 멘트:</a:t>
-            </a:r>
-          </a:p>
-          <a:p>
-            <a:r>
-              <a:t>두 문서를 따로 보면 헷갈리지만 — 시각 차이를 한 장으로 정리하면 명확합니다.</a:t>
-            </a:r>
-          </a:p>
-          <a:p>
-            <a:endParaRPr/>
-          </a:p>
-          <a:p>
-            <a:r>
-              <a:t>핵심 포인트:</a:t>
-            </a:r>
-          </a:p>
-          <a:p>
-            <a:r>
-              <a:t>  • 두 가이드 — 어떻게 다르고 어떻게 합쳐 쓰나</a:t>
-            </a:r>
-          </a:p>
+          <a:p/>
         </p:txBody>
       </p:sp>
       <p:sp>
@@ -5624,42 +2646,7 @@
         <p:txBody>
           <a:bodyPr/>
           <a:lstStyle/>
-          <a:p>
-            <a:r>
-              <a:t>⏱️  0:56 · 1.5분</a:t>
-            </a:r>
-          </a:p>
-          <a:p>
-            <a:endParaRPr/>
-          </a:p>
-          <a:p>
-            <a:r>
-              <a:t>🎤 강사 멘트:</a:t>
-            </a:r>
-          </a:p>
-          <a:p>
-            <a:r>
-              <a:t>같은 위협이라도 — 기관 유형에 따라 우선 적용할 대책이 다릅니다. 본인 기관이 어디인지 손 들어 보세요.</a:t>
-            </a:r>
-          </a:p>
-          <a:p>
-            <a:endParaRPr/>
-          </a:p>
-          <a:p>
-            <a:r>
-              <a:t>핵심 포인트:</a:t>
-            </a:r>
-          </a:p>
-          <a:p>
-            <a:r>
-              <a:t>  • ① 내부망 전용 ② 외부망 연계 ③ 대민서비스 ④ 상용 AI 활용</a:t>
-            </a:r>
-          </a:p>
-          <a:p>
-            <a:r>
-              <a:t>  • NIS 가이드북 (2025.12) 제2장 기준</a:t>
-            </a:r>
-          </a:p>
+          <a:p/>
         </p:txBody>
       </p:sp>
       <p:sp>
@@ -5741,47 +2728,7 @@
         <p:txBody>
           <a:bodyPr/>
           <a:lstStyle/>
-          <a:p>
-            <a:r>
-              <a:t>⏱️  0:57 · 1.5분</a:t>
-            </a:r>
-          </a:p>
-          <a:p>
-            <a:endParaRPr/>
-          </a:p>
-          <a:p>
-            <a:r>
-              <a:t>🎤 강사 멘트:</a:t>
-            </a:r>
-          </a:p>
-          <a:p>
-            <a:r>
-              <a:t>"내부망이라 안전" 은 착각 — 비공개 자료 취급·제어시스템 연계 시 위협 존재. M09 모니터링 + M21 비상대응 필수.</a:t>
-            </a:r>
-          </a:p>
-          <a:p>
-            <a:endParaRPr/>
-          </a:p>
-          <a:p>
-            <a:r>
-              <a:t>핵심 포인트:</a:t>
-            </a:r>
-          </a:p>
-          <a:p>
-            <a:r>
-              <a:t>  • 외부 공격 상대적 안전 — 그래도 T05·T13 존재</a:t>
-            </a:r>
-          </a:p>
-          <a:p>
-            <a:r>
-              <a:t>  • 핵심 대책: M17 (분리) · M19 (권한) · M21 (비상대응)</a:t>
-            </a:r>
-          </a:p>
-          <a:p>
-            <a:r>
-              <a:t>  • 사례: 스마트 인재관리 · AI 정수장 · 스마트교차로</a:t>
-            </a:r>
-          </a:p>
+          <a:p/>
         </p:txBody>
       </p:sp>
       <p:sp>
@@ -5863,47 +2810,7 @@
         <p:txBody>
           <a:bodyPr/>
           <a:lstStyle/>
-          <a:p>
-            <a:r>
-              <a:t>⏱️  0:59 · 1.5분</a:t>
-            </a:r>
-          </a:p>
-          <a:p>
-            <a:endParaRPr/>
-          </a:p>
-          <a:p>
-            <a:r>
-              <a:t>🎤 강사 멘트:</a:t>
-            </a:r>
-          </a:p>
-          <a:p>
-            <a:r>
-              <a:t>내·외부망 접점이 가장 위험한 지점. 외부 데이터 수집 시 오염 차단 + 신뢰 출처 가 시작.</a:t>
-            </a:r>
-          </a:p>
-          <a:p>
-            <a:endParaRPr/>
-          </a:p>
-          <a:p>
-            <a:r>
-              <a:t>핵심 포인트:</a:t>
-            </a:r>
-          </a:p>
-          <a:p>
-            <a:r>
-              <a:t>  • 주요 위협: T01 오염 / T03 백도어 / T06 모델 추출</a:t>
-            </a:r>
-          </a:p>
-          <a:p>
-            <a:r>
-              <a:t>  • 핵심: M01·M03 출처 검증 · M07 등급분류 · M17 경계보안</a:t>
-            </a:r>
-          </a:p>
-          <a:p>
-            <a:r>
-              <a:t>  • 사례: AI 신고접수시스템 (외부 음성 → 내부 처리)</a:t>
-            </a:r>
-          </a:p>
+          <a:p/>
         </p:txBody>
       </p:sp>
       <p:sp>
@@ -5985,47 +2892,7 @@
         <p:txBody>
           <a:bodyPr/>
           <a:lstStyle/>
-          <a:p>
-            <a:r>
-              <a:t>⏱️  1:00 · 1.5분</a:t>
-            </a:r>
-          </a:p>
-          <a:p>
-            <a:endParaRPr/>
-          </a:p>
-          <a:p>
-            <a:r>
-              <a:t>🎤 강사 멘트:</a:t>
-            </a:r>
-          </a:p>
-          <a:p>
-            <a:r>
-              <a:t>불특정 다수가 접근 — 여기가 슬롯3 Gandalf 실습과 가장 가까운 환경. 가드레일을 다중화해야 한 곳 뚫려도 다른 곳에서 막힙니다.</a:t>
-            </a:r>
-          </a:p>
-          <a:p>
-            <a:endParaRPr/>
-          </a:p>
-          <a:p>
-            <a:r>
-              <a:t>핵심 포인트:</a:t>
-            </a:r>
-          </a:p>
-          <a:p>
-            <a:r>
-              <a:t>  • 주요 위협: T04 추출 · T07 민감정보 · T08 인젝션 · T11 DoS</a:t>
-            </a:r>
-          </a:p>
-          <a:p>
-            <a:r>
-              <a:t>  • 핵심: M13·M14 입출력 필터 · M15 가드레일 다중화 · M18 통신보호</a:t>
-            </a:r>
-          </a:p>
-          <a:p>
-            <a:r>
-              <a:t>  • 사례: 기관 챗봇 — 공개등급만 학습 (M07) + 인젝션 방어 (M13·M14)</a:t>
-            </a:r>
-          </a:p>
+          <a:p/>
         </p:txBody>
       </p:sp>
       <p:sp>
@@ -6107,47 +2974,7 @@
         <p:txBody>
           <a:bodyPr/>
           <a:lstStyle/>
-          <a:p>
-            <a:r>
-              <a:t>⏱️  1:02 · 1.5분</a:t>
-            </a:r>
-          </a:p>
-          <a:p>
-            <a:endParaRPr/>
-          </a:p>
-          <a:p>
-            <a:r>
-              <a:t>🎤 강사 멘트:</a:t>
-            </a:r>
-          </a:p>
-          <a:p>
-            <a:r>
-              <a:t>가장 흔한 유형이고 — 가장 사고 잦은 유형. 입력 자체를 제도로 막아야 합니다.</a:t>
-            </a:r>
-          </a:p>
-          <a:p>
-            <a:endParaRPr/>
-          </a:p>
-          <a:p>
-            <a:r>
-              <a:t>핵심 포인트:</a:t>
-            </a:r>
-          </a:p>
-          <a:p>
-            <a:r>
-              <a:t>  • 주요 위협: 내부정보 외부 유출 · 망 접점 공격 · 계정 관리</a:t>
-            </a:r>
-          </a:p>
-          <a:p>
-            <a:r>
-              <a:t>  • 핵심 수칙: 민감정보 입력 금지 · AI-DLP 필터링 · 사용 로그 관리 · API 키 보안</a:t>
-            </a:r>
-          </a:p>
-          <a:p>
-            <a:r>
-              <a:t>  • 사례: 삼성전자 (2023) — 직원이 ChatGPT 에 반도체 코드 → 전사 사용 금지</a:t>
-            </a:r>
-          </a:p>
+          <a:p/>
         </p:txBody>
       </p:sp>
       <p:sp>
@@ -6229,47 +3056,7 @@
         <p:txBody>
           <a:bodyPr/>
           <a:lstStyle/>
-          <a:p>
-            <a:r>
-              <a:t>⏱️  1:03 · 1.5분</a:t>
-            </a:r>
-          </a:p>
-          <a:p>
-            <a:r>
-              <a:t>★ KEEP — 절대 빠뜨리지 말 것</a:t>
-            </a:r>
-          </a:p>
-          <a:p>
-            <a:endParaRPr/>
-          </a:p>
-          <a:p>
-            <a:r>
-              <a:t>🎤 강사 멘트:</a:t>
-            </a:r>
-          </a:p>
-          <a:p>
-            <a:r>
-              <a:t>이 표를 캡처해서 본인 기관 유형의 행만 따라 적용하세요 — 가장 실무적인 한 장.</a:t>
-            </a:r>
-          </a:p>
-          <a:p>
-            <a:endParaRPr/>
-          </a:p>
-          <a:p>
-            <a:r>
-              <a:t>핵심 포인트:</a:t>
-            </a:r>
-          </a:p>
-          <a:p>
-            <a:r>
-              <a:t>  • 5개 카테고리 × 4유형 매트릭스 (경계 / 데이터 / 접근 / 모니터링 / 공격대비)</a:t>
-            </a:r>
-          </a:p>
-          <a:p>
-            <a:r>
-              <a:t>  • 본인 기관 유형의 행만 따라가면 — 우선순위 명확</a:t>
-            </a:r>
-          </a:p>
+          <a:p/>
         </p:txBody>
       </p:sp>
       <p:sp>
@@ -6369,42 +3156,7 @@
         <p:txBody>
           <a:bodyPr/>
           <a:lstStyle/>
-          <a:p>
-            <a:r>
-              <a:t>⏱️  0:52 · 0.5분</a:t>
-            </a:r>
-          </a:p>
-          <a:p>
-            <a:r>
-              <a:t>(헤더 슬라이드 — 짧게)</a:t>
-            </a:r>
-          </a:p>
-          <a:p>
-            <a:endParaRPr/>
-          </a:p>
-          <a:p>
-            <a:r>
-              <a:t>🎤 강사 멘트:</a:t>
-            </a:r>
-          </a:p>
-          <a:p>
-            <a:r>
-              <a:t>두 문서를 따로 보면 헷갈리지만 — 시각 차이를 한 장으로 정리하면 명확합니다.</a:t>
-            </a:r>
-          </a:p>
-          <a:p>
-            <a:endParaRPr/>
-          </a:p>
-          <a:p>
-            <a:r>
-              <a:t>핵심 포인트:</a:t>
-            </a:r>
-          </a:p>
-          <a:p>
-            <a:r>
-              <a:t>  • 두 가이드 — 어떻게 다르고 어떻게 합쳐 쓰나</a:t>
-            </a:r>
-          </a:p>
+          <a:p/>
         </p:txBody>
       </p:sp>
       <p:sp>
@@ -6552,333 +3304,7 @@
         <p:txBody>
           <a:bodyPr/>
           <a:lstStyle/>
-          <a:p>
-            <a:r>
-              <a:t>이</a:t>
-            </a:r>
-            <a:r>
-              <a:rPr dirty="0"/>
-              <a:t> </a:t>
-            </a:r>
-            <a:r>
-              <a:rPr dirty="0" err="1"/>
-              <a:t>한</a:t>
-            </a:r>
-            <a:r>
-              <a:rPr dirty="0"/>
-              <a:t> </a:t>
-            </a:r>
-            <a:r>
-              <a:rPr dirty="0" err="1"/>
-              <a:t>장만</a:t>
-            </a:r>
-            <a:r>
-              <a:rPr dirty="0"/>
-              <a:t> </a:t>
-            </a:r>
-            <a:r>
-              <a:rPr dirty="0" err="1"/>
-              <a:t>외워도</a:t>
-            </a:r>
-            <a:r>
-              <a:rPr dirty="0"/>
-              <a:t> </a:t>
-            </a:r>
-            <a:r>
-              <a:rPr dirty="0" err="1"/>
-              <a:t>절반은</a:t>
-            </a:r>
-            <a:r>
-              <a:rPr dirty="0"/>
-              <a:t> </a:t>
-            </a:r>
-            <a:r>
-              <a:rPr dirty="0" err="1"/>
-              <a:t>끝난</a:t>
-            </a:r>
-            <a:r>
-              <a:rPr dirty="0"/>
-              <a:t> </a:t>
-            </a:r>
-            <a:r>
-              <a:rPr dirty="0" err="1"/>
-              <a:t>겁니다</a:t>
-            </a:r>
-            <a:r>
-              <a:rPr dirty="0"/>
-              <a:t>. </a:t>
-            </a:r>
-            <a:r>
-              <a:rPr dirty="0" err="1"/>
-              <a:t>두</a:t>
-            </a:r>
-            <a:r>
-              <a:rPr dirty="0"/>
-              <a:t> </a:t>
-            </a:r>
-            <a:r>
-              <a:rPr dirty="0" err="1"/>
-              <a:t>문서를</a:t>
-            </a:r>
-            <a:r>
-              <a:rPr dirty="0"/>
-              <a:t> </a:t>
-            </a:r>
-            <a:r>
-              <a:rPr dirty="0" err="1"/>
-              <a:t>같이</a:t>
-            </a:r>
-            <a:r>
-              <a:rPr dirty="0"/>
-              <a:t> </a:t>
-            </a:r>
-            <a:r>
-              <a:rPr dirty="0" err="1"/>
-              <a:t>써야</a:t>
-            </a:r>
-            <a:r>
-              <a:rPr dirty="0"/>
-              <a:t> </a:t>
-            </a:r>
-            <a:r>
-              <a:rPr dirty="0" err="1"/>
-              <a:t>완전한</a:t>
-            </a:r>
-            <a:r>
-              <a:rPr dirty="0"/>
-              <a:t> </a:t>
-            </a:r>
-            <a:r>
-              <a:rPr dirty="0" err="1"/>
-              <a:t>보안</a:t>
-            </a:r>
-            <a:r>
-              <a:rPr dirty="0"/>
-              <a:t> </a:t>
-            </a:r>
-            <a:r>
-              <a:rPr dirty="0" err="1"/>
-              <a:t>체계가</a:t>
-            </a:r>
-            <a:r>
-              <a:rPr dirty="0"/>
-              <a:t> </a:t>
-            </a:r>
-            <a:r>
-              <a:rPr dirty="0" err="1"/>
-              <a:t>됩니다</a:t>
-            </a:r>
-            <a:r>
-              <a:rPr dirty="0"/>
-              <a:t>.</a:t>
-            </a:r>
-          </a:p>
-          <a:p>
-            <a:endParaRPr dirty="0"/>
-          </a:p>
-          <a:p>
-            <a:r>
-              <a:rPr dirty="0" err="1"/>
-              <a:t>핵심</a:t>
-            </a:r>
-            <a:r>
-              <a:rPr dirty="0"/>
-              <a:t> </a:t>
-            </a:r>
-            <a:r>
-              <a:rPr dirty="0" err="1"/>
-              <a:t>포인트</a:t>
-            </a:r>
-            <a:r>
-              <a:rPr dirty="0"/>
-              <a:t>:</a:t>
-            </a:r>
-          </a:p>
-          <a:p>
-            <a:r>
-              <a:rPr dirty="0"/>
-              <a:t>  • NIS — </a:t>
-            </a:r>
-            <a:r>
-              <a:rPr dirty="0" err="1"/>
-              <a:t>위협·대책</a:t>
-            </a:r>
-            <a:r>
-              <a:rPr dirty="0"/>
-              <a:t> </a:t>
-            </a:r>
-            <a:r>
-              <a:rPr dirty="0" err="1"/>
-              <a:t>중심</a:t>
-            </a:r>
-            <a:r>
-              <a:rPr dirty="0"/>
-              <a:t> / T-M </a:t>
-            </a:r>
-            <a:r>
-              <a:rPr dirty="0" err="1"/>
-              <a:t>거울</a:t>
-            </a:r>
-            <a:r>
-              <a:rPr dirty="0"/>
-              <a:t> </a:t>
-            </a:r>
-            <a:r>
-              <a:rPr dirty="0" err="1"/>
-              <a:t>구조</a:t>
-            </a:r>
-            <a:r>
-              <a:rPr dirty="0"/>
-              <a:t> / 4 </a:t>
-            </a:r>
-            <a:r>
-              <a:rPr dirty="0" err="1"/>
-              <a:t>레이어</a:t>
-            </a:r>
-            <a:r>
-              <a:rPr dirty="0"/>
-              <a:t> / </a:t>
-            </a:r>
-            <a:r>
-              <a:rPr dirty="0" err="1"/>
-              <a:t>보안</a:t>
-            </a:r>
-            <a:r>
-              <a:rPr dirty="0"/>
-              <a:t> </a:t>
-            </a:r>
-            <a:r>
-              <a:rPr dirty="0" err="1"/>
-              <a:t>체크리스트</a:t>
-            </a:r>
-            <a:endParaRPr dirty="0"/>
-          </a:p>
-          <a:p>
-            <a:r>
-              <a:rPr dirty="0"/>
-              <a:t>  • KISA — </a:t>
-            </a:r>
-            <a:r>
-              <a:rPr dirty="0" err="1"/>
-              <a:t>역할·책임</a:t>
-            </a:r>
-            <a:r>
-              <a:rPr dirty="0"/>
-              <a:t> </a:t>
-            </a:r>
-            <a:r>
-              <a:rPr dirty="0" err="1"/>
-              <a:t>중심</a:t>
-            </a:r>
-            <a:r>
-              <a:rPr dirty="0"/>
-              <a:t> / 3역할 / </a:t>
-            </a:r>
-            <a:r>
-              <a:rPr dirty="0" err="1"/>
-              <a:t>생명주기별</a:t>
-            </a:r>
-            <a:r>
-              <a:rPr dirty="0"/>
-              <a:t> / </a:t>
-            </a:r>
-            <a:r>
-              <a:rPr dirty="0" err="1"/>
-              <a:t>거버넌스</a:t>
-            </a:r>
-            <a:r>
-              <a:rPr dirty="0"/>
-              <a:t> </a:t>
-            </a:r>
-            <a:r>
-              <a:rPr dirty="0" err="1"/>
-              <a:t>설계</a:t>
-            </a:r>
-            <a:endParaRPr dirty="0"/>
-          </a:p>
-          <a:p>
-            <a:r>
-              <a:rPr dirty="0"/>
-              <a:t>  • </a:t>
-            </a:r>
-            <a:r>
-              <a:rPr dirty="0" err="1"/>
-              <a:t>결론</a:t>
-            </a:r>
-            <a:r>
-              <a:rPr dirty="0"/>
-              <a:t>: NIS </a:t>
-            </a:r>
-            <a:r>
-              <a:rPr dirty="0" err="1"/>
-              <a:t>로</a:t>
-            </a:r>
-            <a:r>
-              <a:rPr dirty="0"/>
-              <a:t> </a:t>
-            </a:r>
-            <a:r>
-              <a:rPr dirty="0" err="1"/>
-              <a:t>무엇을</a:t>
-            </a:r>
-            <a:r>
-              <a:rPr dirty="0"/>
-              <a:t> </a:t>
-            </a:r>
-            <a:r>
-              <a:rPr dirty="0" err="1"/>
-              <a:t>막을지</a:t>
-            </a:r>
-            <a:r>
-              <a:rPr dirty="0"/>
-              <a:t> </a:t>
-            </a:r>
-            <a:r>
-              <a:rPr dirty="0" err="1"/>
-              <a:t>식별</a:t>
-            </a:r>
-            <a:r>
-              <a:rPr dirty="0"/>
-              <a:t> → KISA </a:t>
-            </a:r>
-            <a:r>
-              <a:rPr dirty="0" err="1"/>
-              <a:t>로</a:t>
-            </a:r>
-            <a:r>
-              <a:rPr dirty="0"/>
-              <a:t> </a:t>
-            </a:r>
-            <a:r>
-              <a:rPr dirty="0" err="1"/>
-              <a:t>누가</a:t>
-            </a:r>
-            <a:r>
-              <a:rPr dirty="0"/>
-              <a:t> </a:t>
-            </a:r>
-            <a:r>
-              <a:rPr dirty="0" err="1"/>
-              <a:t>언제</a:t>
-            </a:r>
-            <a:r>
-              <a:rPr dirty="0"/>
-              <a:t> </a:t>
-            </a:r>
-            <a:r>
-              <a:rPr dirty="0" err="1"/>
-              <a:t>실행할지</a:t>
-            </a:r>
-            <a:r>
-              <a:rPr dirty="0"/>
-              <a:t> </a:t>
-            </a:r>
-            <a:r>
-              <a:rPr dirty="0" err="1"/>
-              <a:t>배정</a:t>
-            </a:r>
-            <a:endParaRPr dirty="0"/>
-          </a:p>
+          <a:p/>
         </p:txBody>
       </p:sp>
       <p:sp>
@@ -6978,57 +3404,7 @@
         <p:txBody>
           <a:bodyPr/>
           <a:lstStyle/>
-          <a:p>
-            <a:r>
-              <a:t>⏱️  1:05 · 2.5분</a:t>
-            </a:r>
-          </a:p>
-          <a:p>
-            <a:endParaRPr/>
-          </a:p>
-          <a:p>
-            <a:r>
-              <a:t>🎤 강사 멘트:</a:t>
-            </a:r>
-          </a:p>
-          <a:p>
-            <a:r>
-              <a:t>NIS 가 시작점이고, KISA 가 책임 배분, OWASP 가 구현 검증. 셋을 합쳐도 — 마지막 줄은 사람입니다.</a:t>
-            </a:r>
-          </a:p>
-          <a:p>
-            <a:endParaRPr/>
-          </a:p>
-          <a:p>
-            <a:r>
-              <a:t>핵심 포인트:</a:t>
-            </a:r>
-          </a:p>
-          <a:p>
-            <a:r>
-              <a:t>  • 한 프레임워크만으로는 반드시 공백이 생긴다</a:t>
-            </a:r>
-          </a:p>
-          <a:p>
-            <a:r>
-              <a:t>  • 🔷 NIS: 법적 위협 분류 — 시작점이지 완성 아님 (LLM05·07·09 누락)</a:t>
-            </a:r>
-          </a:p>
-          <a:p>
-            <a:r>
-              <a:t>  • 🔶 KISA: 역할 배분 — 외주 계약 시 안전성 범주 포함 필수</a:t>
-            </a:r>
-          </a:p>
-          <a:p>
-            <a:r>
-              <a:t>  • 🔵 OWASP: 구현 검증 — 코드 레벨 공백 차단</a:t>
-            </a:r>
-          </a:p>
-          <a:p>
-            <a:r>
-              <a:t>  • ❗ LLM09 환각은 세 프레임워크로도 부족 — 인간 검증 필수</a:t>
-            </a:r>
-          </a:p>
+          <a:p/>
         </p:txBody>
       </p:sp>
       <p:sp>
@@ -7116,262 +3492,7 @@
         <p:txBody>
           <a:bodyPr/>
           <a:lstStyle/>
-          <a:p>
-            <a:r>
-              <a:rPr dirty="0" err="1"/>
-              <a:t>오늘</a:t>
-            </a:r>
-            <a:r>
-              <a:rPr dirty="0"/>
-              <a:t> </a:t>
-            </a:r>
-            <a:r>
-              <a:rPr dirty="0" err="1"/>
-              <a:t>끝나면</a:t>
-            </a:r>
-            <a:r>
-              <a:rPr dirty="0"/>
-              <a:t> — "</a:t>
-            </a:r>
-            <a:r>
-              <a:rPr dirty="0" err="1"/>
-              <a:t>위협을</a:t>
-            </a:r>
-            <a:r>
-              <a:rPr dirty="0"/>
-              <a:t> </a:t>
-            </a:r>
-            <a:r>
-              <a:rPr dirty="0" err="1"/>
-              <a:t>설명할</a:t>
-            </a:r>
-            <a:r>
-              <a:rPr dirty="0"/>
-              <a:t> </a:t>
-            </a:r>
-            <a:r>
-              <a:rPr dirty="0" err="1"/>
-              <a:t>수</a:t>
-            </a:r>
-            <a:r>
-              <a:rPr dirty="0"/>
-              <a:t> </a:t>
-            </a:r>
-            <a:r>
-              <a:rPr dirty="0" err="1"/>
-              <a:t>있고</a:t>
-            </a:r>
-            <a:r>
-              <a:rPr dirty="0"/>
-              <a:t>, </a:t>
-            </a:r>
-            <a:r>
-              <a:rPr dirty="0" err="1"/>
-              <a:t>직접</a:t>
-            </a:r>
-            <a:r>
-              <a:rPr dirty="0"/>
-              <a:t> </a:t>
-            </a:r>
-            <a:r>
-              <a:rPr dirty="0" err="1"/>
-              <a:t>시연할</a:t>
-            </a:r>
-            <a:r>
-              <a:rPr dirty="0"/>
-              <a:t> </a:t>
-            </a:r>
-            <a:r>
-              <a:rPr dirty="0" err="1"/>
-              <a:t>수</a:t>
-            </a:r>
-            <a:r>
-              <a:rPr dirty="0"/>
-              <a:t> </a:t>
-            </a:r>
-            <a:r>
-              <a:rPr dirty="0" err="1"/>
-              <a:t>있고</a:t>
-            </a:r>
-            <a:r>
-              <a:rPr dirty="0"/>
-              <a:t>, </a:t>
-            </a:r>
-            <a:r>
-              <a:rPr dirty="0" err="1"/>
-              <a:t>자기</a:t>
-            </a:r>
-            <a:r>
-              <a:rPr dirty="0"/>
-              <a:t> </a:t>
-            </a:r>
-            <a:r>
-              <a:rPr dirty="0" err="1"/>
-              <a:t>기관에</a:t>
-            </a:r>
-            <a:r>
-              <a:rPr dirty="0"/>
-              <a:t> </a:t>
-            </a:r>
-            <a:r>
-              <a:rPr dirty="0" err="1"/>
-              <a:t>대응</a:t>
-            </a:r>
-            <a:r>
-              <a:rPr dirty="0"/>
-              <a:t> </a:t>
-            </a:r>
-            <a:r>
-              <a:rPr dirty="0" err="1"/>
-              <a:t>수칙을</a:t>
-            </a:r>
-            <a:r>
-              <a:rPr dirty="0"/>
-              <a:t> </a:t>
-            </a:r>
-            <a:r>
-              <a:rPr dirty="0" err="1"/>
-              <a:t>매핑할</a:t>
-            </a:r>
-            <a:r>
-              <a:rPr dirty="0"/>
-              <a:t> </a:t>
-            </a:r>
-            <a:r>
-              <a:rPr dirty="0" err="1"/>
-              <a:t>수</a:t>
-            </a:r>
-            <a:r>
-              <a:rPr dirty="0"/>
-              <a:t> </a:t>
-            </a:r>
-            <a:r>
-              <a:rPr dirty="0" err="1"/>
-              <a:t>있다"가</a:t>
-            </a:r>
-            <a:r>
-              <a:rPr dirty="0"/>
-              <a:t> </a:t>
-            </a:r>
-            <a:r>
-              <a:rPr dirty="0" err="1"/>
-              <a:t>목표입니다</a:t>
-            </a:r>
-            <a:r>
-              <a:rPr dirty="0"/>
-              <a:t>.</a:t>
-            </a:r>
-          </a:p>
-          <a:p>
-            <a:endParaRPr dirty="0"/>
-          </a:p>
-          <a:p>
-            <a:r>
-              <a:rPr dirty="0" err="1"/>
-              <a:t>핵심</a:t>
-            </a:r>
-            <a:r>
-              <a:rPr dirty="0"/>
-              <a:t> </a:t>
-            </a:r>
-            <a:r>
-              <a:rPr dirty="0" err="1"/>
-              <a:t>포인트</a:t>
-            </a:r>
-            <a:r>
-              <a:rPr dirty="0"/>
-              <a:t>:</a:t>
-            </a:r>
-          </a:p>
-          <a:p>
-            <a:r>
-              <a:rPr dirty="0"/>
-              <a:t>  • 슬롯1: NIS T01-T15 + KISA </a:t>
-            </a:r>
-            <a:r>
-              <a:rPr dirty="0" err="1"/>
-              <a:t>역할별</a:t>
-            </a:r>
-            <a:r>
-              <a:rPr dirty="0"/>
-              <a:t> </a:t>
-            </a:r>
-            <a:r>
-              <a:rPr dirty="0" err="1"/>
-              <a:t>수칙</a:t>
-            </a:r>
-            <a:r>
-              <a:rPr dirty="0"/>
-              <a:t> </a:t>
-            </a:r>
-            <a:r>
-              <a:rPr dirty="0" err="1"/>
-              <a:t>비교</a:t>
-            </a:r>
-            <a:endParaRPr dirty="0"/>
-          </a:p>
-          <a:p>
-            <a:r>
-              <a:rPr dirty="0"/>
-              <a:t>  • 슬롯2: OWASP LLM Top 10 ↔ NIS </a:t>
-            </a:r>
-            <a:r>
-              <a:rPr dirty="0" err="1"/>
-              <a:t>매핑</a:t>
-            </a:r>
-            <a:r>
-              <a:rPr dirty="0"/>
-              <a:t> + </a:t>
-            </a:r>
-            <a:r>
-              <a:rPr dirty="0" err="1"/>
-              <a:t>공백</a:t>
-            </a:r>
-            <a:r>
-              <a:rPr dirty="0"/>
-              <a:t> 4종 </a:t>
-            </a:r>
-            <a:r>
-              <a:rPr dirty="0" err="1"/>
-              <a:t>식별</a:t>
-            </a:r>
-            <a:endParaRPr dirty="0"/>
-          </a:p>
-          <a:p>
-            <a:r>
-              <a:rPr dirty="0"/>
-              <a:t>  • 슬롯3–5: </a:t>
-            </a:r>
-            <a:r>
-              <a:rPr dirty="0" err="1"/>
-              <a:t>직접</a:t>
-            </a:r>
-            <a:r>
-              <a:rPr dirty="0"/>
-              <a:t> </a:t>
-            </a:r>
-            <a:r>
-              <a:rPr dirty="0" err="1"/>
-              <a:t>공격</a:t>
-            </a:r>
-            <a:r>
-              <a:rPr dirty="0"/>
-              <a:t> → </a:t>
-            </a:r>
-            <a:r>
-              <a:rPr dirty="0" err="1"/>
-              <a:t>탐지</a:t>
-            </a:r>
-            <a:r>
-              <a:rPr dirty="0"/>
-              <a:t> → </a:t>
-            </a:r>
-            <a:r>
-              <a:rPr dirty="0" err="1"/>
-              <a:t>대응까지</a:t>
-            </a:r>
-            <a:endParaRPr dirty="0"/>
-          </a:p>
+          <a:p/>
         </p:txBody>
       </p:sp>
       <p:sp>
@@ -7453,52 +3574,7 @@
         <p:txBody>
           <a:bodyPr/>
           <a:lstStyle/>
-          <a:p>
-            <a:r>
-              <a:t>⏱️  1:07 · 1.5분</a:t>
-            </a:r>
-          </a:p>
-          <a:p>
-            <a:r>
-              <a:t>★ KEEP — 절대 빠뜨리지 말 것</a:t>
-            </a:r>
-          </a:p>
-          <a:p>
-            <a:endParaRPr/>
-          </a:p>
-          <a:p>
-            <a:r>
-              <a:t>🎤 강사 멘트:</a:t>
-            </a:r>
-          </a:p>
-          <a:p>
-            <a:r>
-              <a:t>오늘 슬롯1 에서 가져갈 세 줄. 슬롯2 에선 OWASP 시각으로 한 번 더 — 같은 위협을 다른 언어로.</a:t>
-            </a:r>
-          </a:p>
-          <a:p>
-            <a:endParaRPr/>
-          </a:p>
-          <a:p>
-            <a:r>
-              <a:t>핵심 포인트:</a:t>
-            </a:r>
-          </a:p>
-          <a:p>
-            <a:r>
-              <a:t>  • 1. NIS T01–T15 — 4 레이어로 위협 분류, M01–M30 거울 대응</a:t>
-            </a:r>
-          </a:p>
-          <a:p>
-            <a:r>
-              <a:t>  • 2. KISA 3역할 — 개발자·제공자·이용자가 각자 수칙 지켜야 완성</a:t>
-            </a:r>
-          </a:p>
-          <a:p>
-            <a:r>
-              <a:t>  • 3. 기관 유형 4가지 — 우선 적용 대책이 다르다</a:t>
-            </a:r>
-          </a:p>
+          <a:p/>
         </p:txBody>
       </p:sp>
       <p:sp>
@@ -7633,42 +3709,7 @@
             <a:noAutofit/>
           </a:bodyPr>
           <a:lstStyle/>
-          <a:p>
-            <a:r>
-              <a:t>⏱️  1:09 · 1분</a:t>
-            </a:r>
-          </a:p>
-          <a:p>
-            <a:r>
-              <a:t>★ KEEP — 절대 빠뜨리지 말 것</a:t>
-            </a:r>
-          </a:p>
-          <a:p>
-            <a:endParaRPr/>
-          </a:p>
-          <a:p>
-            <a:r>
-              <a:t>🎤 강사 멘트:</a:t>
-            </a:r>
-          </a:p>
-          <a:p>
-            <a:r>
-              <a:t>질문 1–2개 받고 — 10분 쉬었다가 OWASP 로 이어가겠습니다.</a:t>
-            </a:r>
-          </a:p>
-          <a:p>
-            <a:endParaRPr/>
-          </a:p>
-          <a:p>
-            <a:r>
-              <a:t>핵심 포인트:</a:t>
-            </a:r>
-          </a:p>
-          <a:p>
-            <a:r>
-              <a:t>  • 10분 휴식 → 슬롯2 OWASP</a:t>
-            </a:r>
-          </a:p>
+          <a:p/>
         </p:txBody>
       </p:sp>
     </p:spTree>
@@ -7722,55 +3763,7 @@
         <p:txBody>
           <a:bodyPr/>
           <a:lstStyle/>
-          <a:p>
-            <a:r>
-              <a:t>⏱️  0:05 · 2분</a:t>
-            </a:r>
-          </a:p>
-          <a:p>
-            <a:endParaRPr/>
-          </a:p>
-          <a:p>
-            <a:r>
-              <a:t>🎤 강사 멘트:</a:t>
-            </a:r>
-          </a:p>
-          <a:p>
-            <a:r>
-              <a:t>세 문서가 오늘 강의의 뼈대입니다. NIS 가 위협 목록, KISA 가 역할 가이드, OWASP 가 글로벌 시각.</a:t>
-            </a:r>
-          </a:p>
-          <a:p>
-            <a:endParaRPr/>
-          </a:p>
-          <a:p>
-            <a:r>
-              <a:t>핵심 포인트:</a:t>
-            </a:r>
-          </a:p>
-          <a:p>
-            <a:r>
-              <a:t>  • NIS 국가·공공기관 AI 가이드북 — T01-T15 / M01-M30</a:t>
-            </a:r>
-          </a:p>
-          <a:p>
-            <a:r>
-              <a:t>  • KISA AI 보안 안내서 — 역할별 책임 체계</a:t>
-            </a:r>
-          </a:p>
-          <a:p>
-            <a:r>
-              <a:t>  • OWASP LLM Top 10 (2025) — 개발자 관점</a:t>
-            </a:r>
-          </a:p>
-          <a:p>
-            <a:endParaRPr/>
-          </a:p>
-          <a:p>
-            <a:r>
-              <a:t>📎 📎 references/policy.html — KISA 두 안내서 비교</a:t>
-            </a:r>
-          </a:p>
+          <a:p/>
         </p:txBody>
       </p:sp>
       <p:sp>
@@ -7852,42 +3845,7 @@
         <p:txBody>
           <a:bodyPr/>
           <a:lstStyle/>
-          <a:p>
-            <a:r>
-              <a:t>⏱️  0:07 · 0.5분</a:t>
-            </a:r>
-          </a:p>
-          <a:p>
-            <a:r>
-              <a:t>(헤더 슬라이드 — 짧게)</a:t>
-            </a:r>
-          </a:p>
-          <a:p>
-            <a:endParaRPr/>
-          </a:p>
-          <a:p>
-            <a:r>
-              <a:t>🎤 강사 멘트:</a:t>
-            </a:r>
-          </a:p>
-          <a:p>
-            <a:r>
-              <a:t>AI 가 위험한 이유는 데이터 처리 능력이 폭발적으로 늘어났기 때문입니다. 그래서 데이터 사례부터.</a:t>
-            </a:r>
-          </a:p>
-          <a:p>
-            <a:endParaRPr/>
-          </a:p>
-          <a:p>
-            <a:r>
-              <a:t>핵심 포인트:</a:t>
-            </a:r>
-          </a:p>
-          <a:p>
-            <a:r>
-              <a:t>  • AI 자체보다 먼저 — 데이터로 할 수 있는 일 두 가지</a:t>
-            </a:r>
-          </a:p>
+          <a:p/>
         </p:txBody>
       </p:sp>
       <p:sp>
@@ -7969,404 +3927,7 @@
         <p:txBody>
           <a:bodyPr/>
           <a:lstStyle/>
-          <a:p>
-            <a:r>
-              <a:rPr dirty="0" err="1"/>
-              <a:t>여러분이</a:t>
-            </a:r>
-            <a:r>
-              <a:rPr dirty="0"/>
-              <a:t> 10년 </a:t>
-            </a:r>
-            <a:r>
-              <a:rPr dirty="0" err="1"/>
-              <a:t>전</a:t>
-            </a:r>
-            <a:r>
-              <a:rPr dirty="0"/>
-              <a:t> SNS </a:t>
-            </a:r>
-            <a:r>
-              <a:rPr dirty="0" err="1"/>
-              <a:t>에</a:t>
-            </a:r>
-            <a:r>
-              <a:rPr dirty="0"/>
-              <a:t> </a:t>
-            </a:r>
-            <a:r>
-              <a:rPr dirty="0" err="1"/>
-              <a:t>올린</a:t>
-            </a:r>
-            <a:r>
-              <a:rPr dirty="0"/>
-              <a:t> </a:t>
-            </a:r>
-            <a:r>
-              <a:rPr dirty="0" err="1"/>
-              <a:t>사진</a:t>
-            </a:r>
-            <a:r>
-              <a:rPr dirty="0"/>
-              <a:t> </a:t>
-            </a:r>
-            <a:r>
-              <a:rPr dirty="0" err="1"/>
-              <a:t>한</a:t>
-            </a:r>
-            <a:r>
-              <a:rPr dirty="0"/>
-              <a:t> </a:t>
-            </a:r>
-            <a:r>
-              <a:rPr dirty="0" err="1"/>
-              <a:t>장</a:t>
-            </a:r>
-            <a:r>
-              <a:rPr dirty="0"/>
-              <a:t> — </a:t>
-            </a:r>
-            <a:r>
-              <a:rPr dirty="0" err="1"/>
-              <a:t>지금</a:t>
-            </a:r>
-            <a:r>
-              <a:rPr dirty="0"/>
-              <a:t> </a:t>
-            </a:r>
-            <a:r>
-              <a:rPr dirty="0" err="1"/>
-              <a:t>누군가를</a:t>
-            </a:r>
-            <a:r>
-              <a:rPr dirty="0"/>
-              <a:t> </a:t>
-            </a:r>
-            <a:r>
-              <a:rPr dirty="0" err="1"/>
-              <a:t>특정하는</a:t>
-            </a:r>
-            <a:r>
-              <a:rPr dirty="0"/>
-              <a:t> </a:t>
-            </a:r>
-            <a:r>
-              <a:rPr dirty="0" err="1"/>
-              <a:t>데</a:t>
-            </a:r>
-            <a:r>
-              <a:rPr dirty="0"/>
-              <a:t> </a:t>
-            </a:r>
-            <a:r>
-              <a:rPr dirty="0" err="1"/>
-              <a:t>쓰이고</a:t>
-            </a:r>
-            <a:r>
-              <a:rPr dirty="0"/>
-              <a:t> </a:t>
-            </a:r>
-            <a:r>
-              <a:rPr dirty="0" err="1"/>
-              <a:t>있을</a:t>
-            </a:r>
-            <a:r>
-              <a:rPr dirty="0"/>
-              <a:t> </a:t>
-            </a:r>
-            <a:r>
-              <a:rPr dirty="0" err="1"/>
-              <a:t>수</a:t>
-            </a:r>
-            <a:r>
-              <a:rPr dirty="0"/>
-              <a:t> </a:t>
-            </a:r>
-            <a:r>
-              <a:rPr dirty="0" err="1"/>
-              <a:t>있습니다</a:t>
-            </a:r>
-            <a:r>
-              <a:rPr dirty="0"/>
-              <a:t>. "</a:t>
-            </a:r>
-            <a:r>
-              <a:rPr dirty="0" err="1"/>
-              <a:t>공개된</a:t>
-            </a:r>
-            <a:r>
-              <a:rPr dirty="0"/>
-              <a:t> </a:t>
-            </a:r>
-            <a:r>
-              <a:rPr dirty="0" err="1"/>
-              <a:t>데이터</a:t>
-            </a:r>
-            <a:r>
-              <a:rPr dirty="0"/>
-              <a:t>" </a:t>
-            </a:r>
-            <a:r>
-              <a:rPr dirty="0" err="1"/>
-              <a:t>가</a:t>
-            </a:r>
-            <a:r>
-              <a:rPr dirty="0"/>
-              <a:t> </a:t>
-            </a:r>
-            <a:r>
-              <a:rPr dirty="0" err="1"/>
-              <a:t>모이면</a:t>
-            </a:r>
-            <a:r>
-              <a:rPr dirty="0"/>
-              <a:t> </a:t>
-            </a:r>
-            <a:r>
-              <a:rPr dirty="0" err="1"/>
-              <a:t>더는</a:t>
-            </a:r>
-            <a:r>
-              <a:rPr dirty="0"/>
-              <a:t> </a:t>
-            </a:r>
-            <a:r>
-              <a:rPr dirty="0" err="1"/>
-              <a:t>공개가</a:t>
-            </a:r>
-            <a:r>
-              <a:rPr dirty="0"/>
-              <a:t> </a:t>
-            </a:r>
-            <a:r>
-              <a:rPr dirty="0" err="1"/>
-              <a:t>아닙니다</a:t>
-            </a:r>
-            <a:r>
-              <a:rPr dirty="0"/>
-              <a:t>.</a:t>
-            </a:r>
-          </a:p>
-          <a:p>
-            <a:endParaRPr dirty="0"/>
-          </a:p>
-          <a:p>
-            <a:r>
-              <a:rPr dirty="0" err="1"/>
-              <a:t>핵심</a:t>
-            </a:r>
-            <a:r>
-              <a:rPr dirty="0"/>
-              <a:t> </a:t>
-            </a:r>
-            <a:r>
-              <a:rPr dirty="0" err="1"/>
-              <a:t>포인트</a:t>
-            </a:r>
-            <a:r>
-              <a:rPr dirty="0"/>
-              <a:t>:</a:t>
-            </a:r>
-          </a:p>
-          <a:p>
-            <a:r>
-              <a:rPr dirty="0"/>
-              <a:t>  • </a:t>
-            </a:r>
-            <a:r>
-              <a:rPr dirty="0" err="1"/>
-              <a:t>SNS·뉴스·공공기록에서</a:t>
-            </a:r>
-            <a:r>
-              <a:rPr dirty="0"/>
-              <a:t> 30억 </a:t>
-            </a:r>
-            <a:r>
-              <a:rPr dirty="0" err="1"/>
-              <a:t>장</a:t>
-            </a:r>
-            <a:r>
-              <a:rPr dirty="0"/>
-              <a:t>+ </a:t>
-            </a:r>
-            <a:r>
-              <a:rPr dirty="0" err="1"/>
-              <a:t>얼굴</a:t>
-            </a:r>
-            <a:r>
-              <a:rPr dirty="0"/>
-              <a:t> </a:t>
-            </a:r>
-            <a:r>
-              <a:rPr dirty="0" err="1"/>
-              <a:t>사진</a:t>
-            </a:r>
-            <a:r>
-              <a:rPr dirty="0"/>
-              <a:t> </a:t>
-            </a:r>
-            <a:r>
-              <a:rPr dirty="0" err="1"/>
-              <a:t>무단</a:t>
-            </a:r>
-            <a:r>
-              <a:rPr dirty="0"/>
-              <a:t> </a:t>
-            </a:r>
-            <a:r>
-              <a:rPr dirty="0" err="1"/>
-              <a:t>수집</a:t>
-            </a:r>
-            <a:endParaRPr dirty="0"/>
-          </a:p>
-          <a:p>
-            <a:r>
-              <a:rPr dirty="0"/>
-              <a:t>  • </a:t>
-            </a:r>
-            <a:r>
-              <a:rPr dirty="0" err="1"/>
-              <a:t>미국·캐나다·호주</a:t>
-            </a:r>
-            <a:r>
-              <a:rPr dirty="0"/>
-              <a:t> 3,100개+ </a:t>
-            </a:r>
-            <a:r>
-              <a:rPr dirty="0" err="1"/>
-              <a:t>법집행기관</a:t>
-            </a:r>
-            <a:r>
-              <a:rPr dirty="0"/>
-              <a:t> </a:t>
-            </a:r>
-            <a:r>
-              <a:rPr dirty="0" err="1"/>
-              <a:t>납품</a:t>
-            </a:r>
-            <a:endParaRPr dirty="0"/>
-          </a:p>
-          <a:p>
-            <a:r>
-              <a:rPr dirty="0"/>
-              <a:t>  • </a:t>
-            </a:r>
-            <a:r>
-              <a:rPr dirty="0" err="1"/>
-              <a:t>현장</a:t>
-            </a:r>
-            <a:r>
-              <a:rPr dirty="0"/>
-              <a:t> </a:t>
-            </a:r>
-            <a:r>
-              <a:rPr dirty="0" err="1"/>
-              <a:t>사진</a:t>
-            </a:r>
-            <a:r>
-              <a:rPr dirty="0"/>
-              <a:t> 1장 → </a:t>
-            </a:r>
-            <a:r>
-              <a:rPr dirty="0" err="1"/>
-              <a:t>수초</a:t>
-            </a:r>
-            <a:r>
-              <a:rPr dirty="0"/>
-              <a:t> </a:t>
-            </a:r>
-            <a:r>
-              <a:rPr dirty="0" err="1"/>
-              <a:t>내</a:t>
-            </a:r>
-            <a:r>
-              <a:rPr dirty="0"/>
-              <a:t> </a:t>
-            </a:r>
-            <a:r>
-              <a:rPr dirty="0" err="1"/>
-              <a:t>이름·주소·SNS</a:t>
-            </a:r>
-            <a:r>
-              <a:rPr dirty="0"/>
-              <a:t> </a:t>
-            </a:r>
-            <a:r>
-              <a:rPr dirty="0" err="1"/>
-              <a:t>반환</a:t>
-            </a:r>
-            <a:endParaRPr dirty="0"/>
-          </a:p>
-          <a:p>
-            <a:r>
-              <a:rPr dirty="0"/>
-              <a:t>  • EU GDPR / </a:t>
-            </a:r>
-            <a:r>
-              <a:rPr dirty="0" err="1"/>
-              <a:t>캐나다</a:t>
-            </a:r>
-            <a:r>
-              <a:rPr dirty="0"/>
-              <a:t> / </a:t>
-            </a:r>
-            <a:r>
-              <a:rPr dirty="0" err="1"/>
-              <a:t>호주</a:t>
-            </a:r>
-            <a:r>
-              <a:rPr dirty="0"/>
-              <a:t> </a:t>
-            </a:r>
-            <a:r>
-              <a:rPr dirty="0" err="1"/>
-              <a:t>위반</a:t>
-            </a:r>
-            <a:r>
-              <a:rPr dirty="0"/>
-              <a:t> — </a:t>
-            </a:r>
-            <a:r>
-              <a:rPr dirty="0" err="1"/>
-              <a:t>과징금·사용</a:t>
-            </a:r>
-            <a:r>
-              <a:rPr dirty="0"/>
-              <a:t> </a:t>
-            </a:r>
-            <a:r>
-              <a:rPr dirty="0" err="1"/>
-              <a:t>금지</a:t>
-            </a:r>
-            <a:endParaRPr dirty="0"/>
-          </a:p>
-          <a:p>
-            <a:r>
-              <a:rPr dirty="0"/>
-              <a:t>  • NIS </a:t>
-            </a:r>
-            <a:r>
-              <a:rPr dirty="0" err="1"/>
-              <a:t>매핑</a:t>
-            </a:r>
-            <a:r>
-              <a:rPr dirty="0"/>
-              <a:t>: T07 </a:t>
-            </a:r>
-            <a:r>
-              <a:rPr dirty="0" err="1"/>
-              <a:t>민감정보</a:t>
-            </a:r>
-            <a:r>
-              <a:rPr dirty="0"/>
-              <a:t> </a:t>
-            </a:r>
-            <a:r>
-              <a:rPr dirty="0" err="1"/>
-              <a:t>입력·유출</a:t>
-            </a:r>
-            <a:endParaRPr dirty="0"/>
-          </a:p>
+          <a:p/>
         </p:txBody>
       </p:sp>
       <p:sp>
@@ -8448,47 +4009,7 @@
         <p:txBody>
           <a:bodyPr/>
           <a:lstStyle/>
-          <a:p>
-            <a:r>
-              <a:t>⏱️  0:10 · 2분</a:t>
-            </a:r>
-          </a:p>
-          <a:p>
-            <a:endParaRPr/>
-          </a:p>
-          <a:p>
-            <a:r>
-              <a:t>🎤 강사 멘트:</a:t>
-            </a:r>
-          </a:p>
-          <a:p>
-            <a:r>
-              <a:t>익명화했다고 안전한 게 아닙니다. AI 는 다른 데이터와 연결해서 다시 특정합니다. 이 패턴이 오늘 다룰 LLM 위협의 뿌리입니다.</a:t>
-            </a:r>
-          </a:p>
-          <a:p>
-            <a:endParaRPr/>
-          </a:p>
-          <a:p>
-            <a:r>
-              <a:t>핵심 포인트:</a:t>
-            </a:r>
-          </a:p>
-          <a:p>
-            <a:r>
-              <a:t>  • Parabon NanoLabs — DNA → AI 표현형 예측 → 몽타주</a:t>
-            </a:r>
-          </a:p>
-          <a:p>
-            <a:r>
-              <a:t>  • Harvard (2019) — 익명 의료 유전체 + 공개 DB 교차 → 재식별</a:t>
-            </a:r>
-          </a:p>
-          <a:p>
-            <a:r>
-              <a:t>  • NIS 매핑: T02 비인가 학습 / T04 학습데이터 추출</a:t>
-            </a:r>
-          </a:p>
+          <a:p/>
         </p:txBody>
       </p:sp>
       <p:sp>
@@ -8570,152 +4091,7 @@
         <p:txBody>
           <a:bodyPr/>
           <a:lstStyle/>
-          <a:p>
-            <a:r>
-              <a:rPr dirty="0" err="1"/>
-              <a:t>이</a:t>
-            </a:r>
-            <a:r>
-              <a:rPr dirty="0"/>
-              <a:t> </a:t>
-            </a:r>
-            <a:r>
-              <a:rPr dirty="0" err="1"/>
-              <a:t>한</a:t>
-            </a:r>
-            <a:r>
-              <a:rPr dirty="0"/>
-              <a:t> </a:t>
-            </a:r>
-            <a:r>
-              <a:rPr dirty="0" err="1"/>
-              <a:t>줄이</a:t>
-            </a:r>
-            <a:r>
-              <a:rPr dirty="0"/>
-              <a:t> </a:t>
-            </a:r>
-            <a:r>
-              <a:rPr dirty="0" err="1"/>
-              <a:t>오늘</a:t>
-            </a:r>
-            <a:r>
-              <a:rPr dirty="0"/>
-              <a:t> </a:t>
-            </a:r>
-            <a:r>
-              <a:rPr dirty="0" err="1"/>
-              <a:t>강의</a:t>
-            </a:r>
-            <a:r>
-              <a:rPr dirty="0"/>
-              <a:t> </a:t>
-            </a:r>
-            <a:r>
-              <a:rPr dirty="0" err="1"/>
-              <a:t>전체를</a:t>
-            </a:r>
-            <a:r>
-              <a:rPr dirty="0"/>
-              <a:t> </a:t>
-            </a:r>
-            <a:r>
-              <a:rPr dirty="0" err="1"/>
-              <a:t>관통합니다</a:t>
-            </a:r>
-            <a:r>
-              <a:rPr dirty="0"/>
-              <a:t>. AI </a:t>
-            </a:r>
-            <a:r>
-              <a:rPr dirty="0" err="1"/>
-              <a:t>는</a:t>
-            </a:r>
-            <a:r>
-              <a:rPr dirty="0"/>
-              <a:t> </a:t>
-            </a:r>
-            <a:r>
-              <a:rPr dirty="0" err="1"/>
-              <a:t>새</a:t>
-            </a:r>
-            <a:r>
-              <a:rPr dirty="0"/>
-              <a:t> </a:t>
-            </a:r>
-            <a:r>
-              <a:rPr dirty="0" err="1"/>
-              <a:t>데이터를</a:t>
-            </a:r>
-            <a:r>
-              <a:rPr dirty="0"/>
-              <a:t> </a:t>
-            </a:r>
-            <a:r>
-              <a:rPr dirty="0" err="1"/>
-              <a:t>훔치지</a:t>
-            </a:r>
-            <a:r>
-              <a:rPr dirty="0"/>
-              <a:t> </a:t>
-            </a:r>
-            <a:r>
-              <a:rPr dirty="0" err="1"/>
-              <a:t>않고</a:t>
-            </a:r>
-            <a:r>
-              <a:rPr dirty="0"/>
-              <a:t> — </a:t>
-            </a:r>
-            <a:r>
-              <a:rPr dirty="0" err="1"/>
-              <a:t>흩어진</a:t>
-            </a:r>
-            <a:r>
-              <a:rPr dirty="0"/>
-              <a:t> </a:t>
-            </a:r>
-            <a:r>
-              <a:rPr dirty="0" err="1"/>
-              <a:t>공개</a:t>
-            </a:r>
-            <a:r>
-              <a:rPr dirty="0"/>
-              <a:t> </a:t>
-            </a:r>
-            <a:r>
-              <a:rPr dirty="0" err="1"/>
-              <a:t>조각을</a:t>
-            </a:r>
-            <a:r>
-              <a:rPr dirty="0"/>
-              <a:t> </a:t>
-            </a:r>
-            <a:r>
-              <a:rPr dirty="0" err="1"/>
-              <a:t>모아</a:t>
-            </a:r>
-            <a:r>
-              <a:rPr dirty="0"/>
-              <a:t> </a:t>
-            </a:r>
-            <a:r>
-              <a:rPr dirty="0" err="1"/>
-              <a:t>비공개를</a:t>
-            </a:r>
-            <a:r>
-              <a:rPr dirty="0"/>
-              <a:t> </a:t>
-            </a:r>
-            <a:r>
-              <a:rPr dirty="0" err="1"/>
-              <a:t>만들어냅니다</a:t>
-            </a:r>
-            <a:r>
-              <a:rPr dirty="0"/>
-              <a:t>.</a:t>
-            </a:r>
-          </a:p>
+          <a:p/>
         </p:txBody>
       </p:sp>
       <p:sp>

--- a/ws02/class/ws02_slide_class1.pptx
+++ b/ws02/class/ws02_slide_class1.pptx
@@ -281,7 +281,7 @@
 </file>
 
 <file path=ppt/notesSlides/notesSlide1.xml><?xml version="1.0" encoding="utf-8"?>
-<p:notes xmlns:a="http://schemas.openxmlformats.org/drawingml/2006/main" xmlns:r="http://schemas.openxmlformats.org/officeDocument/2006/relationships" xmlns:p="http://schemas.openxmlformats.org/presentationml/2006/main" showMasterSp="0" showMasterPhAnim="0">
+<p:notes xmlns:a="http://schemas.openxmlformats.org/drawingml/2006/main" xmlns:p="http://schemas.openxmlformats.org/presentationml/2006/main" showMasterSp="0" showMasterPhAnim="0">
   <p:cSld>
     <p:spTree>
       <p:nvGrpSpPr>
@@ -390,7 +390,7 @@
 </file>
 
 <file path=ppt/notesSlides/notesSlide10.xml><?xml version="1.0" encoding="utf-8"?>
-<p:notes xmlns:a="http://schemas.openxmlformats.org/drawingml/2006/main" xmlns:r="http://schemas.openxmlformats.org/officeDocument/2006/relationships" xmlns:p="http://schemas.openxmlformats.org/presentationml/2006/main">
+<p:notes xmlns:a="http://schemas.openxmlformats.org/drawingml/2006/main" xmlns:ns2="http://schemas.microsoft.com/office/powerpoint/2010/main" xmlns:p="http://schemas.openxmlformats.org/presentationml/2006/main">
   <p:cSld>
     <p:spTree>
       <p:nvGrpSpPr>
@@ -432,7 +432,9 @@
         <p:txBody>
           <a:bodyPr/>
           <a:lstStyle/>
-          <a:p/>
+          <a:p>
+            <a:endParaRPr dirty="0"/>
+          </a:p>
         </p:txBody>
       </p:sp>
       <p:sp>
@@ -461,7 +463,7 @@
     </p:spTree>
     <p:extLst>
       <p:ext uri="{BB962C8B-B14F-4D97-AF65-F5344CB8AC3E}">
-        <p14:creationId xmlns:p14="http://schemas.microsoft.com/office/powerpoint/2010/main" val="1024086991"/>
+        <ns2:creationId val="1024086991"/>
       </p:ext>
     </p:extLst>
   </p:cSld>
@@ -472,7 +474,7 @@
 </file>
 
 <file path=ppt/notesSlides/notesSlide11.xml><?xml version="1.0" encoding="utf-8"?>
-<p:notes xmlns:a="http://schemas.openxmlformats.org/drawingml/2006/main" xmlns:r="http://schemas.openxmlformats.org/officeDocument/2006/relationships" xmlns:p="http://schemas.openxmlformats.org/presentationml/2006/main">
+<p:notes xmlns:a="http://schemas.openxmlformats.org/drawingml/2006/main" xmlns:ns2="http://schemas.microsoft.com/office/powerpoint/2010/main" xmlns:p="http://schemas.openxmlformats.org/presentationml/2006/main">
   <p:cSld>
     <p:spTree>
       <p:nvGrpSpPr>
@@ -514,7 +516,9 @@
         <p:txBody>
           <a:bodyPr/>
           <a:lstStyle/>
-          <a:p/>
+          <a:p>
+            <a:endParaRPr dirty="0"/>
+          </a:p>
         </p:txBody>
       </p:sp>
       <p:sp>
@@ -543,7 +547,7 @@
     </p:spTree>
     <p:extLst>
       <p:ext uri="{BB962C8B-B14F-4D97-AF65-F5344CB8AC3E}">
-        <p14:creationId xmlns:p14="http://schemas.microsoft.com/office/powerpoint/2010/main" val="1024086991"/>
+        <ns2:creationId val="1024086991"/>
       </p:ext>
     </p:extLst>
   </p:cSld>
@@ -554,14 +558,14 @@
 </file>
 
 <file path=ppt/notesSlides/notesSlide12.xml><?xml version="1.0" encoding="utf-8"?>
-<p:notes xmlns:a="http://schemas.openxmlformats.org/drawingml/2006/main" xmlns:r="http://schemas.openxmlformats.org/officeDocument/2006/relationships" xmlns:p="http://schemas.openxmlformats.org/presentationml/2006/main">
+<p:notes xmlns:a="http://schemas.openxmlformats.org/drawingml/2006/main" xmlns:ns2="http://schemas.microsoft.com/office/drawing/2014/main" xmlns:ns3="http://schemas.microsoft.com/office/powerpoint/2010/main" xmlns:p="http://schemas.openxmlformats.org/presentationml/2006/main">
   <p:cSld>
     <p:spTree>
       <p:nvGrpSpPr>
         <p:cNvPr id="1" name="">
           <a:extLst>
             <a:ext uri="{FF2B5EF4-FFF2-40B4-BE49-F238E27FC236}">
-              <a16:creationId xmlns:a16="http://schemas.microsoft.com/office/drawing/2014/main" id="{F5EFD8D6-86B3-BE50-ECED-F34B5D2BD0B9}"/>
+              <ns2:creationId id="{F5EFD8D6-86B3-BE50-ECED-F34B5D2BD0B9}"/>
             </a:ext>
           </a:extLst>
         </p:cNvPr>
@@ -581,7 +585,7 @@
           <p:cNvPr id="2" name="Slide Image Placeholder 1">
             <a:extLst>
               <a:ext uri="{FF2B5EF4-FFF2-40B4-BE49-F238E27FC236}">
-                <a16:creationId xmlns:a16="http://schemas.microsoft.com/office/drawing/2014/main" id="{CD905E43-B05A-4982-047B-1AEE49318839}"/>
+                <ns2:creationId id="{CD905E43-B05A-4982-047B-1AEE49318839}"/>
               </a:ext>
             </a:extLst>
           </p:cNvPr>
@@ -599,7 +603,7 @@
           <p:cNvPr id="3" name="Notes Placeholder 2">
             <a:extLst>
               <a:ext uri="{FF2B5EF4-FFF2-40B4-BE49-F238E27FC236}">
-                <a16:creationId xmlns:a16="http://schemas.microsoft.com/office/drawing/2014/main" id="{A64E18CE-16CD-B44D-F519-C0C1DDB03102}"/>
+                <ns2:creationId id="{A64E18CE-16CD-B44D-F519-C0C1DDB03102}"/>
               </a:ext>
             </a:extLst>
           </p:cNvPr>
@@ -614,7 +618,9 @@
         <p:txBody>
           <a:bodyPr/>
           <a:lstStyle/>
-          <a:p/>
+          <a:p>
+            <a:endParaRPr dirty="0"/>
+          </a:p>
         </p:txBody>
       </p:sp>
       <p:sp>
@@ -622,7 +628,7 @@
           <p:cNvPr id="4" name="Slide Number Placeholder 3">
             <a:extLst>
               <a:ext uri="{FF2B5EF4-FFF2-40B4-BE49-F238E27FC236}">
-                <a16:creationId xmlns:a16="http://schemas.microsoft.com/office/drawing/2014/main" id="{EBF3A587-90EB-8CBF-AFAE-AC1CEB76536C}"/>
+                <ns2:creationId id="{EBF3A587-90EB-8CBF-AFAE-AC1CEB76536C}"/>
               </a:ext>
             </a:extLst>
           </p:cNvPr>
@@ -649,7 +655,7 @@
     </p:spTree>
     <p:extLst>
       <p:ext uri="{BB962C8B-B14F-4D97-AF65-F5344CB8AC3E}">
-        <p14:creationId xmlns:p14="http://schemas.microsoft.com/office/powerpoint/2010/main" val="946115232"/>
+        <ns3:creationId val="946115232"/>
       </p:ext>
     </p:extLst>
   </p:cSld>
@@ -660,7 +666,7 @@
 </file>
 
 <file path=ppt/notesSlides/notesSlide13.xml><?xml version="1.0" encoding="utf-8"?>
-<p:notes xmlns:a="http://schemas.openxmlformats.org/drawingml/2006/main" xmlns:r="http://schemas.openxmlformats.org/officeDocument/2006/relationships" xmlns:p="http://schemas.openxmlformats.org/presentationml/2006/main">
+<p:notes xmlns:a="http://schemas.openxmlformats.org/drawingml/2006/main" xmlns:ns2="http://schemas.microsoft.com/office/powerpoint/2010/main" xmlns:p="http://schemas.openxmlformats.org/presentationml/2006/main">
   <p:cSld>
     <p:spTree>
       <p:nvGrpSpPr>
@@ -702,7 +708,9 @@
         <p:txBody>
           <a:bodyPr/>
           <a:lstStyle/>
-          <a:p/>
+          <a:p>
+            <a:endParaRPr dirty="0"/>
+          </a:p>
         </p:txBody>
       </p:sp>
       <p:sp>
@@ -731,7 +739,7 @@
     </p:spTree>
     <p:extLst>
       <p:ext uri="{BB962C8B-B14F-4D97-AF65-F5344CB8AC3E}">
-        <p14:creationId xmlns:p14="http://schemas.microsoft.com/office/powerpoint/2010/main" val="1024086991"/>
+        <ns2:creationId val="1024086991"/>
       </p:ext>
     </p:extLst>
   </p:cSld>
@@ -742,14 +750,14 @@
 </file>
 
 <file path=ppt/notesSlides/notesSlide14.xml><?xml version="1.0" encoding="utf-8"?>
-<p:notes xmlns:a="http://schemas.openxmlformats.org/drawingml/2006/main" xmlns:r="http://schemas.openxmlformats.org/officeDocument/2006/relationships" xmlns:p="http://schemas.openxmlformats.org/presentationml/2006/main">
+<p:notes xmlns:a="http://schemas.openxmlformats.org/drawingml/2006/main" xmlns:ns2="http://schemas.microsoft.com/office/drawing/2014/main" xmlns:ns3="http://schemas.microsoft.com/office/powerpoint/2010/main" xmlns:p="http://schemas.openxmlformats.org/presentationml/2006/main">
   <p:cSld>
     <p:spTree>
       <p:nvGrpSpPr>
         <p:cNvPr id="1" name="">
           <a:extLst>
             <a:ext uri="{FF2B5EF4-FFF2-40B4-BE49-F238E27FC236}">
-              <a16:creationId xmlns:a16="http://schemas.microsoft.com/office/drawing/2014/main" id="{C6D63317-E27C-4297-5B98-0E016F4D049D}"/>
+              <ns2:creationId id="{C6D63317-E27C-4297-5B98-0E016F4D049D}"/>
             </a:ext>
           </a:extLst>
         </p:cNvPr>
@@ -769,7 +777,7 @@
           <p:cNvPr id="2" name="Slide Image Placeholder 1">
             <a:extLst>
               <a:ext uri="{FF2B5EF4-FFF2-40B4-BE49-F238E27FC236}">
-                <a16:creationId xmlns:a16="http://schemas.microsoft.com/office/drawing/2014/main" id="{AA65DF94-B0A4-B76F-F9DB-BFC18F74056F}"/>
+                <ns2:creationId id="{AA65DF94-B0A4-B76F-F9DB-BFC18F74056F}"/>
               </a:ext>
             </a:extLst>
           </p:cNvPr>
@@ -787,7 +795,7 @@
           <p:cNvPr id="3" name="Notes Placeholder 2">
             <a:extLst>
               <a:ext uri="{FF2B5EF4-FFF2-40B4-BE49-F238E27FC236}">
-                <a16:creationId xmlns:a16="http://schemas.microsoft.com/office/drawing/2014/main" id="{820E4862-B934-1C19-8725-0D04896D33B7}"/>
+                <ns2:creationId id="{820E4862-B934-1C19-8725-0D04896D33B7}"/>
               </a:ext>
             </a:extLst>
           </p:cNvPr>
@@ -812,7 +820,7 @@
           <p:cNvPr id="4" name="Slide Number Placeholder 3">
             <a:extLst>
               <a:ext uri="{FF2B5EF4-FFF2-40B4-BE49-F238E27FC236}">
-                <a16:creationId xmlns:a16="http://schemas.microsoft.com/office/drawing/2014/main" id="{20B61742-044E-D735-9F7E-C879FCFF35D1}"/>
+                <ns2:creationId id="{20B61742-044E-D735-9F7E-C879FCFF35D1}"/>
               </a:ext>
             </a:extLst>
           </p:cNvPr>
@@ -839,7 +847,7 @@
     </p:spTree>
     <p:extLst>
       <p:ext uri="{BB962C8B-B14F-4D97-AF65-F5344CB8AC3E}">
-        <p14:creationId xmlns:p14="http://schemas.microsoft.com/office/powerpoint/2010/main" val="18659519"/>
+        <ns3:creationId val="18659519"/>
       </p:ext>
     </p:extLst>
   </p:cSld>
@@ -850,7 +858,7 @@
 </file>
 
 <file path=ppt/notesSlides/notesSlide15.xml><?xml version="1.0" encoding="utf-8"?>
-<p:notes xmlns:a="http://schemas.openxmlformats.org/drawingml/2006/main" xmlns:r="http://schemas.openxmlformats.org/officeDocument/2006/relationships" xmlns:p="http://schemas.openxmlformats.org/presentationml/2006/main">
+<p:notes xmlns:a="http://schemas.openxmlformats.org/drawingml/2006/main" xmlns:ns2="http://schemas.microsoft.com/office/powerpoint/2010/main" xmlns:p="http://schemas.openxmlformats.org/presentationml/2006/main">
   <p:cSld>
     <p:spTree>
       <p:nvGrpSpPr>
@@ -892,7 +900,9 @@
         <p:txBody>
           <a:bodyPr/>
           <a:lstStyle/>
-          <a:p/>
+          <a:p>
+            <a:endParaRPr dirty="0"/>
+          </a:p>
         </p:txBody>
       </p:sp>
       <p:sp>
@@ -921,7 +931,7 @@
     </p:spTree>
     <p:extLst>
       <p:ext uri="{BB962C8B-B14F-4D97-AF65-F5344CB8AC3E}">
-        <p14:creationId xmlns:p14="http://schemas.microsoft.com/office/powerpoint/2010/main" val="1024086991"/>
+        <ns2:creationId val="1024086991"/>
       </p:ext>
     </p:extLst>
   </p:cSld>
@@ -932,7 +942,7 @@
 </file>
 
 <file path=ppt/notesSlides/notesSlide16.xml><?xml version="1.0" encoding="utf-8"?>
-<p:notes xmlns:a="http://schemas.openxmlformats.org/drawingml/2006/main" xmlns:r="http://schemas.openxmlformats.org/officeDocument/2006/relationships" xmlns:p="http://schemas.openxmlformats.org/presentationml/2006/main">
+<p:notes xmlns:a="http://schemas.openxmlformats.org/drawingml/2006/main" xmlns:ns2="http://schemas.microsoft.com/office/powerpoint/2010/main" xmlns:p="http://schemas.openxmlformats.org/presentationml/2006/main">
   <p:cSld>
     <p:spTree>
       <p:nvGrpSpPr>
@@ -974,7 +984,9 @@
         <p:txBody>
           <a:bodyPr/>
           <a:lstStyle/>
-          <a:p/>
+          <a:p>
+            <a:endParaRPr dirty="0"/>
+          </a:p>
         </p:txBody>
       </p:sp>
       <p:sp>
@@ -1003,7 +1015,7 @@
     </p:spTree>
     <p:extLst>
       <p:ext uri="{BB962C8B-B14F-4D97-AF65-F5344CB8AC3E}">
-        <p14:creationId xmlns:p14="http://schemas.microsoft.com/office/powerpoint/2010/main" val="1024086991"/>
+        <ns2:creationId val="1024086991"/>
       </p:ext>
     </p:extLst>
   </p:cSld>
@@ -1014,7 +1026,7 @@
 </file>
 
 <file path=ppt/notesSlides/notesSlide17.xml><?xml version="1.0" encoding="utf-8"?>
-<p:notes xmlns:a="http://schemas.openxmlformats.org/drawingml/2006/main" xmlns:r="http://schemas.openxmlformats.org/officeDocument/2006/relationships" xmlns:p="http://schemas.openxmlformats.org/presentationml/2006/main">
+<p:notes xmlns:a="http://schemas.openxmlformats.org/drawingml/2006/main" xmlns:ns2="http://schemas.microsoft.com/office/powerpoint/2010/main" xmlns:p="http://schemas.openxmlformats.org/presentationml/2006/main">
   <p:cSld>
     <p:spTree>
       <p:nvGrpSpPr>
@@ -1056,7 +1068,9 @@
         <p:txBody>
           <a:bodyPr/>
           <a:lstStyle/>
-          <a:p/>
+          <a:p>
+            <a:endParaRPr dirty="0"/>
+          </a:p>
         </p:txBody>
       </p:sp>
       <p:sp>
@@ -1085,7 +1099,7 @@
     </p:spTree>
     <p:extLst>
       <p:ext uri="{BB962C8B-B14F-4D97-AF65-F5344CB8AC3E}">
-        <p14:creationId xmlns:p14="http://schemas.microsoft.com/office/powerpoint/2010/main" val="1024086991"/>
+        <ns2:creationId val="1024086991"/>
       </p:ext>
     </p:extLst>
   </p:cSld>
@@ -1096,14 +1110,14 @@
 </file>
 
 <file path=ppt/notesSlides/notesSlide18.xml><?xml version="1.0" encoding="utf-8"?>
-<p:notes xmlns:a="http://schemas.openxmlformats.org/drawingml/2006/main" xmlns:r="http://schemas.openxmlformats.org/officeDocument/2006/relationships" xmlns:p="http://schemas.openxmlformats.org/presentationml/2006/main">
+<p:notes xmlns:a="http://schemas.openxmlformats.org/drawingml/2006/main" xmlns:ns2="http://schemas.microsoft.com/office/drawing/2014/main" xmlns:ns3="http://schemas.microsoft.com/office/powerpoint/2010/main" xmlns:p="http://schemas.openxmlformats.org/presentationml/2006/main">
   <p:cSld>
     <p:spTree>
       <p:nvGrpSpPr>
         <p:cNvPr id="1" name="">
           <a:extLst>
             <a:ext uri="{FF2B5EF4-FFF2-40B4-BE49-F238E27FC236}">
-              <a16:creationId xmlns:a16="http://schemas.microsoft.com/office/drawing/2014/main" id="{22D8AE17-60D1-5541-8A74-8937F4136F15}"/>
+              <ns2:creationId id="{22D8AE17-60D1-5541-8A74-8937F4136F15}"/>
             </a:ext>
           </a:extLst>
         </p:cNvPr>
@@ -1123,7 +1137,7 @@
           <p:cNvPr id="2" name="Slide Image Placeholder 1">
             <a:extLst>
               <a:ext uri="{FF2B5EF4-FFF2-40B4-BE49-F238E27FC236}">
-                <a16:creationId xmlns:a16="http://schemas.microsoft.com/office/drawing/2014/main" id="{EAFEF608-64EA-5565-5204-74FFBF8FD9E3}"/>
+                <ns2:creationId id="{EAFEF608-64EA-5565-5204-74FFBF8FD9E3}"/>
               </a:ext>
             </a:extLst>
           </p:cNvPr>
@@ -1141,7 +1155,7 @@
           <p:cNvPr id="3" name="Notes Placeholder 2">
             <a:extLst>
               <a:ext uri="{FF2B5EF4-FFF2-40B4-BE49-F238E27FC236}">
-                <a16:creationId xmlns:a16="http://schemas.microsoft.com/office/drawing/2014/main" id="{4573D3EF-6058-B0AC-4C61-B9B995BD2C8C}"/>
+                <ns2:creationId id="{4573D3EF-6058-B0AC-4C61-B9B995BD2C8C}"/>
               </a:ext>
             </a:extLst>
           </p:cNvPr>
@@ -1156,7 +1170,9 @@
         <p:txBody>
           <a:bodyPr/>
           <a:lstStyle/>
-          <a:p/>
+          <a:p>
+            <a:endParaRPr dirty="0"/>
+          </a:p>
         </p:txBody>
       </p:sp>
       <p:sp>
@@ -1164,7 +1180,7 @@
           <p:cNvPr id="4" name="Slide Number Placeholder 3">
             <a:extLst>
               <a:ext uri="{FF2B5EF4-FFF2-40B4-BE49-F238E27FC236}">
-                <a16:creationId xmlns:a16="http://schemas.microsoft.com/office/drawing/2014/main" id="{D9B5E551-1DF8-D71C-D858-6D76B4925053}"/>
+                <ns2:creationId id="{D9B5E551-1DF8-D71C-D858-6D76B4925053}"/>
               </a:ext>
             </a:extLst>
           </p:cNvPr>
@@ -1191,7 +1207,7 @@
     </p:spTree>
     <p:extLst>
       <p:ext uri="{BB962C8B-B14F-4D97-AF65-F5344CB8AC3E}">
-        <p14:creationId xmlns:p14="http://schemas.microsoft.com/office/powerpoint/2010/main" val="707340114"/>
+        <ns3:creationId val="707340114"/>
       </p:ext>
     </p:extLst>
   </p:cSld>
@@ -1202,14 +1218,14 @@
 </file>
 
 <file path=ppt/notesSlides/notesSlide19.xml><?xml version="1.0" encoding="utf-8"?>
-<p:notes xmlns:a="http://schemas.openxmlformats.org/drawingml/2006/main" xmlns:r="http://schemas.openxmlformats.org/officeDocument/2006/relationships" xmlns:p="http://schemas.openxmlformats.org/presentationml/2006/main">
+<p:notes xmlns:a="http://schemas.openxmlformats.org/drawingml/2006/main" xmlns:ns2="http://schemas.microsoft.com/office/drawing/2014/main" xmlns:ns3="http://schemas.microsoft.com/office/powerpoint/2010/main" xmlns:p="http://schemas.openxmlformats.org/presentationml/2006/main">
   <p:cSld>
     <p:spTree>
       <p:nvGrpSpPr>
         <p:cNvPr id="1" name="">
           <a:extLst>
             <a:ext uri="{FF2B5EF4-FFF2-40B4-BE49-F238E27FC236}">
-              <a16:creationId xmlns:a16="http://schemas.microsoft.com/office/drawing/2014/main" id="{08BE3B20-3F56-63C6-7049-4FFE7D3E220A}"/>
+              <ns2:creationId id="{08BE3B20-3F56-63C6-7049-4FFE7D3E220A}"/>
             </a:ext>
           </a:extLst>
         </p:cNvPr>
@@ -1229,7 +1245,7 @@
           <p:cNvPr id="2" name="Slide Image Placeholder 1">
             <a:extLst>
               <a:ext uri="{FF2B5EF4-FFF2-40B4-BE49-F238E27FC236}">
-                <a16:creationId xmlns:a16="http://schemas.microsoft.com/office/drawing/2014/main" id="{6B342B72-F277-B5A9-5B5F-9645F409310B}"/>
+                <ns2:creationId id="{6B342B72-F277-B5A9-5B5F-9645F409310B}"/>
               </a:ext>
             </a:extLst>
           </p:cNvPr>
@@ -1247,7 +1263,7 @@
           <p:cNvPr id="3" name="Notes Placeholder 2">
             <a:extLst>
               <a:ext uri="{FF2B5EF4-FFF2-40B4-BE49-F238E27FC236}">
-                <a16:creationId xmlns:a16="http://schemas.microsoft.com/office/drawing/2014/main" id="{6AB612E5-3ABC-88A1-A42A-8EFED4852E8C}"/>
+                <ns2:creationId id="{6AB612E5-3ABC-88A1-A42A-8EFED4852E8C}"/>
               </a:ext>
             </a:extLst>
           </p:cNvPr>
@@ -1262,7 +1278,9 @@
         <p:txBody>
           <a:bodyPr/>
           <a:lstStyle/>
-          <a:p/>
+          <a:p>
+            <a:endParaRPr dirty="0"/>
+          </a:p>
         </p:txBody>
       </p:sp>
       <p:sp>
@@ -1270,7 +1288,7 @@
           <p:cNvPr id="4" name="Slide Number Placeholder 3">
             <a:extLst>
               <a:ext uri="{FF2B5EF4-FFF2-40B4-BE49-F238E27FC236}">
-                <a16:creationId xmlns:a16="http://schemas.microsoft.com/office/drawing/2014/main" id="{C1F8186E-8BC8-FC8E-EBFA-70E53DE3FB61}"/>
+                <ns2:creationId id="{C1F8186E-8BC8-FC8E-EBFA-70E53DE3FB61}"/>
               </a:ext>
             </a:extLst>
           </p:cNvPr>
@@ -1357,7 +1375,7 @@
     </p:spTree>
     <p:extLst>
       <p:ext uri="{BB962C8B-B14F-4D97-AF65-F5344CB8AC3E}">
-        <p14:creationId xmlns:p14="http://schemas.microsoft.com/office/powerpoint/2010/main" val="2317327030"/>
+        <ns3:creationId val="2317327030"/>
       </p:ext>
     </p:extLst>
   </p:cSld>
@@ -1368,7 +1386,7 @@
 </file>
 
 <file path=ppt/notesSlides/notesSlide2.xml><?xml version="1.0" encoding="utf-8"?>
-<p:notes xmlns:a="http://schemas.openxmlformats.org/drawingml/2006/main" xmlns:r="http://schemas.openxmlformats.org/officeDocument/2006/relationships" xmlns:p="http://schemas.openxmlformats.org/presentationml/2006/main">
+<p:notes xmlns:a="http://schemas.openxmlformats.org/drawingml/2006/main" xmlns:ns2="http://schemas.microsoft.com/office/powerpoint/2010/main" xmlns:p="http://schemas.openxmlformats.org/presentationml/2006/main">
   <p:cSld>
     <p:spTree>
       <p:nvGrpSpPr>
@@ -1410,7 +1428,9 @@
         <p:txBody>
           <a:bodyPr/>
           <a:lstStyle/>
-          <a:p/>
+          <a:p>
+            <a:endParaRPr dirty="0"/>
+          </a:p>
         </p:txBody>
       </p:sp>
       <p:sp>
@@ -1499,7 +1519,7 @@
     </p:spTree>
     <p:extLst>
       <p:ext uri="{BB962C8B-B14F-4D97-AF65-F5344CB8AC3E}">
-        <p14:creationId xmlns:p14="http://schemas.microsoft.com/office/powerpoint/2010/main" val="1024086991"/>
+        <ns2:creationId val="1024086991"/>
       </p:ext>
     </p:extLst>
   </p:cSld>
@@ -1510,7 +1530,7 @@
 </file>
 
 <file path=ppt/notesSlides/notesSlide20.xml><?xml version="1.0" encoding="utf-8"?>
-<p:notes xmlns:a="http://schemas.openxmlformats.org/drawingml/2006/main" xmlns:r="http://schemas.openxmlformats.org/officeDocument/2006/relationships" xmlns:p="http://schemas.openxmlformats.org/presentationml/2006/main">
+<p:notes xmlns:a="http://schemas.openxmlformats.org/drawingml/2006/main" xmlns:ns2="http://schemas.microsoft.com/office/powerpoint/2010/main" xmlns:p="http://schemas.openxmlformats.org/presentationml/2006/main">
   <p:cSld>
     <p:spTree>
       <p:nvGrpSpPr>
@@ -1552,7 +1572,9 @@
         <p:txBody>
           <a:bodyPr/>
           <a:lstStyle/>
-          <a:p/>
+          <a:p>
+            <a:endParaRPr dirty="0"/>
+          </a:p>
         </p:txBody>
       </p:sp>
       <p:sp>
@@ -1581,7 +1603,7 @@
     </p:spTree>
     <p:extLst>
       <p:ext uri="{BB962C8B-B14F-4D97-AF65-F5344CB8AC3E}">
-        <p14:creationId xmlns:p14="http://schemas.microsoft.com/office/powerpoint/2010/main" val="1024086991"/>
+        <ns2:creationId val="1024086991"/>
       </p:ext>
     </p:extLst>
   </p:cSld>
@@ -1592,7 +1614,7 @@
 </file>
 
 <file path=ppt/notesSlides/notesSlide21.xml><?xml version="1.0" encoding="utf-8"?>
-<p:notes xmlns:a="http://schemas.openxmlformats.org/drawingml/2006/main" xmlns:r="http://schemas.openxmlformats.org/officeDocument/2006/relationships" xmlns:p="http://schemas.openxmlformats.org/presentationml/2006/main">
+<p:notes xmlns:a="http://schemas.openxmlformats.org/drawingml/2006/main" xmlns:ns2="http://schemas.microsoft.com/office/powerpoint/2010/main" xmlns:p="http://schemas.openxmlformats.org/presentationml/2006/main">
   <p:cSld>
     <p:spTree>
       <p:nvGrpSpPr>
@@ -1634,7 +1656,9 @@
         <p:txBody>
           <a:bodyPr/>
           <a:lstStyle/>
-          <a:p/>
+          <a:p>
+            <a:endParaRPr dirty="0"/>
+          </a:p>
         </p:txBody>
       </p:sp>
       <p:sp>
@@ -1663,7 +1687,7 @@
     </p:spTree>
     <p:extLst>
       <p:ext uri="{BB962C8B-B14F-4D97-AF65-F5344CB8AC3E}">
-        <p14:creationId xmlns:p14="http://schemas.microsoft.com/office/powerpoint/2010/main" val="1024086991"/>
+        <ns2:creationId val="1024086991"/>
       </p:ext>
     </p:extLst>
   </p:cSld>
@@ -1674,7 +1698,7 @@
 </file>
 
 <file path=ppt/notesSlides/notesSlide22.xml><?xml version="1.0" encoding="utf-8"?>
-<p:notes xmlns:a="http://schemas.openxmlformats.org/drawingml/2006/main" xmlns:r="http://schemas.openxmlformats.org/officeDocument/2006/relationships" xmlns:p="http://schemas.openxmlformats.org/presentationml/2006/main">
+<p:notes xmlns:a="http://schemas.openxmlformats.org/drawingml/2006/main" xmlns:ns2="http://schemas.microsoft.com/office/powerpoint/2010/main" xmlns:p="http://schemas.openxmlformats.org/presentationml/2006/main">
   <p:cSld>
     <p:spTree>
       <p:nvGrpSpPr>
@@ -1716,7 +1740,9 @@
         <p:txBody>
           <a:bodyPr/>
           <a:lstStyle/>
-          <a:p/>
+          <a:p>
+            <a:endParaRPr dirty="0"/>
+          </a:p>
         </p:txBody>
       </p:sp>
       <p:sp>
@@ -1745,7 +1771,7 @@
     </p:spTree>
     <p:extLst>
       <p:ext uri="{BB962C8B-B14F-4D97-AF65-F5344CB8AC3E}">
-        <p14:creationId xmlns:p14="http://schemas.microsoft.com/office/powerpoint/2010/main" val="1024086991"/>
+        <ns2:creationId val="1024086991"/>
       </p:ext>
     </p:extLst>
   </p:cSld>
@@ -1756,7 +1782,7 @@
 </file>
 
 <file path=ppt/notesSlides/notesSlide23.xml><?xml version="1.0" encoding="utf-8"?>
-<p:notes xmlns:a="http://schemas.openxmlformats.org/drawingml/2006/main" xmlns:r="http://schemas.openxmlformats.org/officeDocument/2006/relationships" xmlns:p="http://schemas.openxmlformats.org/presentationml/2006/main">
+<p:notes xmlns:a="http://schemas.openxmlformats.org/drawingml/2006/main" xmlns:ns2="http://schemas.microsoft.com/office/powerpoint/2010/main" xmlns:p="http://schemas.openxmlformats.org/presentationml/2006/main">
   <p:cSld>
     <p:spTree>
       <p:nvGrpSpPr>
@@ -1798,7 +1824,9 @@
         <p:txBody>
           <a:bodyPr/>
           <a:lstStyle/>
-          <a:p/>
+          <a:p>
+            <a:endParaRPr dirty="0"/>
+          </a:p>
         </p:txBody>
       </p:sp>
       <p:sp>
@@ -1827,7 +1855,7 @@
     </p:spTree>
     <p:extLst>
       <p:ext uri="{BB962C8B-B14F-4D97-AF65-F5344CB8AC3E}">
-        <p14:creationId xmlns:p14="http://schemas.microsoft.com/office/powerpoint/2010/main" val="1024086991"/>
+        <ns2:creationId val="1024086991"/>
       </p:ext>
     </p:extLst>
   </p:cSld>
@@ -1838,7 +1866,7 @@
 </file>
 
 <file path=ppt/notesSlides/notesSlide24.xml><?xml version="1.0" encoding="utf-8"?>
-<p:notes xmlns:a="http://schemas.openxmlformats.org/drawingml/2006/main" xmlns:r="http://schemas.openxmlformats.org/officeDocument/2006/relationships" xmlns:p="http://schemas.openxmlformats.org/presentationml/2006/main">
+<p:notes xmlns:a="http://schemas.openxmlformats.org/drawingml/2006/main" xmlns:ns2="http://schemas.microsoft.com/office/powerpoint/2010/main" xmlns:p="http://schemas.openxmlformats.org/presentationml/2006/main">
   <p:cSld>
     <p:spTree>
       <p:nvGrpSpPr>
@@ -1880,7 +1908,9 @@
         <p:txBody>
           <a:bodyPr/>
           <a:lstStyle/>
-          <a:p/>
+          <a:p>
+            <a:endParaRPr dirty="0"/>
+          </a:p>
         </p:txBody>
       </p:sp>
       <p:sp>
@@ -1909,7 +1939,7 @@
     </p:spTree>
     <p:extLst>
       <p:ext uri="{BB962C8B-B14F-4D97-AF65-F5344CB8AC3E}">
-        <p14:creationId xmlns:p14="http://schemas.microsoft.com/office/powerpoint/2010/main" val="1024086991"/>
+        <ns2:creationId val="1024086991"/>
       </p:ext>
     </p:extLst>
   </p:cSld>
@@ -1920,14 +1950,14 @@
 </file>
 
 <file path=ppt/notesSlides/notesSlide25.xml><?xml version="1.0" encoding="utf-8"?>
-<p:notes xmlns:a="http://schemas.openxmlformats.org/drawingml/2006/main" xmlns:r="http://schemas.openxmlformats.org/officeDocument/2006/relationships" xmlns:p="http://schemas.openxmlformats.org/presentationml/2006/main">
+<p:notes xmlns:a="http://schemas.openxmlformats.org/drawingml/2006/main" xmlns:ns2="http://schemas.microsoft.com/office/drawing/2014/main" xmlns:ns3="http://schemas.microsoft.com/office/powerpoint/2010/main" xmlns:p="http://schemas.openxmlformats.org/presentationml/2006/main">
   <p:cSld>
     <p:spTree>
       <p:nvGrpSpPr>
         <p:cNvPr id="1" name="">
           <a:extLst>
             <a:ext uri="{FF2B5EF4-FFF2-40B4-BE49-F238E27FC236}">
-              <a16:creationId xmlns:a16="http://schemas.microsoft.com/office/drawing/2014/main" id="{DDEB9F56-F112-7D0B-F7D4-F1C480B0ADCB}"/>
+              <ns2:creationId id="{DDEB9F56-F112-7D0B-F7D4-F1C480B0ADCB}"/>
             </a:ext>
           </a:extLst>
         </p:cNvPr>
@@ -1947,7 +1977,7 @@
           <p:cNvPr id="2" name="Slide Image Placeholder 1">
             <a:extLst>
               <a:ext uri="{FF2B5EF4-FFF2-40B4-BE49-F238E27FC236}">
-                <a16:creationId xmlns:a16="http://schemas.microsoft.com/office/drawing/2014/main" id="{E3784FDC-38F0-08C6-C6D6-B35C54DC4DD7}"/>
+                <ns2:creationId id="{E3784FDC-38F0-08C6-C6D6-B35C54DC4DD7}"/>
               </a:ext>
             </a:extLst>
           </p:cNvPr>
@@ -1965,7 +1995,7 @@
           <p:cNvPr id="3" name="Notes Placeholder 2">
             <a:extLst>
               <a:ext uri="{FF2B5EF4-FFF2-40B4-BE49-F238E27FC236}">
-                <a16:creationId xmlns:a16="http://schemas.microsoft.com/office/drawing/2014/main" id="{2E9B89B0-847C-B788-CAE4-74AECFA18B63}"/>
+                <ns2:creationId id="{2E9B89B0-847C-B788-CAE4-74AECFA18B63}"/>
               </a:ext>
             </a:extLst>
           </p:cNvPr>
@@ -1980,7 +2010,9 @@
         <p:txBody>
           <a:bodyPr/>
           <a:lstStyle/>
-          <a:p/>
+          <a:p>
+            <a:endParaRPr dirty="0"/>
+          </a:p>
         </p:txBody>
       </p:sp>
       <p:sp>
@@ -1988,7 +2020,7 @@
           <p:cNvPr id="4" name="Slide Number Placeholder 3">
             <a:extLst>
               <a:ext uri="{FF2B5EF4-FFF2-40B4-BE49-F238E27FC236}">
-                <a16:creationId xmlns:a16="http://schemas.microsoft.com/office/drawing/2014/main" id="{7E440EB0-546D-81B8-5432-6543E8229747}"/>
+                <ns2:creationId id="{7E440EB0-546D-81B8-5432-6543E8229747}"/>
               </a:ext>
             </a:extLst>
           </p:cNvPr>
@@ -2015,7 +2047,7 @@
     </p:spTree>
     <p:extLst>
       <p:ext uri="{BB962C8B-B14F-4D97-AF65-F5344CB8AC3E}">
-        <p14:creationId xmlns:p14="http://schemas.microsoft.com/office/powerpoint/2010/main" val="440358176"/>
+        <ns3:creationId val="440358176"/>
       </p:ext>
     </p:extLst>
   </p:cSld>
@@ -2026,7 +2058,7 @@
 </file>
 
 <file path=ppt/notesSlides/notesSlide26.xml><?xml version="1.0" encoding="utf-8"?>
-<p:notes xmlns:a="http://schemas.openxmlformats.org/drawingml/2006/main" xmlns:r="http://schemas.openxmlformats.org/officeDocument/2006/relationships" xmlns:p="http://schemas.openxmlformats.org/presentationml/2006/main">
+<p:notes xmlns:a="http://schemas.openxmlformats.org/drawingml/2006/main" xmlns:ns2="http://schemas.microsoft.com/office/powerpoint/2010/main" xmlns:p="http://schemas.openxmlformats.org/presentationml/2006/main">
   <p:cSld>
     <p:spTree>
       <p:nvGrpSpPr>
@@ -2068,7 +2100,9 @@
         <p:txBody>
           <a:bodyPr/>
           <a:lstStyle/>
-          <a:p/>
+          <a:p>
+            <a:endParaRPr dirty="0"/>
+          </a:p>
         </p:txBody>
       </p:sp>
       <p:sp>
@@ -2097,7 +2131,7 @@
     </p:spTree>
     <p:extLst>
       <p:ext uri="{BB962C8B-B14F-4D97-AF65-F5344CB8AC3E}">
-        <p14:creationId xmlns:p14="http://schemas.microsoft.com/office/powerpoint/2010/main" val="1024086991"/>
+        <ns2:creationId val="1024086991"/>
       </p:ext>
     </p:extLst>
   </p:cSld>
@@ -2108,7 +2142,7 @@
 </file>
 
 <file path=ppt/notesSlides/notesSlide27.xml><?xml version="1.0" encoding="utf-8"?>
-<p:notes xmlns:a="http://schemas.openxmlformats.org/drawingml/2006/main" xmlns:r="http://schemas.openxmlformats.org/officeDocument/2006/relationships" xmlns:p="http://schemas.openxmlformats.org/presentationml/2006/main">
+<p:notes xmlns:a="http://schemas.openxmlformats.org/drawingml/2006/main" xmlns:ns2="http://schemas.microsoft.com/office/powerpoint/2010/main" xmlns:p="http://schemas.openxmlformats.org/presentationml/2006/main">
   <p:cSld>
     <p:spTree>
       <p:nvGrpSpPr>
@@ -2150,7 +2184,9 @@
         <p:txBody>
           <a:bodyPr/>
           <a:lstStyle/>
-          <a:p/>
+          <a:p>
+            <a:endParaRPr dirty="0"/>
+          </a:p>
         </p:txBody>
       </p:sp>
       <p:sp>
@@ -2179,7 +2215,7 @@
     </p:spTree>
     <p:extLst>
       <p:ext uri="{BB962C8B-B14F-4D97-AF65-F5344CB8AC3E}">
-        <p14:creationId xmlns:p14="http://schemas.microsoft.com/office/powerpoint/2010/main" val="1024086991"/>
+        <ns2:creationId val="1024086991"/>
       </p:ext>
     </p:extLst>
   </p:cSld>
@@ -2190,7 +2226,7 @@
 </file>
 
 <file path=ppt/notesSlides/notesSlide28.xml><?xml version="1.0" encoding="utf-8"?>
-<p:notes xmlns:a="http://schemas.openxmlformats.org/drawingml/2006/main" xmlns:r="http://schemas.openxmlformats.org/officeDocument/2006/relationships" xmlns:p="http://schemas.openxmlformats.org/presentationml/2006/main">
+<p:notes xmlns:a="http://schemas.openxmlformats.org/drawingml/2006/main" xmlns:ns2="http://schemas.microsoft.com/office/powerpoint/2010/main" xmlns:p="http://schemas.openxmlformats.org/presentationml/2006/main">
   <p:cSld>
     <p:spTree>
       <p:nvGrpSpPr>
@@ -2232,7 +2268,9 @@
         <p:txBody>
           <a:bodyPr/>
           <a:lstStyle/>
-          <a:p/>
+          <a:p>
+            <a:endParaRPr dirty="0"/>
+          </a:p>
         </p:txBody>
       </p:sp>
       <p:sp>
@@ -2261,7 +2299,7 @@
     </p:spTree>
     <p:extLst>
       <p:ext uri="{BB962C8B-B14F-4D97-AF65-F5344CB8AC3E}">
-        <p14:creationId xmlns:p14="http://schemas.microsoft.com/office/powerpoint/2010/main" val="1024086991"/>
+        <ns2:creationId val="1024086991"/>
       </p:ext>
     </p:extLst>
   </p:cSld>
@@ -2272,7 +2310,7 @@
 </file>
 
 <file path=ppt/notesSlides/notesSlide29.xml><?xml version="1.0" encoding="utf-8"?>
-<p:notes xmlns:a="http://schemas.openxmlformats.org/drawingml/2006/main" xmlns:r="http://schemas.openxmlformats.org/officeDocument/2006/relationships" xmlns:p="http://schemas.openxmlformats.org/presentationml/2006/main">
+<p:notes xmlns:a="http://schemas.openxmlformats.org/drawingml/2006/main" xmlns:ns2="http://schemas.microsoft.com/office/powerpoint/2010/main" xmlns:p="http://schemas.openxmlformats.org/presentationml/2006/main">
   <p:cSld>
     <p:spTree>
       <p:nvGrpSpPr>
@@ -2314,7 +2352,9 @@
         <p:txBody>
           <a:bodyPr/>
           <a:lstStyle/>
-          <a:p/>
+          <a:p>
+            <a:endParaRPr dirty="0"/>
+          </a:p>
         </p:txBody>
       </p:sp>
       <p:sp>
@@ -2343,7 +2383,7 @@
     </p:spTree>
     <p:extLst>
       <p:ext uri="{BB962C8B-B14F-4D97-AF65-F5344CB8AC3E}">
-        <p14:creationId xmlns:p14="http://schemas.microsoft.com/office/powerpoint/2010/main" val="1024086991"/>
+        <ns2:creationId val="1024086991"/>
       </p:ext>
     </p:extLst>
   </p:cSld>
@@ -2354,7 +2394,7 @@
 </file>
 
 <file path=ppt/notesSlides/notesSlide3.xml><?xml version="1.0" encoding="utf-8"?>
-<p:notes xmlns:a="http://schemas.openxmlformats.org/drawingml/2006/main" xmlns:r="http://schemas.openxmlformats.org/officeDocument/2006/relationships" xmlns:p="http://schemas.openxmlformats.org/presentationml/2006/main">
+<p:notes xmlns:a="http://schemas.openxmlformats.org/drawingml/2006/main" xmlns:ns2="http://schemas.microsoft.com/office/powerpoint/2010/main" xmlns:p="http://schemas.openxmlformats.org/presentationml/2006/main">
   <p:cSld>
     <p:spTree>
       <p:nvGrpSpPr>
@@ -2427,7 +2467,7 @@
     </p:spTree>
     <p:extLst>
       <p:ext uri="{BB962C8B-B14F-4D97-AF65-F5344CB8AC3E}">
-        <p14:creationId xmlns:p14="http://schemas.microsoft.com/office/powerpoint/2010/main" val="1024086991"/>
+        <ns2:creationId val="1024086991"/>
       </p:ext>
     </p:extLst>
   </p:cSld>
@@ -2438,14 +2478,14 @@
 </file>
 
 <file path=ppt/notesSlides/notesSlide30.xml><?xml version="1.0" encoding="utf-8"?>
-<p:notes xmlns:a="http://schemas.openxmlformats.org/drawingml/2006/main" xmlns:r="http://schemas.openxmlformats.org/officeDocument/2006/relationships" xmlns:p="http://schemas.openxmlformats.org/presentationml/2006/main">
+<p:notes xmlns:a="http://schemas.openxmlformats.org/drawingml/2006/main" xmlns:ns2="http://schemas.microsoft.com/office/drawing/2014/main" xmlns:ns3="http://schemas.microsoft.com/office/powerpoint/2010/main" xmlns:p="http://schemas.openxmlformats.org/presentationml/2006/main">
   <p:cSld>
     <p:spTree>
       <p:nvGrpSpPr>
         <p:cNvPr id="1" name="">
           <a:extLst>
             <a:ext uri="{FF2B5EF4-FFF2-40B4-BE49-F238E27FC236}">
-              <a16:creationId xmlns:a16="http://schemas.microsoft.com/office/drawing/2014/main" id="{4ADB6191-DA2B-55F6-7CD9-D3C418627FB2}"/>
+              <ns2:creationId id="{4ADB6191-DA2B-55F6-7CD9-D3C418627FB2}"/>
             </a:ext>
           </a:extLst>
         </p:cNvPr>
@@ -2465,7 +2505,7 @@
           <p:cNvPr id="2" name="Slide Image Placeholder 1">
             <a:extLst>
               <a:ext uri="{FF2B5EF4-FFF2-40B4-BE49-F238E27FC236}">
-                <a16:creationId xmlns:a16="http://schemas.microsoft.com/office/drawing/2014/main" id="{2414F783-6640-03B2-0915-D9DDBA93AB0B}"/>
+                <ns2:creationId id="{2414F783-6640-03B2-0915-D9DDBA93AB0B}"/>
               </a:ext>
             </a:extLst>
           </p:cNvPr>
@@ -2483,7 +2523,7 @@
           <p:cNvPr id="3" name="Notes Placeholder 2">
             <a:extLst>
               <a:ext uri="{FF2B5EF4-FFF2-40B4-BE49-F238E27FC236}">
-                <a16:creationId xmlns:a16="http://schemas.microsoft.com/office/drawing/2014/main" id="{DC113510-CAF0-BFC5-E077-A7AB7ACA015D}"/>
+                <ns2:creationId id="{DC113510-CAF0-BFC5-E077-A7AB7ACA015D}"/>
               </a:ext>
             </a:extLst>
           </p:cNvPr>
@@ -2498,7 +2538,9 @@
         <p:txBody>
           <a:bodyPr/>
           <a:lstStyle/>
-          <a:p/>
+          <a:p>
+            <a:endParaRPr dirty="0"/>
+          </a:p>
         </p:txBody>
       </p:sp>
       <p:sp>
@@ -2506,7 +2548,7 @@
           <p:cNvPr id="4" name="Slide Number Placeholder 3">
             <a:extLst>
               <a:ext uri="{FF2B5EF4-FFF2-40B4-BE49-F238E27FC236}">
-                <a16:creationId xmlns:a16="http://schemas.microsoft.com/office/drawing/2014/main" id="{161B6A67-5D23-FF8C-2757-9F346A869568}"/>
+                <ns2:creationId id="{161B6A67-5D23-FF8C-2757-9F346A869568}"/>
               </a:ext>
             </a:extLst>
           </p:cNvPr>
@@ -2593,7 +2635,7 @@
     </p:spTree>
     <p:extLst>
       <p:ext uri="{BB962C8B-B14F-4D97-AF65-F5344CB8AC3E}">
-        <p14:creationId xmlns:p14="http://schemas.microsoft.com/office/powerpoint/2010/main" val="4280341267"/>
+        <ns3:creationId val="4280341267"/>
       </p:ext>
     </p:extLst>
   </p:cSld>
@@ -2604,7 +2646,7 @@
 </file>
 
 <file path=ppt/notesSlides/notesSlide31.xml><?xml version="1.0" encoding="utf-8"?>
-<p:notes xmlns:a="http://schemas.openxmlformats.org/drawingml/2006/main" xmlns:r="http://schemas.openxmlformats.org/officeDocument/2006/relationships" xmlns:p="http://schemas.openxmlformats.org/presentationml/2006/main">
+<p:notes xmlns:a="http://schemas.openxmlformats.org/drawingml/2006/main" xmlns:ns2="http://schemas.microsoft.com/office/powerpoint/2010/main" xmlns:p="http://schemas.openxmlformats.org/presentationml/2006/main">
   <p:cSld>
     <p:spTree>
       <p:nvGrpSpPr>
@@ -2646,7 +2688,9 @@
         <p:txBody>
           <a:bodyPr/>
           <a:lstStyle/>
-          <a:p/>
+          <a:p>
+            <a:endParaRPr dirty="0"/>
+          </a:p>
         </p:txBody>
       </p:sp>
       <p:sp>
@@ -2675,7 +2719,7 @@
     </p:spTree>
     <p:extLst>
       <p:ext uri="{BB962C8B-B14F-4D97-AF65-F5344CB8AC3E}">
-        <p14:creationId xmlns:p14="http://schemas.microsoft.com/office/powerpoint/2010/main" val="1024086991"/>
+        <ns2:creationId val="1024086991"/>
       </p:ext>
     </p:extLst>
   </p:cSld>
@@ -2686,7 +2730,7 @@
 </file>
 
 <file path=ppt/notesSlides/notesSlide32.xml><?xml version="1.0" encoding="utf-8"?>
-<p:notes xmlns:a="http://schemas.openxmlformats.org/drawingml/2006/main" xmlns:r="http://schemas.openxmlformats.org/officeDocument/2006/relationships" xmlns:p="http://schemas.openxmlformats.org/presentationml/2006/main">
+<p:notes xmlns:a="http://schemas.openxmlformats.org/drawingml/2006/main" xmlns:ns2="http://schemas.microsoft.com/office/powerpoint/2010/main" xmlns:p="http://schemas.openxmlformats.org/presentationml/2006/main">
   <p:cSld>
     <p:spTree>
       <p:nvGrpSpPr>
@@ -2728,7 +2772,9 @@
         <p:txBody>
           <a:bodyPr/>
           <a:lstStyle/>
-          <a:p/>
+          <a:p>
+            <a:endParaRPr dirty="0"/>
+          </a:p>
         </p:txBody>
       </p:sp>
       <p:sp>
@@ -2757,7 +2803,7 @@
     </p:spTree>
     <p:extLst>
       <p:ext uri="{BB962C8B-B14F-4D97-AF65-F5344CB8AC3E}">
-        <p14:creationId xmlns:p14="http://schemas.microsoft.com/office/powerpoint/2010/main" val="1024086991"/>
+        <ns2:creationId val="1024086991"/>
       </p:ext>
     </p:extLst>
   </p:cSld>
@@ -2768,7 +2814,7 @@
 </file>
 
 <file path=ppt/notesSlides/notesSlide33.xml><?xml version="1.0" encoding="utf-8"?>
-<p:notes xmlns:a="http://schemas.openxmlformats.org/drawingml/2006/main" xmlns:r="http://schemas.openxmlformats.org/officeDocument/2006/relationships" xmlns:p="http://schemas.openxmlformats.org/presentationml/2006/main">
+<p:notes xmlns:a="http://schemas.openxmlformats.org/drawingml/2006/main" xmlns:ns2="http://schemas.microsoft.com/office/powerpoint/2010/main" xmlns:p="http://schemas.openxmlformats.org/presentationml/2006/main">
   <p:cSld>
     <p:spTree>
       <p:nvGrpSpPr>
@@ -2810,7 +2856,9 @@
         <p:txBody>
           <a:bodyPr/>
           <a:lstStyle/>
-          <a:p/>
+          <a:p>
+            <a:endParaRPr dirty="0"/>
+          </a:p>
         </p:txBody>
       </p:sp>
       <p:sp>
@@ -2839,7 +2887,7 @@
     </p:spTree>
     <p:extLst>
       <p:ext uri="{BB962C8B-B14F-4D97-AF65-F5344CB8AC3E}">
-        <p14:creationId xmlns:p14="http://schemas.microsoft.com/office/powerpoint/2010/main" val="1024086991"/>
+        <ns2:creationId val="1024086991"/>
       </p:ext>
     </p:extLst>
   </p:cSld>
@@ -2850,7 +2898,7 @@
 </file>
 
 <file path=ppt/notesSlides/notesSlide34.xml><?xml version="1.0" encoding="utf-8"?>
-<p:notes xmlns:a="http://schemas.openxmlformats.org/drawingml/2006/main" xmlns:r="http://schemas.openxmlformats.org/officeDocument/2006/relationships" xmlns:p="http://schemas.openxmlformats.org/presentationml/2006/main">
+<p:notes xmlns:a="http://schemas.openxmlformats.org/drawingml/2006/main" xmlns:ns2="http://schemas.microsoft.com/office/powerpoint/2010/main" xmlns:p="http://schemas.openxmlformats.org/presentationml/2006/main">
   <p:cSld>
     <p:spTree>
       <p:nvGrpSpPr>
@@ -2892,7 +2940,9 @@
         <p:txBody>
           <a:bodyPr/>
           <a:lstStyle/>
-          <a:p/>
+          <a:p>
+            <a:endParaRPr dirty="0"/>
+          </a:p>
         </p:txBody>
       </p:sp>
       <p:sp>
@@ -2921,7 +2971,7 @@
     </p:spTree>
     <p:extLst>
       <p:ext uri="{BB962C8B-B14F-4D97-AF65-F5344CB8AC3E}">
-        <p14:creationId xmlns:p14="http://schemas.microsoft.com/office/powerpoint/2010/main" val="1024086991"/>
+        <ns2:creationId val="1024086991"/>
       </p:ext>
     </p:extLst>
   </p:cSld>
@@ -2932,7 +2982,7 @@
 </file>
 
 <file path=ppt/notesSlides/notesSlide35.xml><?xml version="1.0" encoding="utf-8"?>
-<p:notes xmlns:a="http://schemas.openxmlformats.org/drawingml/2006/main" xmlns:r="http://schemas.openxmlformats.org/officeDocument/2006/relationships" xmlns:p="http://schemas.openxmlformats.org/presentationml/2006/main">
+<p:notes xmlns:a="http://schemas.openxmlformats.org/drawingml/2006/main" xmlns:ns2="http://schemas.microsoft.com/office/powerpoint/2010/main" xmlns:p="http://schemas.openxmlformats.org/presentationml/2006/main">
   <p:cSld>
     <p:spTree>
       <p:nvGrpSpPr>
@@ -2974,7 +3024,9 @@
         <p:txBody>
           <a:bodyPr/>
           <a:lstStyle/>
-          <a:p/>
+          <a:p>
+            <a:endParaRPr dirty="0"/>
+          </a:p>
         </p:txBody>
       </p:sp>
       <p:sp>
@@ -3003,7 +3055,7 @@
     </p:spTree>
     <p:extLst>
       <p:ext uri="{BB962C8B-B14F-4D97-AF65-F5344CB8AC3E}">
-        <p14:creationId xmlns:p14="http://schemas.microsoft.com/office/powerpoint/2010/main" val="1024086991"/>
+        <ns2:creationId val="1024086991"/>
       </p:ext>
     </p:extLst>
   </p:cSld>
@@ -3014,7 +3066,7 @@
 </file>
 
 <file path=ppt/notesSlides/notesSlide36.xml><?xml version="1.0" encoding="utf-8"?>
-<p:notes xmlns:a="http://schemas.openxmlformats.org/drawingml/2006/main" xmlns:r="http://schemas.openxmlformats.org/officeDocument/2006/relationships" xmlns:p="http://schemas.openxmlformats.org/presentationml/2006/main">
+<p:notes xmlns:a="http://schemas.openxmlformats.org/drawingml/2006/main" xmlns:ns2="http://schemas.microsoft.com/office/powerpoint/2010/main" xmlns:p="http://schemas.openxmlformats.org/presentationml/2006/main">
   <p:cSld>
     <p:spTree>
       <p:nvGrpSpPr>
@@ -3056,7 +3108,9 @@
         <p:txBody>
           <a:bodyPr/>
           <a:lstStyle/>
-          <a:p/>
+          <a:p>
+            <a:endParaRPr dirty="0"/>
+          </a:p>
         </p:txBody>
       </p:sp>
       <p:sp>
@@ -3085,7 +3139,7 @@
     </p:spTree>
     <p:extLst>
       <p:ext uri="{BB962C8B-B14F-4D97-AF65-F5344CB8AC3E}">
-        <p14:creationId xmlns:p14="http://schemas.microsoft.com/office/powerpoint/2010/main" val="1024086991"/>
+        <ns2:creationId val="1024086991"/>
       </p:ext>
     </p:extLst>
   </p:cSld>
@@ -3096,14 +3150,14 @@
 </file>
 
 <file path=ppt/notesSlides/notesSlide37.xml><?xml version="1.0" encoding="utf-8"?>
-<p:notes xmlns:a="http://schemas.openxmlformats.org/drawingml/2006/main" xmlns:r="http://schemas.openxmlformats.org/officeDocument/2006/relationships" xmlns:p="http://schemas.openxmlformats.org/presentationml/2006/main">
+<p:notes xmlns:a="http://schemas.openxmlformats.org/drawingml/2006/main" xmlns:ns2="http://schemas.microsoft.com/office/drawing/2014/main" xmlns:ns3="http://schemas.microsoft.com/office/powerpoint/2010/main" xmlns:p="http://schemas.openxmlformats.org/presentationml/2006/main">
   <p:cSld>
     <p:spTree>
       <p:nvGrpSpPr>
         <p:cNvPr id="1" name="">
           <a:extLst>
             <a:ext uri="{FF2B5EF4-FFF2-40B4-BE49-F238E27FC236}">
-              <a16:creationId xmlns:a16="http://schemas.microsoft.com/office/drawing/2014/main" id="{12108790-7179-F728-C66E-CD0DCB946AC8}"/>
+              <ns2:creationId id="{12108790-7179-F728-C66E-CD0DCB946AC8}"/>
             </a:ext>
           </a:extLst>
         </p:cNvPr>
@@ -3123,7 +3177,7 @@
           <p:cNvPr id="2" name="Slide Image Placeholder 1">
             <a:extLst>
               <a:ext uri="{FF2B5EF4-FFF2-40B4-BE49-F238E27FC236}">
-                <a16:creationId xmlns:a16="http://schemas.microsoft.com/office/drawing/2014/main" id="{2D2C3F19-DDA4-EB82-DABF-D0DE38AAA24F}"/>
+                <ns2:creationId id="{2D2C3F19-DDA4-EB82-DABF-D0DE38AAA24F}"/>
               </a:ext>
             </a:extLst>
           </p:cNvPr>
@@ -3141,7 +3195,7 @@
           <p:cNvPr id="3" name="Notes Placeholder 2">
             <a:extLst>
               <a:ext uri="{FF2B5EF4-FFF2-40B4-BE49-F238E27FC236}">
-                <a16:creationId xmlns:a16="http://schemas.microsoft.com/office/drawing/2014/main" id="{0FD01960-561E-56BC-DEF7-4125E24C3C44}"/>
+                <ns2:creationId id="{0FD01960-561E-56BC-DEF7-4125E24C3C44}"/>
               </a:ext>
             </a:extLst>
           </p:cNvPr>
@@ -3156,7 +3210,9 @@
         <p:txBody>
           <a:bodyPr/>
           <a:lstStyle/>
-          <a:p/>
+          <a:p>
+            <a:endParaRPr dirty="0"/>
+          </a:p>
         </p:txBody>
       </p:sp>
       <p:sp>
@@ -3164,7 +3220,7 @@
           <p:cNvPr id="4" name="Slide Number Placeholder 3">
             <a:extLst>
               <a:ext uri="{FF2B5EF4-FFF2-40B4-BE49-F238E27FC236}">
-                <a16:creationId xmlns:a16="http://schemas.microsoft.com/office/drawing/2014/main" id="{7D5A62FE-E20F-610A-C21B-717744C895F4}"/>
+                <ns2:creationId id="{7D5A62FE-E20F-610A-C21B-717744C895F4}"/>
               </a:ext>
             </a:extLst>
           </p:cNvPr>
@@ -3251,7 +3307,7 @@
     </p:spTree>
     <p:extLst>
       <p:ext uri="{BB962C8B-B14F-4D97-AF65-F5344CB8AC3E}">
-        <p14:creationId xmlns:p14="http://schemas.microsoft.com/office/powerpoint/2010/main" val="2014617930"/>
+        <ns3:creationId val="2014617930"/>
       </p:ext>
     </p:extLst>
   </p:cSld>
@@ -3262,7 +3318,7 @@
 </file>
 
 <file path=ppt/notesSlides/notesSlide38.xml><?xml version="1.0" encoding="utf-8"?>
-<p:notes xmlns:a="http://schemas.openxmlformats.org/drawingml/2006/main" xmlns:r="http://schemas.openxmlformats.org/officeDocument/2006/relationships" xmlns:p="http://schemas.openxmlformats.org/presentationml/2006/main">
+<p:notes xmlns:a="http://schemas.openxmlformats.org/drawingml/2006/main" xmlns:ns2="http://schemas.microsoft.com/office/powerpoint/2010/main" xmlns:p="http://schemas.openxmlformats.org/presentationml/2006/main">
   <p:cSld>
     <p:spTree>
       <p:nvGrpSpPr>
@@ -3304,7 +3360,9 @@
         <p:txBody>
           <a:bodyPr/>
           <a:lstStyle/>
-          <a:p/>
+          <a:p>
+            <a:endParaRPr dirty="0"/>
+          </a:p>
         </p:txBody>
       </p:sp>
       <p:sp>
@@ -3333,7 +3391,7 @@
     </p:spTree>
     <p:extLst>
       <p:ext uri="{BB962C8B-B14F-4D97-AF65-F5344CB8AC3E}">
-        <p14:creationId xmlns:p14="http://schemas.microsoft.com/office/powerpoint/2010/main" val="1024086991"/>
+        <ns2:creationId val="1024086991"/>
       </p:ext>
     </p:extLst>
   </p:cSld>
@@ -3344,14 +3402,14 @@
 </file>
 
 <file path=ppt/notesSlides/notesSlide39.xml><?xml version="1.0" encoding="utf-8"?>
-<p:notes xmlns:a="http://schemas.openxmlformats.org/drawingml/2006/main" xmlns:r="http://schemas.openxmlformats.org/officeDocument/2006/relationships" xmlns:p="http://schemas.openxmlformats.org/presentationml/2006/main">
+<p:notes xmlns:a="http://schemas.openxmlformats.org/drawingml/2006/main" xmlns:ns2="http://schemas.microsoft.com/office/drawing/2014/main" xmlns:ns3="http://schemas.microsoft.com/office/powerpoint/2010/main" xmlns:p="http://schemas.openxmlformats.org/presentationml/2006/main">
   <p:cSld>
     <p:spTree>
       <p:nvGrpSpPr>
         <p:cNvPr id="1" name="">
           <a:extLst>
             <a:ext uri="{FF2B5EF4-FFF2-40B4-BE49-F238E27FC236}">
-              <a16:creationId xmlns:a16="http://schemas.microsoft.com/office/drawing/2014/main" id="{8E56279F-FB76-40C7-49AD-D4B1F65B119A}"/>
+              <ns2:creationId id="{8E56279F-FB76-40C7-49AD-D4B1F65B119A}"/>
             </a:ext>
           </a:extLst>
         </p:cNvPr>
@@ -3371,7 +3429,7 @@
           <p:cNvPr id="2" name="Slide Image Placeholder 1">
             <a:extLst>
               <a:ext uri="{FF2B5EF4-FFF2-40B4-BE49-F238E27FC236}">
-                <a16:creationId xmlns:a16="http://schemas.microsoft.com/office/drawing/2014/main" id="{30853ADD-84AD-54A0-D271-179B671E5808}"/>
+                <ns2:creationId id="{30853ADD-84AD-54A0-D271-179B671E5808}"/>
               </a:ext>
             </a:extLst>
           </p:cNvPr>
@@ -3389,7 +3447,7 @@
           <p:cNvPr id="3" name="Notes Placeholder 2">
             <a:extLst>
               <a:ext uri="{FF2B5EF4-FFF2-40B4-BE49-F238E27FC236}">
-                <a16:creationId xmlns:a16="http://schemas.microsoft.com/office/drawing/2014/main" id="{0B4945EC-A12D-F1CD-78B7-E2ACAA89B1A8}"/>
+                <ns2:creationId id="{0B4945EC-A12D-F1CD-78B7-E2ACAA89B1A8}"/>
               </a:ext>
             </a:extLst>
           </p:cNvPr>
@@ -3404,7 +3462,9 @@
         <p:txBody>
           <a:bodyPr/>
           <a:lstStyle/>
-          <a:p/>
+          <a:p>
+            <a:endParaRPr dirty="0"/>
+          </a:p>
         </p:txBody>
       </p:sp>
       <p:sp>
@@ -3412,7 +3472,7 @@
           <p:cNvPr id="4" name="Slide Number Placeholder 3">
             <a:extLst>
               <a:ext uri="{FF2B5EF4-FFF2-40B4-BE49-F238E27FC236}">
-                <a16:creationId xmlns:a16="http://schemas.microsoft.com/office/drawing/2014/main" id="{4E38000A-03CF-5EBD-E626-5CAB7B14F873}"/>
+                <ns2:creationId id="{4E38000A-03CF-5EBD-E626-5CAB7B14F873}"/>
               </a:ext>
             </a:extLst>
           </p:cNvPr>
@@ -3439,7 +3499,7 @@
     </p:spTree>
     <p:extLst>
       <p:ext uri="{BB962C8B-B14F-4D97-AF65-F5344CB8AC3E}">
-        <p14:creationId xmlns:p14="http://schemas.microsoft.com/office/powerpoint/2010/main" val="446077213"/>
+        <ns3:creationId val="446077213"/>
       </p:ext>
     </p:extLst>
   </p:cSld>
@@ -3450,7 +3510,7 @@
 </file>
 
 <file path=ppt/notesSlides/notesSlide4.xml><?xml version="1.0" encoding="utf-8"?>
-<p:notes xmlns:a="http://schemas.openxmlformats.org/drawingml/2006/main" xmlns:r="http://schemas.openxmlformats.org/officeDocument/2006/relationships" xmlns:p="http://schemas.openxmlformats.org/presentationml/2006/main">
+<p:notes xmlns:a="http://schemas.openxmlformats.org/drawingml/2006/main" xmlns:ns2="http://schemas.microsoft.com/office/powerpoint/2010/main" xmlns:p="http://schemas.openxmlformats.org/presentationml/2006/main">
   <p:cSld>
     <p:spTree>
       <p:nvGrpSpPr>
@@ -3492,7 +3552,9 @@
         <p:txBody>
           <a:bodyPr/>
           <a:lstStyle/>
-          <a:p/>
+          <a:p>
+            <a:endParaRPr dirty="0"/>
+          </a:p>
         </p:txBody>
       </p:sp>
       <p:sp>
@@ -3521,7 +3583,7 @@
     </p:spTree>
     <p:extLst>
       <p:ext uri="{BB962C8B-B14F-4D97-AF65-F5344CB8AC3E}">
-        <p14:creationId xmlns:p14="http://schemas.microsoft.com/office/powerpoint/2010/main" val="1024086991"/>
+        <ns2:creationId val="1024086991"/>
       </p:ext>
     </p:extLst>
   </p:cSld>
@@ -3532,7 +3594,7 @@
 </file>
 
 <file path=ppt/notesSlides/notesSlide40.xml><?xml version="1.0" encoding="utf-8"?>
-<p:notes xmlns:a="http://schemas.openxmlformats.org/drawingml/2006/main" xmlns:r="http://schemas.openxmlformats.org/officeDocument/2006/relationships" xmlns:p="http://schemas.openxmlformats.org/presentationml/2006/main">
+<p:notes xmlns:a="http://schemas.openxmlformats.org/drawingml/2006/main" xmlns:ns2="http://schemas.microsoft.com/office/powerpoint/2010/main" xmlns:p="http://schemas.openxmlformats.org/presentationml/2006/main">
   <p:cSld>
     <p:spTree>
       <p:nvGrpSpPr>
@@ -3574,7 +3636,9 @@
         <p:txBody>
           <a:bodyPr/>
           <a:lstStyle/>
-          <a:p/>
+          <a:p>
+            <a:endParaRPr dirty="0"/>
+          </a:p>
         </p:txBody>
       </p:sp>
       <p:sp>
@@ -3603,7 +3667,7 @@
     </p:spTree>
     <p:extLst>
       <p:ext uri="{BB962C8B-B14F-4D97-AF65-F5344CB8AC3E}">
-        <p14:creationId xmlns:p14="http://schemas.microsoft.com/office/powerpoint/2010/main" val="1024086991"/>
+        <ns2:creationId val="1024086991"/>
       </p:ext>
     </p:extLst>
   </p:cSld>
@@ -3614,7 +3678,7 @@
 </file>
 
 <file path=ppt/notesSlides/notesSlide41.xml><?xml version="1.0" encoding="utf-8"?>
-<p:notes xmlns:a="http://schemas.openxmlformats.org/drawingml/2006/main" xmlns:r="http://schemas.openxmlformats.org/officeDocument/2006/relationships" xmlns:p="http://schemas.openxmlformats.org/presentationml/2006/main" showMasterSp="0" showMasterPhAnim="0">
+<p:notes xmlns:a="http://schemas.openxmlformats.org/drawingml/2006/main" xmlns:p="http://schemas.openxmlformats.org/presentationml/2006/main" showMasterSp="0" showMasterPhAnim="0">
   <p:cSld>
     <p:spTree>
       <p:nvGrpSpPr>
@@ -3709,7 +3773,9 @@
             <a:noAutofit/>
           </a:bodyPr>
           <a:lstStyle/>
-          <a:p/>
+          <a:p>
+            <a:endParaRPr dirty="0"/>
+          </a:p>
         </p:txBody>
       </p:sp>
     </p:spTree>
@@ -3721,7 +3787,7 @@
 </file>
 
 <file path=ppt/notesSlides/notesSlide5.xml><?xml version="1.0" encoding="utf-8"?>
-<p:notes xmlns:a="http://schemas.openxmlformats.org/drawingml/2006/main" xmlns:r="http://schemas.openxmlformats.org/officeDocument/2006/relationships" xmlns:p="http://schemas.openxmlformats.org/presentationml/2006/main">
+<p:notes xmlns:a="http://schemas.openxmlformats.org/drawingml/2006/main" xmlns:ns2="http://schemas.microsoft.com/office/powerpoint/2010/main" xmlns:p="http://schemas.openxmlformats.org/presentationml/2006/main">
   <p:cSld>
     <p:spTree>
       <p:nvGrpSpPr>
@@ -3763,7 +3829,9 @@
         <p:txBody>
           <a:bodyPr/>
           <a:lstStyle/>
-          <a:p/>
+          <a:p>
+            <a:endParaRPr dirty="0"/>
+          </a:p>
         </p:txBody>
       </p:sp>
       <p:sp>
@@ -3792,7 +3860,7 @@
     </p:spTree>
     <p:extLst>
       <p:ext uri="{BB962C8B-B14F-4D97-AF65-F5344CB8AC3E}">
-        <p14:creationId xmlns:p14="http://schemas.microsoft.com/office/powerpoint/2010/main" val="1024086991"/>
+        <ns2:creationId val="1024086991"/>
       </p:ext>
     </p:extLst>
   </p:cSld>
@@ -3803,7 +3871,7 @@
 </file>
 
 <file path=ppt/notesSlides/notesSlide6.xml><?xml version="1.0" encoding="utf-8"?>
-<p:notes xmlns:a="http://schemas.openxmlformats.org/drawingml/2006/main" xmlns:r="http://schemas.openxmlformats.org/officeDocument/2006/relationships" xmlns:p="http://schemas.openxmlformats.org/presentationml/2006/main">
+<p:notes xmlns:a="http://schemas.openxmlformats.org/drawingml/2006/main" xmlns:ns2="http://schemas.microsoft.com/office/powerpoint/2010/main" xmlns:p="http://schemas.openxmlformats.org/presentationml/2006/main">
   <p:cSld>
     <p:spTree>
       <p:nvGrpSpPr>
@@ -3845,7 +3913,9 @@
         <p:txBody>
           <a:bodyPr/>
           <a:lstStyle/>
-          <a:p/>
+          <a:p>
+            <a:endParaRPr dirty="0"/>
+          </a:p>
         </p:txBody>
       </p:sp>
       <p:sp>
@@ -3874,7 +3944,7 @@
     </p:spTree>
     <p:extLst>
       <p:ext uri="{BB962C8B-B14F-4D97-AF65-F5344CB8AC3E}">
-        <p14:creationId xmlns:p14="http://schemas.microsoft.com/office/powerpoint/2010/main" val="1024086991"/>
+        <ns2:creationId val="1024086991"/>
       </p:ext>
     </p:extLst>
   </p:cSld>
@@ -3885,7 +3955,7 @@
 </file>
 
 <file path=ppt/notesSlides/notesSlide7.xml><?xml version="1.0" encoding="utf-8"?>
-<p:notes xmlns:a="http://schemas.openxmlformats.org/drawingml/2006/main" xmlns:r="http://schemas.openxmlformats.org/officeDocument/2006/relationships" xmlns:p="http://schemas.openxmlformats.org/presentationml/2006/main">
+<p:notes xmlns:a="http://schemas.openxmlformats.org/drawingml/2006/main" xmlns:ns2="http://schemas.microsoft.com/office/powerpoint/2010/main" xmlns:p="http://schemas.openxmlformats.org/presentationml/2006/main">
   <p:cSld>
     <p:spTree>
       <p:nvGrpSpPr>
@@ -3927,7 +3997,9 @@
         <p:txBody>
           <a:bodyPr/>
           <a:lstStyle/>
-          <a:p/>
+          <a:p>
+            <a:endParaRPr dirty="0"/>
+          </a:p>
         </p:txBody>
       </p:sp>
       <p:sp>
@@ -3956,7 +4028,7 @@
     </p:spTree>
     <p:extLst>
       <p:ext uri="{BB962C8B-B14F-4D97-AF65-F5344CB8AC3E}">
-        <p14:creationId xmlns:p14="http://schemas.microsoft.com/office/powerpoint/2010/main" val="1024086991"/>
+        <ns2:creationId val="1024086991"/>
       </p:ext>
     </p:extLst>
   </p:cSld>
@@ -3967,7 +4039,7 @@
 </file>
 
 <file path=ppt/notesSlides/notesSlide8.xml><?xml version="1.0" encoding="utf-8"?>
-<p:notes xmlns:a="http://schemas.openxmlformats.org/drawingml/2006/main" xmlns:r="http://schemas.openxmlformats.org/officeDocument/2006/relationships" xmlns:p="http://schemas.openxmlformats.org/presentationml/2006/main">
+<p:notes xmlns:a="http://schemas.openxmlformats.org/drawingml/2006/main" xmlns:ns2="http://schemas.microsoft.com/office/powerpoint/2010/main" xmlns:p="http://schemas.openxmlformats.org/presentationml/2006/main">
   <p:cSld>
     <p:spTree>
       <p:nvGrpSpPr>
@@ -4009,7 +4081,9 @@
         <p:txBody>
           <a:bodyPr/>
           <a:lstStyle/>
-          <a:p/>
+          <a:p>
+            <a:endParaRPr dirty="0"/>
+          </a:p>
         </p:txBody>
       </p:sp>
       <p:sp>
@@ -4038,7 +4112,7 @@
     </p:spTree>
     <p:extLst>
       <p:ext uri="{BB962C8B-B14F-4D97-AF65-F5344CB8AC3E}">
-        <p14:creationId xmlns:p14="http://schemas.microsoft.com/office/powerpoint/2010/main" val="1024086991"/>
+        <ns2:creationId val="1024086991"/>
       </p:ext>
     </p:extLst>
   </p:cSld>
@@ -4049,7 +4123,7 @@
 </file>
 
 <file path=ppt/notesSlides/notesSlide9.xml><?xml version="1.0" encoding="utf-8"?>
-<p:notes xmlns:a="http://schemas.openxmlformats.org/drawingml/2006/main" xmlns:r="http://schemas.openxmlformats.org/officeDocument/2006/relationships" xmlns:p="http://schemas.openxmlformats.org/presentationml/2006/main">
+<p:notes xmlns:a="http://schemas.openxmlformats.org/drawingml/2006/main" xmlns:ns2="http://schemas.microsoft.com/office/powerpoint/2010/main" xmlns:p="http://schemas.openxmlformats.org/presentationml/2006/main">
   <p:cSld>
     <p:spTree>
       <p:nvGrpSpPr>
@@ -4091,7 +4165,9 @@
         <p:txBody>
           <a:bodyPr/>
           <a:lstStyle/>
-          <a:p/>
+          <a:p>
+            <a:endParaRPr dirty="0"/>
+          </a:p>
         </p:txBody>
       </p:sp>
       <p:sp>
@@ -4120,7 +4196,7 @@
     </p:spTree>
     <p:extLst>
       <p:ext uri="{BB962C8B-B14F-4D97-AF65-F5344CB8AC3E}">
-        <p14:creationId xmlns:p14="http://schemas.microsoft.com/office/powerpoint/2010/main" val="1024086991"/>
+        <ns2:creationId val="1024086991"/>
       </p:ext>
     </p:extLst>
   </p:cSld>
